--- a/slides/Lecture_Chapter03.pptx
+++ b/slides/Lecture_Chapter03.pptx
@@ -300,7 +300,7 @@
           <a:p>
             <a:fld id="{3E22BF2E-04DA-469E-97C5-BB68A0368813}" type="datetimeFigureOut">
               <a:rPr lang="en-US" smtClean="0"/>
-              <a:t>9/18/2025</a:t>
+              <a:t>11/29/2025</a:t>
             </a:fld>
             <a:endParaRPr lang="en-US"/>
           </a:p>
@@ -498,7 +498,7 @@
           <a:p>
             <a:fld id="{3E22BF2E-04DA-469E-97C5-BB68A0368813}" type="datetimeFigureOut">
               <a:rPr lang="en-US" smtClean="0"/>
-              <a:t>9/18/2025</a:t>
+              <a:t>11/29/2025</a:t>
             </a:fld>
             <a:endParaRPr lang="en-US"/>
           </a:p>
@@ -706,7 +706,7 @@
           <a:p>
             <a:fld id="{3E22BF2E-04DA-469E-97C5-BB68A0368813}" type="datetimeFigureOut">
               <a:rPr lang="en-US" smtClean="0"/>
-              <a:t>9/18/2025</a:t>
+              <a:t>11/29/2025</a:t>
             </a:fld>
             <a:endParaRPr lang="en-US"/>
           </a:p>
@@ -914,7 +914,7 @@
           <a:p>
             <a:fld id="{3E22BF2E-04DA-469E-97C5-BB68A0368813}" type="datetimeFigureOut">
               <a:rPr lang="en-US" smtClean="0"/>
-              <a:t>9/18/2025</a:t>
+              <a:t>11/29/2025</a:t>
             </a:fld>
             <a:endParaRPr lang="en-US"/>
           </a:p>
@@ -1189,7 +1189,7 @@
           <a:p>
             <a:fld id="{3E22BF2E-04DA-469E-97C5-BB68A0368813}" type="datetimeFigureOut">
               <a:rPr lang="en-US" smtClean="0"/>
-              <a:t>9/18/2025</a:t>
+              <a:t>11/29/2025</a:t>
             </a:fld>
             <a:endParaRPr lang="en-US"/>
           </a:p>
@@ -1454,7 +1454,7 @@
           <a:p>
             <a:fld id="{3E22BF2E-04DA-469E-97C5-BB68A0368813}" type="datetimeFigureOut">
               <a:rPr lang="en-US" smtClean="0"/>
-              <a:t>9/18/2025</a:t>
+              <a:t>11/29/2025</a:t>
             </a:fld>
             <a:endParaRPr lang="en-US"/>
           </a:p>
@@ -1866,7 +1866,7 @@
           <a:p>
             <a:fld id="{3E22BF2E-04DA-469E-97C5-BB68A0368813}" type="datetimeFigureOut">
               <a:rPr lang="en-US" smtClean="0"/>
-              <a:t>9/18/2025</a:t>
+              <a:t>11/29/2025</a:t>
             </a:fld>
             <a:endParaRPr lang="en-US"/>
           </a:p>
@@ -2007,7 +2007,7 @@
           <a:p>
             <a:fld id="{3E22BF2E-04DA-469E-97C5-BB68A0368813}" type="datetimeFigureOut">
               <a:rPr lang="en-US" smtClean="0"/>
-              <a:t>9/18/2025</a:t>
+              <a:t>11/29/2025</a:t>
             </a:fld>
             <a:endParaRPr lang="en-US"/>
           </a:p>
@@ -2120,7 +2120,7 @@
           <a:p>
             <a:fld id="{3E22BF2E-04DA-469E-97C5-BB68A0368813}" type="datetimeFigureOut">
               <a:rPr lang="en-US" smtClean="0"/>
-              <a:t>9/18/2025</a:t>
+              <a:t>11/29/2025</a:t>
             </a:fld>
             <a:endParaRPr lang="en-US"/>
           </a:p>
@@ -2431,7 +2431,7 @@
           <a:p>
             <a:fld id="{3E22BF2E-04DA-469E-97C5-BB68A0368813}" type="datetimeFigureOut">
               <a:rPr lang="en-US" smtClean="0"/>
-              <a:t>9/18/2025</a:t>
+              <a:t>11/29/2025</a:t>
             </a:fld>
             <a:endParaRPr lang="en-US"/>
           </a:p>
@@ -2719,7 +2719,7 @@
           <a:p>
             <a:fld id="{3E22BF2E-04DA-469E-97C5-BB68A0368813}" type="datetimeFigureOut">
               <a:rPr lang="en-US" smtClean="0"/>
-              <a:t>9/18/2025</a:t>
+              <a:t>11/29/2025</a:t>
             </a:fld>
             <a:endParaRPr lang="en-US"/>
           </a:p>
@@ -2960,7 +2960,7 @@
           <a:p>
             <a:fld id="{3E22BF2E-04DA-469E-97C5-BB68A0368813}" type="datetimeFigureOut">
               <a:rPr lang="en-US" smtClean="0"/>
-              <a:t>9/18/2025</a:t>
+              <a:t>11/29/2025</a:t>
             </a:fld>
             <a:endParaRPr lang="en-US"/>
           </a:p>
@@ -3937,6 +3937,53 @@
           </a:prstGeom>
         </p:spPr>
       </p:pic>
+      <p:pic>
+        <p:nvPicPr>
+          <p:cNvPr id="6" name="Picture 4">
+            <a:extLst>
+              <a:ext uri="{FF2B5EF4-FFF2-40B4-BE49-F238E27FC236}">
+                <a16:creationId xmlns:a16="http://schemas.microsoft.com/office/drawing/2014/main" id="{A9F9786C-76AC-22A8-2028-BB0A9E3784F6}"/>
+              </a:ext>
+            </a:extLst>
+          </p:cNvPr>
+          <p:cNvPicPr>
+            <a:picLocks noChangeAspect="1" noChangeArrowheads="1"/>
+          </p:cNvPicPr>
+          <p:nvPr/>
+        </p:nvPicPr>
+        <p:blipFill>
+          <a:blip r:embed="rId5">
+            <a:extLst>
+              <a:ext uri="{28A0092B-C50C-407E-A947-70E740481C1C}">
+                <a14:useLocalDpi xmlns:a14="http://schemas.microsoft.com/office/drawing/2010/main" val="0"/>
+              </a:ext>
+            </a:extLst>
+          </a:blip>
+          <a:srcRect/>
+          <a:stretch>
+            <a:fillRect/>
+          </a:stretch>
+        </p:blipFill>
+        <p:spPr bwMode="auto">
+          <a:xfrm>
+            <a:off x="7987456" y="125210"/>
+            <a:ext cx="4182403" cy="1000945"/>
+          </a:xfrm>
+          <a:prstGeom prst="rect">
+            <a:avLst/>
+          </a:prstGeom>
+          <a:noFill/>
+          <a:extLst>
+            <a:ext uri="{909E8E84-426E-40DD-AFC4-6F175D3DCCD1}">
+              <a14:hiddenFill xmlns:a14="http://schemas.microsoft.com/office/drawing/2010/main">
+                <a:solidFill>
+                  <a:srgbClr val="FFFFFF"/>
+                </a:solidFill>
+              </a14:hiddenFill>
+            </a:ext>
+          </a:extLst>
+        </p:spPr>
+      </p:pic>
     </p:spTree>
     <p:extLst>
       <p:ext uri="{BB962C8B-B14F-4D97-AF65-F5344CB8AC3E}">

--- a/slides/Lecture_Chapter03.pptx
+++ b/slides/Lecture_Chapter03.pptx
@@ -5,7 +5,7 @@
     <p:sldMasterId id="2147483648" r:id="rId1"/>
   </p:sldMasterIdLst>
   <p:notesMasterIdLst>
-    <p:notesMasterId r:id="rId28"/>
+    <p:notesMasterId r:id="rId29"/>
   </p:notesMasterIdLst>
   <p:sldIdLst>
     <p:sldId id="256" r:id="rId2"/>
@@ -23,17 +23,18 @@
     <p:sldId id="360" r:id="rId14"/>
     <p:sldId id="383" r:id="rId15"/>
     <p:sldId id="359" r:id="rId16"/>
-    <p:sldId id="474" r:id="rId17"/>
-    <p:sldId id="475" r:id="rId18"/>
-    <p:sldId id="362" r:id="rId19"/>
-    <p:sldId id="385" r:id="rId20"/>
-    <p:sldId id="386" r:id="rId21"/>
-    <p:sldId id="361" r:id="rId22"/>
-    <p:sldId id="384" r:id="rId23"/>
-    <p:sldId id="364" r:id="rId24"/>
-    <p:sldId id="365" r:id="rId25"/>
-    <p:sldId id="366" r:id="rId26"/>
-    <p:sldId id="367" r:id="rId27"/>
+    <p:sldId id="476" r:id="rId17"/>
+    <p:sldId id="474" r:id="rId18"/>
+    <p:sldId id="475" r:id="rId19"/>
+    <p:sldId id="362" r:id="rId20"/>
+    <p:sldId id="385" r:id="rId21"/>
+    <p:sldId id="386" r:id="rId22"/>
+    <p:sldId id="361" r:id="rId23"/>
+    <p:sldId id="384" r:id="rId24"/>
+    <p:sldId id="364" r:id="rId25"/>
+    <p:sldId id="365" r:id="rId26"/>
+    <p:sldId id="366" r:id="rId27"/>
+    <p:sldId id="367" r:id="rId28"/>
   </p:sldIdLst>
   <p:sldSz cx="12192000" cy="6858000"/>
   <p:notesSz cx="6858000" cy="9144000"/>
@@ -152,6 +153,7 @@
             <p14:sldId id="360"/>
             <p14:sldId id="383"/>
             <p14:sldId id="359"/>
+            <p14:sldId id="476"/>
             <p14:sldId id="474"/>
             <p14:sldId id="475"/>
             <p14:sldId id="362"/>
@@ -256,7 +258,7 @@
           <a:p>
             <a:fld id="{0E2397CE-1729-4F80-8FF6-27D57F1BB015}" type="datetimeFigureOut">
               <a:rPr lang="en-US" smtClean="0"/>
-              <a:t>1/8/2026</a:t>
+              <a:t>1/9/2026</a:t>
             </a:fld>
             <a:endParaRPr lang="en-US"/>
           </a:p>
@@ -890,7 +892,7 @@
           <a:p>
             <a:fld id="{3E22BF2E-04DA-469E-97C5-BB68A0368813}" type="datetimeFigureOut">
               <a:rPr lang="en-US" smtClean="0"/>
-              <a:t>1/8/2026</a:t>
+              <a:t>1/9/2026</a:t>
             </a:fld>
             <a:endParaRPr lang="en-US"/>
           </a:p>
@@ -1088,7 +1090,7 @@
           <a:p>
             <a:fld id="{3E22BF2E-04DA-469E-97C5-BB68A0368813}" type="datetimeFigureOut">
               <a:rPr lang="en-US" smtClean="0"/>
-              <a:t>1/8/2026</a:t>
+              <a:t>1/9/2026</a:t>
             </a:fld>
             <a:endParaRPr lang="en-US"/>
           </a:p>
@@ -1296,7 +1298,7 @@
           <a:p>
             <a:fld id="{3E22BF2E-04DA-469E-97C5-BB68A0368813}" type="datetimeFigureOut">
               <a:rPr lang="en-US" smtClean="0"/>
-              <a:t>1/8/2026</a:t>
+              <a:t>1/9/2026</a:t>
             </a:fld>
             <a:endParaRPr lang="en-US"/>
           </a:p>
@@ -1504,7 +1506,7 @@
           <a:p>
             <a:fld id="{3E22BF2E-04DA-469E-97C5-BB68A0368813}" type="datetimeFigureOut">
               <a:rPr lang="en-US" smtClean="0"/>
-              <a:t>1/8/2026</a:t>
+              <a:t>1/9/2026</a:t>
             </a:fld>
             <a:endParaRPr lang="en-US"/>
           </a:p>
@@ -1779,7 +1781,7 @@
           <a:p>
             <a:fld id="{3E22BF2E-04DA-469E-97C5-BB68A0368813}" type="datetimeFigureOut">
               <a:rPr lang="en-US" smtClean="0"/>
-              <a:t>1/8/2026</a:t>
+              <a:t>1/9/2026</a:t>
             </a:fld>
             <a:endParaRPr lang="en-US"/>
           </a:p>
@@ -2044,7 +2046,7 @@
           <a:p>
             <a:fld id="{3E22BF2E-04DA-469E-97C5-BB68A0368813}" type="datetimeFigureOut">
               <a:rPr lang="en-US" smtClean="0"/>
-              <a:t>1/8/2026</a:t>
+              <a:t>1/9/2026</a:t>
             </a:fld>
             <a:endParaRPr lang="en-US"/>
           </a:p>
@@ -2456,7 +2458,7 @@
           <a:p>
             <a:fld id="{3E22BF2E-04DA-469E-97C5-BB68A0368813}" type="datetimeFigureOut">
               <a:rPr lang="en-US" smtClean="0"/>
-              <a:t>1/8/2026</a:t>
+              <a:t>1/9/2026</a:t>
             </a:fld>
             <a:endParaRPr lang="en-US"/>
           </a:p>
@@ -2597,7 +2599,7 @@
           <a:p>
             <a:fld id="{3E22BF2E-04DA-469E-97C5-BB68A0368813}" type="datetimeFigureOut">
               <a:rPr lang="en-US" smtClean="0"/>
-              <a:t>1/8/2026</a:t>
+              <a:t>1/9/2026</a:t>
             </a:fld>
             <a:endParaRPr lang="en-US"/>
           </a:p>
@@ -2710,7 +2712,7 @@
           <a:p>
             <a:fld id="{3E22BF2E-04DA-469E-97C5-BB68A0368813}" type="datetimeFigureOut">
               <a:rPr lang="en-US" smtClean="0"/>
-              <a:t>1/8/2026</a:t>
+              <a:t>1/9/2026</a:t>
             </a:fld>
             <a:endParaRPr lang="en-US"/>
           </a:p>
@@ -3021,7 +3023,7 @@
           <a:p>
             <a:fld id="{3E22BF2E-04DA-469E-97C5-BB68A0368813}" type="datetimeFigureOut">
               <a:rPr lang="en-US" smtClean="0"/>
-              <a:t>1/8/2026</a:t>
+              <a:t>1/9/2026</a:t>
             </a:fld>
             <a:endParaRPr lang="en-US"/>
           </a:p>
@@ -3309,7 +3311,7 @@
           <a:p>
             <a:fld id="{3E22BF2E-04DA-469E-97C5-BB68A0368813}" type="datetimeFigureOut">
               <a:rPr lang="en-US" smtClean="0"/>
-              <a:t>1/8/2026</a:t>
+              <a:t>1/9/2026</a:t>
             </a:fld>
             <a:endParaRPr lang="en-US"/>
           </a:p>
@@ -3550,7 +3552,7 @@
           <a:p>
             <a:fld id="{3E22BF2E-04DA-469E-97C5-BB68A0368813}" type="datetimeFigureOut">
               <a:rPr lang="en-US" smtClean="0"/>
-              <a:t>1/8/2026</a:t>
+              <a:t>1/9/2026</a:t>
             </a:fld>
             <a:endParaRPr lang="en-US"/>
           </a:p>
@@ -6620,8 +6622,8 @@
           </a:p>
         </p:txBody>
       </p:sp>
-      <mc:AlternateContent xmlns:mc="http://schemas.openxmlformats.org/markup-compatibility/2006" xmlns:a14="http://schemas.microsoft.com/office/drawing/2010/main">
-        <mc:Choice Requires="a14">
+      <mc:AlternateContent xmlns:mc="http://schemas.openxmlformats.org/markup-compatibility/2006">
+        <mc:Choice xmlns:a14="http://schemas.microsoft.com/office/drawing/2010/main" Requires="a14">
           <p:sp>
             <p:nvSpPr>
               <p:cNvPr id="3" name="Content Placeholder 2">
@@ -6646,7 +6648,7 @@
             </p:spPr>
             <p:txBody>
               <a:bodyPr>
-                <a:normAutofit fontScale="92500" lnSpcReduction="20000"/>
+                <a:normAutofit/>
               </a:bodyPr>
               <a:lstStyle/>
               <a:p>
@@ -6658,7 +6660,7 @@
                 </a:pPr>
                 <a:r>
                   <a:rPr lang="en-US" sz="2000" dirty="0"/>
-                  <a:t>(Stochastic) </a:t>
+                  <a:t>A (Stochastic) </a:t>
                 </a:r>
                 <a:r>
                   <a:rPr lang="en-US" sz="2000" b="1" dirty="0"/>
@@ -6833,6 +6835,9 @@
                 <a:endParaRPr lang="en-US" sz="2000" dirty="0"/>
               </a:p>
               <a:p>
+                <a:pPr marL="0" indent="0">
+                  <a:buNone/>
+                </a:pPr>
                 <a:endParaRPr lang="en-US" sz="2000" dirty="0"/>
               </a:p>
               <a:p>
@@ -6841,85 +6846,83 @@
                 </a:pPr>
                 <a:r>
                   <a:rPr lang="en-US" sz="2000" b="1" dirty="0"/>
-                  <a:t>Deterministic policy</a:t>
+                  <a:t>Soft policies</a:t>
                 </a:r>
+                <a:endParaRPr lang="en-US" sz="2000" dirty="0"/>
+              </a:p>
+              <a:p>
                 <a:r>
                   <a:rPr lang="en-US" sz="2000" dirty="0"/>
-                  <a:t>: Prescribes for each state a single action.</a:t>
+                  <a:t>A stochastic policy is soft if all </a:t>
                 </a:r>
-              </a:p>
-              <a:p>
-                <a:pPr marL="0" indent="0">
-                  <a:buNone/>
-                </a:pPr>
+                <a14:m>
+                  <m:oMath xmlns:m="http://schemas.openxmlformats.org/officeDocument/2006/math">
+                    <m:r>
+                      <a:rPr lang="en-US" sz="2000" b="0" i="1">
+                        <a:latin typeface="Cambria Math" panose="02040503050406030204" pitchFamily="18" charset="0"/>
+                      </a:rPr>
+                      <m:t>𝜋</m:t>
+                    </m:r>
+                    <m:d>
+                      <m:dPr>
+                        <m:ctrlPr>
+                          <a:rPr lang="en-US" sz="2000" b="0" i="1">
+                            <a:latin typeface="Cambria Math" panose="02040503050406030204" pitchFamily="18" charset="0"/>
+                          </a:rPr>
+                        </m:ctrlPr>
+                      </m:dPr>
+                      <m:e>
+                        <m:r>
+                          <a:rPr lang="en-US" sz="2000" b="0" i="1">
+                            <a:latin typeface="Cambria Math" panose="02040503050406030204" pitchFamily="18" charset="0"/>
+                          </a:rPr>
+                          <m:t>𝑎</m:t>
+                        </m:r>
+                      </m:e>
+                      <m:e>
+                        <m:r>
+                          <a:rPr lang="en-US" sz="2000" b="0" i="1">
+                            <a:latin typeface="Cambria Math" panose="02040503050406030204" pitchFamily="18" charset="0"/>
+                          </a:rPr>
+                          <m:t>𝑠</m:t>
+                        </m:r>
+                      </m:e>
+                    </m:d>
+                    <m:r>
+                      <a:rPr lang="en-US" sz="2000" b="0" i="0" smtClean="0">
+                        <a:latin typeface="Cambria Math" panose="02040503050406030204" pitchFamily="18" charset="0"/>
+                      </a:rPr>
+                      <m:t>&gt;0</m:t>
+                    </m:r>
+                  </m:oMath>
+                </a14:m>
+                <a:r>
+                  <a:rPr lang="en-US" sz="2000" dirty="0"/>
+                  <a:t>.</a:t>
+                </a:r>
                 <a:br>
                   <a:rPr lang="en-US" sz="2000" dirty="0"/>
                 </a:br>
-                <a14:m>
-                  <m:oMathPara xmlns:m="http://schemas.openxmlformats.org/officeDocument/2006/math">
-                    <m:oMathParaPr>
-                      <m:jc m:val="centerGroup"/>
-                    </m:oMathParaPr>
-                    <m:oMath xmlns:m="http://schemas.openxmlformats.org/officeDocument/2006/math">
-                      <m:r>
-                        <a:rPr lang="en-US" sz="2000" b="0" i="1" smtClean="0">
-                          <a:latin typeface="Cambria Math" panose="02040503050406030204" pitchFamily="18" charset="0"/>
-                        </a:rPr>
-                        <m:t>𝑎</m:t>
-                      </m:r>
-                      <m:r>
-                        <a:rPr lang="en-US" sz="2000" b="0" i="1" smtClean="0">
-                          <a:latin typeface="Cambria Math" panose="02040503050406030204" pitchFamily="18" charset="0"/>
-                        </a:rPr>
-                        <m:t>=</m:t>
-                      </m:r>
-                      <m:r>
-                        <a:rPr lang="en-US" sz="2000" b="0" i="1" smtClean="0">
-                          <a:latin typeface="Cambria Math" panose="02040503050406030204" pitchFamily="18" charset="0"/>
-                        </a:rPr>
-                        <m:t>𝜋</m:t>
-                      </m:r>
-                      <m:d>
-                        <m:dPr>
-                          <m:ctrlPr>
-                            <a:rPr lang="en-US" sz="2000" b="0" i="1" smtClean="0">
-                              <a:latin typeface="Cambria Math" panose="02040503050406030204" pitchFamily="18" charset="0"/>
-                            </a:rPr>
-                          </m:ctrlPr>
-                        </m:dPr>
-                        <m:e>
-                          <m:r>
-                            <a:rPr lang="en-US" sz="2000" b="0" i="1" smtClean="0">
-                              <a:latin typeface="Cambria Math" panose="02040503050406030204" pitchFamily="18" charset="0"/>
-                            </a:rPr>
-                            <m:t>𝑠</m:t>
-                          </m:r>
-                        </m:e>
-                      </m:d>
-                    </m:oMath>
-                  </m:oMathPara>
-                </a14:m>
+                <a:r>
+                  <a:rPr lang="en-US" sz="2000" dirty="0"/>
+                  <a:t>I.e., the policy will eventually try all </a:t>
+                </a:r>
+                <a:r>
+                  <a:rPr lang="en-US" sz="2000"/>
+                  <a:t>actions.</a:t>
+                </a:r>
                 <a:endParaRPr lang="en-US" sz="2000" dirty="0"/>
               </a:p>
               <a:p>
                 <a:endParaRPr lang="en-US" sz="2000" dirty="0"/>
               </a:p>
               <a:p>
-                <a:r>
-                  <a:rPr lang="en-US" sz="2000" dirty="0"/>
-                  <a:t>This just means we have a stochastic policy that has a probability of 1 for exactly one action.</a:t>
-                </a:r>
-              </a:p>
-              <a:p>
-                <a:r>
-                  <a:rPr lang="en-US" sz="2000" dirty="0"/>
-                  <a:t>Finite MDPs always have an optimal deterministic policy.</a:t>
-                </a:r>
+                <a:endParaRPr lang="en-US" sz="2000" dirty="0"/>
               </a:p>
             </p:txBody>
           </p:sp>
         </mc:Choice>
-        <mc:Fallback xmlns="">
+        <mc:Fallback>
           <p:sp>
             <p:nvSpPr>
               <p:cNvPr id="3" name="Content Placeholder 2">
@@ -6944,7 +6947,7 @@
               <a:blipFill>
                 <a:blip r:embed="rId2"/>
                 <a:stretch>
-                  <a:fillRect l="-883" b="-128"/>
+                  <a:fillRect l="-972"/>
                 </a:stretch>
               </a:blipFill>
             </p:spPr>
@@ -6963,476 +6966,8 @@
           </p:sp>
         </mc:Fallback>
       </mc:AlternateContent>
-      <p:sp>
-        <p:nvSpPr>
-          <p:cNvPr id="11" name="TextBox 10">
-            <a:extLst>
-              <a:ext uri="{FF2B5EF4-FFF2-40B4-BE49-F238E27FC236}">
-                <a16:creationId xmlns:a16="http://schemas.microsoft.com/office/drawing/2014/main" id="{DD4323CC-305C-C61F-463F-F154AE358C82}"/>
-              </a:ext>
-            </a:extLst>
-          </p:cNvPr>
-          <p:cNvSpPr txBox="1"/>
-          <p:nvPr/>
-        </p:nvSpPr>
-        <p:spPr>
-          <a:xfrm>
-            <a:off x="8671124" y="4140126"/>
-            <a:ext cx="2602993" cy="646331"/>
-          </a:xfrm>
-          <a:prstGeom prst="rect">
-            <a:avLst/>
-          </a:prstGeom>
-          <a:noFill/>
-        </p:spPr>
-        <p:txBody>
-          <a:bodyPr wrap="square" rtlCol="0">
-            <a:spAutoFit/>
-          </a:bodyPr>
-          <a:lstStyle/>
-          <a:p>
-            <a:pPr algn="ctr"/>
-            <a:r>
-              <a:rPr lang="en-US" b="1" dirty="0"/>
-              <a:t>Deterministic Policy </a:t>
-            </a:r>
-            <a:br>
-              <a:rPr lang="en-US" b="1" dirty="0"/>
-            </a:br>
-            <a:r>
-              <a:rPr lang="en-US" b="1" dirty="0"/>
-              <a:t>as a Table</a:t>
-            </a:r>
-          </a:p>
-        </p:txBody>
-      </p:sp>
-      <mc:AlternateContent xmlns:mc="http://schemas.openxmlformats.org/markup-compatibility/2006">
-        <mc:Choice xmlns:a14="http://schemas.microsoft.com/office/drawing/2010/main" Requires="a14">
-          <p:graphicFrame>
-            <p:nvGraphicFramePr>
-              <p:cNvPr id="12" name="Table 11">
-                <a:extLst>
-                  <a:ext uri="{FF2B5EF4-FFF2-40B4-BE49-F238E27FC236}">
-                    <a16:creationId xmlns:a16="http://schemas.microsoft.com/office/drawing/2014/main" id="{9ECBA0F0-A82A-490E-BA7C-2163F25D35D9}"/>
-                  </a:ext>
-                  <a:ext uri="{C183D7F6-B498-43B3-948B-1728B52AA6E4}">
-                    <adec:decorative xmlns:adec="http://schemas.microsoft.com/office/drawing/2017/decorative" val="0"/>
-                  </a:ext>
-                </a:extLst>
-              </p:cNvPr>
-              <p:cNvGraphicFramePr>
-                <a:graphicFrameLocks noGrp="1"/>
-              </p:cNvGraphicFramePr>
-              <p:nvPr>
-                <p:extLst>
-                  <p:ext uri="{D42A27DB-BD31-4B8C-83A1-F6EECF244321}">
-                    <p14:modId xmlns:p14="http://schemas.microsoft.com/office/powerpoint/2010/main" val="4105754428"/>
-                  </p:ext>
-                </p:extLst>
-              </p:nvPr>
-            </p:nvGraphicFramePr>
-            <p:xfrm>
-              <a:off x="9005402" y="4791051"/>
-              <a:ext cx="1934437" cy="1483360"/>
-            </p:xfrm>
-            <a:graphic>
-              <a:graphicData uri="http://schemas.openxmlformats.org/drawingml/2006/table">
-                <a:tbl>
-                  <a:tblPr firstRow="1" bandRow="1">
-                    <a:tableStyleId>{93296810-A885-4BE3-A3E7-6D5BEEA58F35}</a:tableStyleId>
-                  </a:tblPr>
-                  <a:tblGrid>
-                    <a:gridCol w="533400">
-                      <a:extLst>
-                        <a:ext uri="{9D8B030D-6E8A-4147-A177-3AD203B41FA5}">
-                          <a16:colId xmlns:a16="http://schemas.microsoft.com/office/drawing/2014/main" val="3711460689"/>
-                        </a:ext>
-                      </a:extLst>
-                    </a:gridCol>
-                    <a:gridCol w="1401037">
-                      <a:extLst>
-                        <a:ext uri="{9D8B030D-6E8A-4147-A177-3AD203B41FA5}">
-                          <a16:colId xmlns:a16="http://schemas.microsoft.com/office/drawing/2014/main" val="2080107700"/>
-                        </a:ext>
-                      </a:extLst>
-                    </a:gridCol>
-                  </a:tblGrid>
-                  <a:tr h="370840">
-                    <a:tc>
-                      <a:txBody>
-                        <a:bodyPr/>
-                        <a:lstStyle/>
-                        <a:p>
-                          <a:pPr/>
-                          <a14:m>
-                            <m:oMathPara xmlns:m="http://schemas.openxmlformats.org/officeDocument/2006/math">
-                              <m:oMathParaPr>
-                                <m:jc m:val="centerGroup"/>
-                              </m:oMathParaPr>
-                              <m:oMath xmlns:m="http://schemas.openxmlformats.org/officeDocument/2006/math">
-                                <m:r>
-                                  <a:rPr lang="en-US" sz="1400" dirty="0" smtClean="0">
-                                    <a:latin typeface="Cambria Math" panose="02040503050406030204" pitchFamily="18" charset="0"/>
-                                  </a:rPr>
-                                  <m:t>𝑠</m:t>
-                                </m:r>
-                              </m:oMath>
-                            </m:oMathPara>
-                          </a14:m>
-                          <a:endParaRPr lang="en-US" sz="1400" dirty="0"/>
-                        </a:p>
-                      </a:txBody>
-                      <a:tcPr/>
-                    </a:tc>
-                    <a:tc>
-                      <a:txBody>
-                        <a:bodyPr/>
-                        <a:lstStyle/>
-                        <a:p>
-                          <a:r>
-                            <a:rPr lang="en-US" sz="1400" b="1" dirty="0"/>
-                            <a:t>Action </a:t>
-                          </a:r>
-                          <a14:m>
-                            <m:oMath xmlns:m="http://schemas.openxmlformats.org/officeDocument/2006/math">
-                              <m:r>
-                                <a:rPr lang="en-US" sz="1400" i="1" smtClean="0">
-                                  <a:latin typeface="Cambria Math" panose="02040503050406030204" pitchFamily="18" charset="0"/>
-                                </a:rPr>
-                                <m:t>𝜋</m:t>
-                              </m:r>
-                              <m:d>
-                                <m:dPr>
-                                  <m:ctrlPr>
-                                    <a:rPr lang="en-US" sz="1400" i="1">
-                                      <a:latin typeface="Cambria Math" panose="02040503050406030204" pitchFamily="18" charset="0"/>
-                                    </a:rPr>
-                                  </m:ctrlPr>
-                                </m:dPr>
-                                <m:e>
-                                  <m:r>
-                                    <a:rPr lang="en-US" sz="1400" i="1">
-                                      <a:latin typeface="Cambria Math" panose="02040503050406030204" pitchFamily="18" charset="0"/>
-                                    </a:rPr>
-                                    <m:t>𝑠</m:t>
-                                  </m:r>
-                                </m:e>
-                              </m:d>
-                            </m:oMath>
-                          </a14:m>
-                          <a:endParaRPr lang="en-US" sz="1400" dirty="0"/>
-                        </a:p>
-                      </a:txBody>
-                      <a:tcPr/>
-                    </a:tc>
-                    <a:extLst>
-                      <a:ext uri="{0D108BD9-81ED-4DB2-BD59-A6C34878D82A}">
-                        <a16:rowId xmlns:a16="http://schemas.microsoft.com/office/drawing/2014/main" val="2008869826"/>
-                      </a:ext>
-                    </a:extLst>
-                  </a:tr>
-                  <a:tr h="370840">
-                    <a:tc>
-                      <a:txBody>
-                        <a:bodyPr/>
-                        <a:lstStyle/>
-                        <a:p>
-                          <a:r>
-                            <a:rPr lang="en-US" sz="1400" dirty="0"/>
-                            <a:t>(1,1)</a:t>
-                          </a:r>
-                        </a:p>
-                      </a:txBody>
-                      <a:tcPr/>
-                    </a:tc>
-                    <a:tc>
-                      <a:txBody>
-                        <a:bodyPr/>
-                        <a:lstStyle/>
-                        <a:p>
-                          <a:r>
-                            <a:rPr lang="en-US" sz="1400" dirty="0"/>
-                            <a:t>up</a:t>
-                          </a:r>
-                        </a:p>
-                      </a:txBody>
-                      <a:tcPr/>
-                    </a:tc>
-                    <a:extLst>
-                      <a:ext uri="{0D108BD9-81ED-4DB2-BD59-A6C34878D82A}">
-                        <a16:rowId xmlns:a16="http://schemas.microsoft.com/office/drawing/2014/main" val="524805492"/>
-                      </a:ext>
-                    </a:extLst>
-                  </a:tr>
-                  <a:tr h="370840">
-                    <a:tc>
-                      <a:txBody>
-                        <a:bodyPr/>
-                        <a:lstStyle/>
-                        <a:p>
-                          <a:r>
-                            <a:rPr lang="en-US" sz="1400" dirty="0"/>
-                            <a:t>…</a:t>
-                          </a:r>
-                        </a:p>
-                      </a:txBody>
-                      <a:tcPr/>
-                    </a:tc>
-                    <a:tc>
-                      <a:txBody>
-                        <a:bodyPr/>
-                        <a:lstStyle/>
-                        <a:p>
-                          <a:r>
-                            <a:rPr lang="en-US" sz="1400" dirty="0"/>
-                            <a:t>…</a:t>
-                          </a:r>
-                        </a:p>
-                      </a:txBody>
-                      <a:tcPr/>
-                    </a:tc>
-                    <a:extLst>
-                      <a:ext uri="{0D108BD9-81ED-4DB2-BD59-A6C34878D82A}">
-                        <a16:rowId xmlns:a16="http://schemas.microsoft.com/office/drawing/2014/main" val="3725035416"/>
-                      </a:ext>
-                    </a:extLst>
-                  </a:tr>
-                  <a:tr h="370840">
-                    <a:tc>
-                      <a:txBody>
-                        <a:bodyPr/>
-                        <a:lstStyle/>
-                        <a:p>
-                          <a:r>
-                            <a:rPr lang="en-US" sz="1400" dirty="0"/>
-                            <a:t>…</a:t>
-                          </a:r>
-                        </a:p>
-                      </a:txBody>
-                      <a:tcPr/>
-                    </a:tc>
-                    <a:tc>
-                      <a:txBody>
-                        <a:bodyPr/>
-                        <a:lstStyle/>
-                        <a:p>
-                          <a:r>
-                            <a:rPr lang="en-US" sz="1400" dirty="0"/>
-                            <a:t>…</a:t>
-                          </a:r>
-                        </a:p>
-                      </a:txBody>
-                      <a:tcPr/>
-                    </a:tc>
-                    <a:extLst>
-                      <a:ext uri="{0D108BD9-81ED-4DB2-BD59-A6C34878D82A}">
-                        <a16:rowId xmlns:a16="http://schemas.microsoft.com/office/drawing/2014/main" val="868402448"/>
-                      </a:ext>
-                    </a:extLst>
-                  </a:tr>
-                </a:tbl>
-              </a:graphicData>
-            </a:graphic>
-          </p:graphicFrame>
-        </mc:Choice>
-        <mc:Fallback>
-          <p:graphicFrame>
-            <p:nvGraphicFramePr>
-              <p:cNvPr id="12" name="Table 11">
-                <a:extLst>
-                  <a:ext uri="{FF2B5EF4-FFF2-40B4-BE49-F238E27FC236}">
-                    <a16:creationId xmlns:a16="http://schemas.microsoft.com/office/drawing/2014/main" id="{9ECBA0F0-A82A-490E-BA7C-2163F25D35D9}"/>
-                  </a:ext>
-                  <a:ext uri="{C183D7F6-B498-43B3-948B-1728B52AA6E4}">
-                    <adec:decorative xmlns:adec="http://schemas.microsoft.com/office/drawing/2017/decorative" val="0"/>
-                  </a:ext>
-                </a:extLst>
-              </p:cNvPr>
-              <p:cNvGraphicFramePr>
-                <a:graphicFrameLocks noGrp="1"/>
-              </p:cNvGraphicFramePr>
-              <p:nvPr>
-                <p:extLst>
-                  <p:ext uri="{D42A27DB-BD31-4B8C-83A1-F6EECF244321}">
-                    <p14:modId xmlns:p14="http://schemas.microsoft.com/office/powerpoint/2010/main" val="4105754428"/>
-                  </p:ext>
-                </p:extLst>
-              </p:nvPr>
-            </p:nvGraphicFramePr>
-            <p:xfrm>
-              <a:off x="9005402" y="4791051"/>
-              <a:ext cx="1934437" cy="1483360"/>
-            </p:xfrm>
-            <a:graphic>
-              <a:graphicData uri="http://schemas.openxmlformats.org/drawingml/2006/table">
-                <a:tbl>
-                  <a:tblPr firstRow="1" bandRow="1">
-                    <a:tableStyleId>{93296810-A885-4BE3-A3E7-6D5BEEA58F35}</a:tableStyleId>
-                  </a:tblPr>
-                  <a:tblGrid>
-                    <a:gridCol w="533400">
-                      <a:extLst>
-                        <a:ext uri="{9D8B030D-6E8A-4147-A177-3AD203B41FA5}">
-                          <a16:colId xmlns:a16="http://schemas.microsoft.com/office/drawing/2014/main" val="3711460689"/>
-                        </a:ext>
-                      </a:extLst>
-                    </a:gridCol>
-                    <a:gridCol w="1401037">
-                      <a:extLst>
-                        <a:ext uri="{9D8B030D-6E8A-4147-A177-3AD203B41FA5}">
-                          <a16:colId xmlns:a16="http://schemas.microsoft.com/office/drawing/2014/main" val="2080107700"/>
-                        </a:ext>
-                      </a:extLst>
-                    </a:gridCol>
-                  </a:tblGrid>
-                  <a:tr h="370840">
-                    <a:tc>
-                      <a:txBody>
-                        <a:bodyPr/>
-                        <a:lstStyle/>
-                        <a:p>
-                          <a:endParaRPr lang="en-US"/>
-                        </a:p>
-                      </a:txBody>
-                      <a:tcPr>
-                        <a:blipFill>
-                          <a:blip r:embed="rId3"/>
-                          <a:stretch>
-                            <a:fillRect l="-1136" t="-1639" r="-265909" b="-304918"/>
-                          </a:stretch>
-                        </a:blipFill>
-                      </a:tcPr>
-                    </a:tc>
-                    <a:tc>
-                      <a:txBody>
-                        <a:bodyPr/>
-                        <a:lstStyle/>
-                        <a:p>
-                          <a:endParaRPr lang="en-US"/>
-                        </a:p>
-                      </a:txBody>
-                      <a:tcPr>
-                        <a:blipFill>
-                          <a:blip r:embed="rId3"/>
-                          <a:stretch>
-                            <a:fillRect l="-38696" t="-1639" r="-1739" b="-304918"/>
-                          </a:stretch>
-                        </a:blipFill>
-                      </a:tcPr>
-                    </a:tc>
-                    <a:extLst>
-                      <a:ext uri="{0D108BD9-81ED-4DB2-BD59-A6C34878D82A}">
-                        <a16:rowId xmlns:a16="http://schemas.microsoft.com/office/drawing/2014/main" val="2008869826"/>
-                      </a:ext>
-                    </a:extLst>
-                  </a:tr>
-                  <a:tr h="370840">
-                    <a:tc>
-                      <a:txBody>
-                        <a:bodyPr/>
-                        <a:lstStyle/>
-                        <a:p>
-                          <a:r>
-                            <a:rPr lang="en-US" sz="1400" dirty="0"/>
-                            <a:t>(1,1)</a:t>
-                          </a:r>
-                        </a:p>
-                      </a:txBody>
-                      <a:tcPr/>
-                    </a:tc>
-                    <a:tc>
-                      <a:txBody>
-                        <a:bodyPr/>
-                        <a:lstStyle/>
-                        <a:p>
-                          <a:r>
-                            <a:rPr lang="en-US" sz="1400" dirty="0"/>
-                            <a:t>up</a:t>
-                          </a:r>
-                        </a:p>
-                      </a:txBody>
-                      <a:tcPr/>
-                    </a:tc>
-                    <a:extLst>
-                      <a:ext uri="{0D108BD9-81ED-4DB2-BD59-A6C34878D82A}">
-                        <a16:rowId xmlns:a16="http://schemas.microsoft.com/office/drawing/2014/main" val="524805492"/>
-                      </a:ext>
-                    </a:extLst>
-                  </a:tr>
-                  <a:tr h="370840">
-                    <a:tc>
-                      <a:txBody>
-                        <a:bodyPr/>
-                        <a:lstStyle/>
-                        <a:p>
-                          <a:r>
-                            <a:rPr lang="en-US" sz="1400" dirty="0"/>
-                            <a:t>…</a:t>
-                          </a:r>
-                        </a:p>
-                      </a:txBody>
-                      <a:tcPr/>
-                    </a:tc>
-                    <a:tc>
-                      <a:txBody>
-                        <a:bodyPr/>
-                        <a:lstStyle/>
-                        <a:p>
-                          <a:r>
-                            <a:rPr lang="en-US" sz="1400" dirty="0"/>
-                            <a:t>…</a:t>
-                          </a:r>
-                        </a:p>
-                      </a:txBody>
-                      <a:tcPr/>
-                    </a:tc>
-                    <a:extLst>
-                      <a:ext uri="{0D108BD9-81ED-4DB2-BD59-A6C34878D82A}">
-                        <a16:rowId xmlns:a16="http://schemas.microsoft.com/office/drawing/2014/main" val="3725035416"/>
-                      </a:ext>
-                    </a:extLst>
-                  </a:tr>
-                  <a:tr h="370840">
-                    <a:tc>
-                      <a:txBody>
-                        <a:bodyPr/>
-                        <a:lstStyle/>
-                        <a:p>
-                          <a:r>
-                            <a:rPr lang="en-US" sz="1400" dirty="0"/>
-                            <a:t>…</a:t>
-                          </a:r>
-                        </a:p>
-                      </a:txBody>
-                      <a:tcPr/>
-                    </a:tc>
-                    <a:tc>
-                      <a:txBody>
-                        <a:bodyPr/>
-                        <a:lstStyle/>
-                        <a:p>
-                          <a:r>
-                            <a:rPr lang="en-US" sz="1400" dirty="0"/>
-                            <a:t>…</a:t>
-                          </a:r>
-                        </a:p>
-                      </a:txBody>
-                      <a:tcPr/>
-                    </a:tc>
-                    <a:extLst>
-                      <a:ext uri="{0D108BD9-81ED-4DB2-BD59-A6C34878D82A}">
-                        <a16:rowId xmlns:a16="http://schemas.microsoft.com/office/drawing/2014/main" val="868402448"/>
-                      </a:ext>
-                    </a:extLst>
-                  </a:tr>
-                </a:tbl>
-              </a:graphicData>
-            </a:graphic>
-          </p:graphicFrame>
-        </mc:Fallback>
-      </mc:AlternateContent>
-      <mc:AlternateContent xmlns:mc="http://schemas.openxmlformats.org/markup-compatibility/2006">
-        <mc:Choice xmlns:a14="http://schemas.microsoft.com/office/drawing/2010/main" Requires="a14">
+      <mc:AlternateContent xmlns:mc="http://schemas.openxmlformats.org/markup-compatibility/2006" xmlns:a14="http://schemas.microsoft.com/office/drawing/2010/main">
+        <mc:Choice Requires="a14">
           <p:sp>
             <p:nvSpPr>
               <p:cNvPr id="13" name="TextBox 12">
@@ -7522,7 +7057,7 @@
             </p:txBody>
           </p:sp>
         </mc:Choice>
-        <mc:Fallback>
+        <mc:Fallback xmlns="">
           <p:sp>
             <p:nvSpPr>
               <p:cNvPr id="13" name="TextBox 12">
@@ -7567,8 +7102,8 @@
           </p:sp>
         </mc:Fallback>
       </mc:AlternateContent>
-      <mc:AlternateContent xmlns:mc="http://schemas.openxmlformats.org/markup-compatibility/2006">
-        <mc:Choice xmlns:a14="http://schemas.microsoft.com/office/drawing/2010/main" Requires="a14">
+      <mc:AlternateContent xmlns:mc="http://schemas.openxmlformats.org/markup-compatibility/2006" xmlns:a14="http://schemas.microsoft.com/office/drawing/2010/main">
+        <mc:Choice Requires="a14">
           <p:graphicFrame>
             <p:nvGraphicFramePr>
               <p:cNvPr id="14" name="Table 13">
@@ -8067,7 +7602,7 @@
             </a:graphic>
           </p:graphicFrame>
         </mc:Choice>
-        <mc:Fallback>
+        <mc:Fallback xmlns="">
           <p:graphicFrame>
             <p:nvGraphicFramePr>
               <p:cNvPr id="14" name="Table 13">
@@ -8532,6 +8067,1872 @@
   <p:clrMapOvr>
     <a:masterClrMapping/>
   </p:clrMapOvr>
+</p:sld>
+</file>
+
+<file path=ppt/slides/slide16.xml><?xml version="1.0" encoding="utf-8"?>
+<p:sld xmlns:a="http://schemas.openxmlformats.org/drawingml/2006/main" xmlns:r="http://schemas.openxmlformats.org/officeDocument/2006/relationships" xmlns:p="http://schemas.openxmlformats.org/presentationml/2006/main">
+  <p:cSld>
+    <p:spTree>
+      <p:nvGrpSpPr>
+        <p:cNvPr id="1" name="">
+          <a:extLst>
+            <a:ext uri="{FF2B5EF4-FFF2-40B4-BE49-F238E27FC236}">
+              <a16:creationId xmlns:a16="http://schemas.microsoft.com/office/drawing/2014/main" id="{1EB03287-59A6-2318-7EA1-A727C0F4E0A8}"/>
+            </a:ext>
+          </a:extLst>
+        </p:cNvPr>
+        <p:cNvGrpSpPr/>
+        <p:nvPr/>
+      </p:nvGrpSpPr>
+      <p:grpSpPr>
+        <a:xfrm>
+          <a:off x="0" y="0"/>
+          <a:ext cx="0" cy="0"/>
+          <a:chOff x="0" y="0"/>
+          <a:chExt cx="0" cy="0"/>
+        </a:xfrm>
+      </p:grpSpPr>
+      <p:sp>
+        <p:nvSpPr>
+          <p:cNvPr id="2" name="Title 1">
+            <a:extLst>
+              <a:ext uri="{FF2B5EF4-FFF2-40B4-BE49-F238E27FC236}">
+                <a16:creationId xmlns:a16="http://schemas.microsoft.com/office/drawing/2014/main" id="{7AAB47FA-0757-1949-4E7A-F26F8AC3D365}"/>
+              </a:ext>
+            </a:extLst>
+          </p:cNvPr>
+          <p:cNvSpPr>
+            <a:spLocks noGrp="1"/>
+          </p:cNvSpPr>
+          <p:nvPr>
+            <p:ph type="title"/>
+          </p:nvPr>
+        </p:nvSpPr>
+        <p:spPr>
+          <a:xfrm>
+            <a:off x="838200" y="323986"/>
+            <a:ext cx="10515600" cy="759072"/>
+          </a:xfrm>
+        </p:spPr>
+        <p:txBody>
+          <a:bodyPr/>
+          <a:lstStyle/>
+          <a:p>
+            <a:r>
+              <a:rPr lang="en-US" dirty="0"/>
+              <a:t>Deterministic Policy</a:t>
+            </a:r>
+          </a:p>
+        </p:txBody>
+      </p:sp>
+      <mc:AlternateContent xmlns:mc="http://schemas.openxmlformats.org/markup-compatibility/2006">
+        <mc:Choice xmlns:a14="http://schemas.microsoft.com/office/drawing/2010/main" Requires="a14">
+          <p:sp>
+            <p:nvSpPr>
+              <p:cNvPr id="3" name="Content Placeholder 2">
+                <a:extLst>
+                  <a:ext uri="{FF2B5EF4-FFF2-40B4-BE49-F238E27FC236}">
+                    <a16:creationId xmlns:a16="http://schemas.microsoft.com/office/drawing/2014/main" id="{039CE022-179C-D81C-7A3B-7978B7819719}"/>
+                  </a:ext>
+                </a:extLst>
+              </p:cNvPr>
+              <p:cNvSpPr>
+                <a:spLocks noGrp="1"/>
+              </p:cNvSpPr>
+              <p:nvPr>
+                <p:ph idx="1"/>
+              </p:nvPr>
+            </p:nvSpPr>
+            <p:spPr>
+              <a:xfrm>
+                <a:off x="838200" y="1374845"/>
+                <a:ext cx="6904220" cy="4779633"/>
+              </a:xfrm>
+            </p:spPr>
+            <p:txBody>
+              <a:bodyPr>
+                <a:normAutofit/>
+              </a:bodyPr>
+              <a:lstStyle/>
+              <a:p>
+                <a:pPr marL="0" indent="0">
+                  <a:buNone/>
+                </a:pPr>
+                <a:r>
+                  <a:rPr lang="en-US" sz="2000" b="1" dirty="0"/>
+                  <a:t>Deterministic policy</a:t>
+                </a:r>
+                <a:r>
+                  <a:rPr lang="en-US" sz="2000" dirty="0"/>
+                  <a:t>: Prescribes for each state a single action.</a:t>
+                </a:r>
+              </a:p>
+              <a:p>
+                <a:pPr marL="0" indent="0">
+                  <a:buNone/>
+                </a:pPr>
+                <a:br>
+                  <a:rPr lang="en-US" sz="2000" dirty="0"/>
+                </a:br>
+                <a14:m>
+                  <m:oMathPara xmlns:m="http://schemas.openxmlformats.org/officeDocument/2006/math">
+                    <m:oMathParaPr>
+                      <m:jc m:val="centerGroup"/>
+                    </m:oMathParaPr>
+                    <m:oMath xmlns:m="http://schemas.openxmlformats.org/officeDocument/2006/math">
+                      <m:r>
+                        <a:rPr lang="en-US" sz="2000" b="0" i="1" smtClean="0">
+                          <a:latin typeface="Cambria Math" panose="02040503050406030204" pitchFamily="18" charset="0"/>
+                        </a:rPr>
+                        <m:t>𝑎</m:t>
+                      </m:r>
+                      <m:r>
+                        <a:rPr lang="en-US" sz="2000" b="0" i="1" smtClean="0">
+                          <a:latin typeface="Cambria Math" panose="02040503050406030204" pitchFamily="18" charset="0"/>
+                        </a:rPr>
+                        <m:t>=</m:t>
+                      </m:r>
+                      <m:r>
+                        <a:rPr lang="en-US" sz="2000" b="0" i="1" smtClean="0">
+                          <a:latin typeface="Cambria Math" panose="02040503050406030204" pitchFamily="18" charset="0"/>
+                        </a:rPr>
+                        <m:t>𝜋</m:t>
+                      </m:r>
+                      <m:d>
+                        <m:dPr>
+                          <m:ctrlPr>
+                            <a:rPr lang="en-US" sz="2000" b="0" i="1" smtClean="0">
+                              <a:latin typeface="Cambria Math" panose="02040503050406030204" pitchFamily="18" charset="0"/>
+                            </a:rPr>
+                          </m:ctrlPr>
+                        </m:dPr>
+                        <m:e>
+                          <m:r>
+                            <a:rPr lang="en-US" sz="2000" b="0" i="1" smtClean="0">
+                              <a:latin typeface="Cambria Math" panose="02040503050406030204" pitchFamily="18" charset="0"/>
+                            </a:rPr>
+                            <m:t>𝑠</m:t>
+                          </m:r>
+                        </m:e>
+                      </m:d>
+                    </m:oMath>
+                  </m:oMathPara>
+                </a14:m>
+                <a:endParaRPr lang="en-US" sz="2000" dirty="0"/>
+              </a:p>
+              <a:p>
+                <a:endParaRPr lang="en-US" sz="2000" dirty="0"/>
+              </a:p>
+              <a:p>
+                <a:r>
+                  <a:rPr lang="en-US" sz="2000" dirty="0"/>
+                  <a:t>This just means we have a stochastic policy that has a probability of 1 for exactly one action.</a:t>
+                </a:r>
+              </a:p>
+              <a:p>
+                <a:endParaRPr lang="en-US" sz="2000" dirty="0"/>
+              </a:p>
+              <a:p>
+                <a:r>
+                  <a:rPr lang="en-US" sz="2000" b="1" dirty="0"/>
+                  <a:t>Important guarantee</a:t>
+                </a:r>
+                <a:r>
+                  <a:rPr lang="en-US" sz="2000" dirty="0"/>
+                  <a:t>: Finite MDPs always have an optimal deterministic policy.</a:t>
+                </a:r>
+              </a:p>
+            </p:txBody>
+          </p:sp>
+        </mc:Choice>
+        <mc:Fallback>
+          <p:sp>
+            <p:nvSpPr>
+              <p:cNvPr id="3" name="Content Placeholder 2">
+                <a:extLst>
+                  <a:ext uri="{FF2B5EF4-FFF2-40B4-BE49-F238E27FC236}">
+                    <a16:creationId xmlns:a16="http://schemas.microsoft.com/office/drawing/2014/main" id="{039CE022-179C-D81C-7A3B-7978B7819719}"/>
+                  </a:ext>
+                </a:extLst>
+              </p:cNvPr>
+              <p:cNvSpPr>
+                <a:spLocks noGrp="1" noRot="1" noChangeAspect="1" noMove="1" noResize="1" noEditPoints="1" noAdjustHandles="1" noChangeArrowheads="1" noChangeShapeType="1" noTextEdit="1"/>
+              </p:cNvSpPr>
+              <p:nvPr>
+                <p:ph idx="1"/>
+              </p:nvPr>
+            </p:nvSpPr>
+            <p:spPr>
+              <a:xfrm>
+                <a:off x="838200" y="1374845"/>
+                <a:ext cx="6904220" cy="4779633"/>
+              </a:xfrm>
+              <a:blipFill>
+                <a:blip r:embed="rId2"/>
+                <a:stretch>
+                  <a:fillRect l="-972" t="-1276" r="-265"/>
+                </a:stretch>
+              </a:blipFill>
+            </p:spPr>
+            <p:txBody>
+              <a:bodyPr/>
+              <a:lstStyle/>
+              <a:p>
+                <a:r>
+                  <a:rPr lang="en-US">
+                    <a:noFill/>
+                  </a:rPr>
+                  <a:t> </a:t>
+                </a:r>
+              </a:p>
+            </p:txBody>
+          </p:sp>
+        </mc:Fallback>
+      </mc:AlternateContent>
+      <p:sp>
+        <p:nvSpPr>
+          <p:cNvPr id="11" name="TextBox 10">
+            <a:extLst>
+              <a:ext uri="{FF2B5EF4-FFF2-40B4-BE49-F238E27FC236}">
+                <a16:creationId xmlns:a16="http://schemas.microsoft.com/office/drawing/2014/main" id="{2EE14321-95B0-ED7B-97D7-7F5173F92C37}"/>
+              </a:ext>
+            </a:extLst>
+          </p:cNvPr>
+          <p:cNvSpPr txBox="1"/>
+          <p:nvPr/>
+        </p:nvSpPr>
+        <p:spPr>
+          <a:xfrm>
+            <a:off x="8710113" y="1061943"/>
+            <a:ext cx="2602993" cy="646331"/>
+          </a:xfrm>
+          <a:prstGeom prst="rect">
+            <a:avLst/>
+          </a:prstGeom>
+          <a:noFill/>
+        </p:spPr>
+        <p:txBody>
+          <a:bodyPr wrap="square" rtlCol="0">
+            <a:spAutoFit/>
+          </a:bodyPr>
+          <a:lstStyle/>
+          <a:p>
+            <a:pPr algn="ctr"/>
+            <a:r>
+              <a:rPr lang="en-US" b="1" dirty="0"/>
+              <a:t>Deterministic Policy </a:t>
+            </a:r>
+            <a:br>
+              <a:rPr lang="en-US" b="1" dirty="0"/>
+            </a:br>
+            <a:r>
+              <a:rPr lang="en-US" b="1" dirty="0"/>
+              <a:t>as a Table</a:t>
+            </a:r>
+          </a:p>
+        </p:txBody>
+      </p:sp>
+      <mc:AlternateContent xmlns:mc="http://schemas.openxmlformats.org/markup-compatibility/2006">
+        <mc:Choice xmlns:a14="http://schemas.microsoft.com/office/drawing/2010/main" Requires="a14">
+          <p:graphicFrame>
+            <p:nvGraphicFramePr>
+              <p:cNvPr id="12" name="Table 11">
+                <a:extLst>
+                  <a:ext uri="{FF2B5EF4-FFF2-40B4-BE49-F238E27FC236}">
+                    <a16:creationId xmlns:a16="http://schemas.microsoft.com/office/drawing/2014/main" id="{E1B044DD-9822-6803-772C-3C4A0D8EB2CE}"/>
+                  </a:ext>
+                  <a:ext uri="{C183D7F6-B498-43B3-948B-1728B52AA6E4}">
+                    <adec:decorative xmlns:adec="http://schemas.microsoft.com/office/drawing/2017/decorative" val="0"/>
+                  </a:ext>
+                </a:extLst>
+              </p:cNvPr>
+              <p:cNvGraphicFramePr>
+                <a:graphicFrameLocks noGrp="1"/>
+              </p:cNvGraphicFramePr>
+              <p:nvPr>
+                <p:extLst>
+                  <p:ext uri="{D42A27DB-BD31-4B8C-83A1-F6EECF244321}">
+                    <p14:modId xmlns:p14="http://schemas.microsoft.com/office/powerpoint/2010/main" val="16031247"/>
+                  </p:ext>
+                </p:extLst>
+              </p:nvPr>
+            </p:nvGraphicFramePr>
+            <p:xfrm>
+              <a:off x="9044391" y="1712868"/>
+              <a:ext cx="1934437" cy="1483360"/>
+            </p:xfrm>
+            <a:graphic>
+              <a:graphicData uri="http://schemas.openxmlformats.org/drawingml/2006/table">
+                <a:tbl>
+                  <a:tblPr firstRow="1" bandRow="1">
+                    <a:tableStyleId>{93296810-A885-4BE3-A3E7-6D5BEEA58F35}</a:tableStyleId>
+                  </a:tblPr>
+                  <a:tblGrid>
+                    <a:gridCol w="533400">
+                      <a:extLst>
+                        <a:ext uri="{9D8B030D-6E8A-4147-A177-3AD203B41FA5}">
+                          <a16:colId xmlns:a16="http://schemas.microsoft.com/office/drawing/2014/main" val="3711460689"/>
+                        </a:ext>
+                      </a:extLst>
+                    </a:gridCol>
+                    <a:gridCol w="1401037">
+                      <a:extLst>
+                        <a:ext uri="{9D8B030D-6E8A-4147-A177-3AD203B41FA5}">
+                          <a16:colId xmlns:a16="http://schemas.microsoft.com/office/drawing/2014/main" val="2080107700"/>
+                        </a:ext>
+                      </a:extLst>
+                    </a:gridCol>
+                  </a:tblGrid>
+                  <a:tr h="370840">
+                    <a:tc>
+                      <a:txBody>
+                        <a:bodyPr/>
+                        <a:lstStyle/>
+                        <a:p>
+                          <a:pPr/>
+                          <a14:m>
+                            <m:oMathPara xmlns:m="http://schemas.openxmlformats.org/officeDocument/2006/math">
+                              <m:oMathParaPr>
+                                <m:jc m:val="centerGroup"/>
+                              </m:oMathParaPr>
+                              <m:oMath xmlns:m="http://schemas.openxmlformats.org/officeDocument/2006/math">
+                                <m:r>
+                                  <a:rPr lang="en-US" sz="1400" dirty="0" smtClean="0">
+                                    <a:latin typeface="Cambria Math" panose="02040503050406030204" pitchFamily="18" charset="0"/>
+                                  </a:rPr>
+                                  <m:t>𝑠</m:t>
+                                </m:r>
+                              </m:oMath>
+                            </m:oMathPara>
+                          </a14:m>
+                          <a:endParaRPr lang="en-US" sz="1400" dirty="0"/>
+                        </a:p>
+                      </a:txBody>
+                      <a:tcPr/>
+                    </a:tc>
+                    <a:tc>
+                      <a:txBody>
+                        <a:bodyPr/>
+                        <a:lstStyle/>
+                        <a:p>
+                          <a:r>
+                            <a:rPr lang="en-US" sz="1400" b="1" dirty="0"/>
+                            <a:t>Action </a:t>
+                          </a:r>
+                          <a14:m>
+                            <m:oMath xmlns:m="http://schemas.openxmlformats.org/officeDocument/2006/math">
+                              <m:r>
+                                <a:rPr lang="en-US" sz="1400" i="1" smtClean="0">
+                                  <a:latin typeface="Cambria Math" panose="02040503050406030204" pitchFamily="18" charset="0"/>
+                                </a:rPr>
+                                <m:t>𝜋</m:t>
+                              </m:r>
+                              <m:d>
+                                <m:dPr>
+                                  <m:ctrlPr>
+                                    <a:rPr lang="en-US" sz="1400" i="1">
+                                      <a:latin typeface="Cambria Math" panose="02040503050406030204" pitchFamily="18" charset="0"/>
+                                    </a:rPr>
+                                  </m:ctrlPr>
+                                </m:dPr>
+                                <m:e>
+                                  <m:r>
+                                    <a:rPr lang="en-US" sz="1400" i="1">
+                                      <a:latin typeface="Cambria Math" panose="02040503050406030204" pitchFamily="18" charset="0"/>
+                                    </a:rPr>
+                                    <m:t>𝑠</m:t>
+                                  </m:r>
+                                </m:e>
+                              </m:d>
+                            </m:oMath>
+                          </a14:m>
+                          <a:endParaRPr lang="en-US" sz="1400" dirty="0"/>
+                        </a:p>
+                      </a:txBody>
+                      <a:tcPr/>
+                    </a:tc>
+                    <a:extLst>
+                      <a:ext uri="{0D108BD9-81ED-4DB2-BD59-A6C34878D82A}">
+                        <a16:rowId xmlns:a16="http://schemas.microsoft.com/office/drawing/2014/main" val="2008869826"/>
+                      </a:ext>
+                    </a:extLst>
+                  </a:tr>
+                  <a:tr h="370840">
+                    <a:tc>
+                      <a:txBody>
+                        <a:bodyPr/>
+                        <a:lstStyle/>
+                        <a:p>
+                          <a:r>
+                            <a:rPr lang="en-US" sz="1400" dirty="0"/>
+                            <a:t>(1,1)</a:t>
+                          </a:r>
+                        </a:p>
+                      </a:txBody>
+                      <a:tcPr/>
+                    </a:tc>
+                    <a:tc>
+                      <a:txBody>
+                        <a:bodyPr/>
+                        <a:lstStyle/>
+                        <a:p>
+                          <a:r>
+                            <a:rPr lang="en-US" sz="1400" dirty="0"/>
+                            <a:t>up</a:t>
+                          </a:r>
+                        </a:p>
+                      </a:txBody>
+                      <a:tcPr/>
+                    </a:tc>
+                    <a:extLst>
+                      <a:ext uri="{0D108BD9-81ED-4DB2-BD59-A6C34878D82A}">
+                        <a16:rowId xmlns:a16="http://schemas.microsoft.com/office/drawing/2014/main" val="524805492"/>
+                      </a:ext>
+                    </a:extLst>
+                  </a:tr>
+                  <a:tr h="370840">
+                    <a:tc>
+                      <a:txBody>
+                        <a:bodyPr/>
+                        <a:lstStyle/>
+                        <a:p>
+                          <a:r>
+                            <a:rPr lang="en-US" sz="1400" dirty="0"/>
+                            <a:t>…</a:t>
+                          </a:r>
+                        </a:p>
+                      </a:txBody>
+                      <a:tcPr/>
+                    </a:tc>
+                    <a:tc>
+                      <a:txBody>
+                        <a:bodyPr/>
+                        <a:lstStyle/>
+                        <a:p>
+                          <a:r>
+                            <a:rPr lang="en-US" sz="1400" dirty="0"/>
+                            <a:t>…</a:t>
+                          </a:r>
+                        </a:p>
+                      </a:txBody>
+                      <a:tcPr/>
+                    </a:tc>
+                    <a:extLst>
+                      <a:ext uri="{0D108BD9-81ED-4DB2-BD59-A6C34878D82A}">
+                        <a16:rowId xmlns:a16="http://schemas.microsoft.com/office/drawing/2014/main" val="3725035416"/>
+                      </a:ext>
+                    </a:extLst>
+                  </a:tr>
+                  <a:tr h="370840">
+                    <a:tc>
+                      <a:txBody>
+                        <a:bodyPr/>
+                        <a:lstStyle/>
+                        <a:p>
+                          <a:r>
+                            <a:rPr lang="en-US" sz="1400" dirty="0"/>
+                            <a:t>…</a:t>
+                          </a:r>
+                        </a:p>
+                      </a:txBody>
+                      <a:tcPr/>
+                    </a:tc>
+                    <a:tc>
+                      <a:txBody>
+                        <a:bodyPr/>
+                        <a:lstStyle/>
+                        <a:p>
+                          <a:r>
+                            <a:rPr lang="en-US" sz="1400" dirty="0"/>
+                            <a:t>…</a:t>
+                          </a:r>
+                        </a:p>
+                      </a:txBody>
+                      <a:tcPr/>
+                    </a:tc>
+                    <a:extLst>
+                      <a:ext uri="{0D108BD9-81ED-4DB2-BD59-A6C34878D82A}">
+                        <a16:rowId xmlns:a16="http://schemas.microsoft.com/office/drawing/2014/main" val="868402448"/>
+                      </a:ext>
+                    </a:extLst>
+                  </a:tr>
+                </a:tbl>
+              </a:graphicData>
+            </a:graphic>
+          </p:graphicFrame>
+        </mc:Choice>
+        <mc:Fallback>
+          <p:graphicFrame>
+            <p:nvGraphicFramePr>
+              <p:cNvPr id="12" name="Table 11">
+                <a:extLst>
+                  <a:ext uri="{FF2B5EF4-FFF2-40B4-BE49-F238E27FC236}">
+                    <a16:creationId xmlns:a16="http://schemas.microsoft.com/office/drawing/2014/main" id="{E1B044DD-9822-6803-772C-3C4A0D8EB2CE}"/>
+                  </a:ext>
+                  <a:ext uri="{C183D7F6-B498-43B3-948B-1728B52AA6E4}">
+                    <adec:decorative xmlns:adec="http://schemas.microsoft.com/office/drawing/2017/decorative" val="0"/>
+                  </a:ext>
+                </a:extLst>
+              </p:cNvPr>
+              <p:cNvGraphicFramePr>
+                <a:graphicFrameLocks noGrp="1"/>
+              </p:cNvGraphicFramePr>
+              <p:nvPr>
+                <p:extLst>
+                  <p:ext uri="{D42A27DB-BD31-4B8C-83A1-F6EECF244321}">
+                    <p14:modId xmlns:p14="http://schemas.microsoft.com/office/powerpoint/2010/main" val="16031247"/>
+                  </p:ext>
+                </p:extLst>
+              </p:nvPr>
+            </p:nvGraphicFramePr>
+            <p:xfrm>
+              <a:off x="9044391" y="1712868"/>
+              <a:ext cx="1934437" cy="1483360"/>
+            </p:xfrm>
+            <a:graphic>
+              <a:graphicData uri="http://schemas.openxmlformats.org/drawingml/2006/table">
+                <a:tbl>
+                  <a:tblPr firstRow="1" bandRow="1">
+                    <a:tableStyleId>{93296810-A885-4BE3-A3E7-6D5BEEA58F35}</a:tableStyleId>
+                  </a:tblPr>
+                  <a:tblGrid>
+                    <a:gridCol w="533400">
+                      <a:extLst>
+                        <a:ext uri="{9D8B030D-6E8A-4147-A177-3AD203B41FA5}">
+                          <a16:colId xmlns:a16="http://schemas.microsoft.com/office/drawing/2014/main" val="3711460689"/>
+                        </a:ext>
+                      </a:extLst>
+                    </a:gridCol>
+                    <a:gridCol w="1401037">
+                      <a:extLst>
+                        <a:ext uri="{9D8B030D-6E8A-4147-A177-3AD203B41FA5}">
+                          <a16:colId xmlns:a16="http://schemas.microsoft.com/office/drawing/2014/main" val="2080107700"/>
+                        </a:ext>
+                      </a:extLst>
+                    </a:gridCol>
+                  </a:tblGrid>
+                  <a:tr h="370840">
+                    <a:tc>
+                      <a:txBody>
+                        <a:bodyPr/>
+                        <a:lstStyle/>
+                        <a:p>
+                          <a:endParaRPr lang="en-US"/>
+                        </a:p>
+                      </a:txBody>
+                      <a:tcPr>
+                        <a:blipFill>
+                          <a:blip r:embed="rId3"/>
+                          <a:stretch>
+                            <a:fillRect l="-1136" t="-1639" r="-267045" b="-304918"/>
+                          </a:stretch>
+                        </a:blipFill>
+                      </a:tcPr>
+                    </a:tc>
+                    <a:tc>
+                      <a:txBody>
+                        <a:bodyPr/>
+                        <a:lstStyle/>
+                        <a:p>
+                          <a:endParaRPr lang="en-US"/>
+                        </a:p>
+                      </a:txBody>
+                      <a:tcPr>
+                        <a:blipFill>
+                          <a:blip r:embed="rId3"/>
+                          <a:stretch>
+                            <a:fillRect l="-38696" t="-1639" r="-2174" b="-304918"/>
+                          </a:stretch>
+                        </a:blipFill>
+                      </a:tcPr>
+                    </a:tc>
+                    <a:extLst>
+                      <a:ext uri="{0D108BD9-81ED-4DB2-BD59-A6C34878D82A}">
+                        <a16:rowId xmlns:a16="http://schemas.microsoft.com/office/drawing/2014/main" val="2008869826"/>
+                      </a:ext>
+                    </a:extLst>
+                  </a:tr>
+                  <a:tr h="370840">
+                    <a:tc>
+                      <a:txBody>
+                        <a:bodyPr/>
+                        <a:lstStyle/>
+                        <a:p>
+                          <a:r>
+                            <a:rPr lang="en-US" sz="1400" dirty="0"/>
+                            <a:t>(1,1)</a:t>
+                          </a:r>
+                        </a:p>
+                      </a:txBody>
+                      <a:tcPr/>
+                    </a:tc>
+                    <a:tc>
+                      <a:txBody>
+                        <a:bodyPr/>
+                        <a:lstStyle/>
+                        <a:p>
+                          <a:r>
+                            <a:rPr lang="en-US" sz="1400" dirty="0"/>
+                            <a:t>up</a:t>
+                          </a:r>
+                        </a:p>
+                      </a:txBody>
+                      <a:tcPr/>
+                    </a:tc>
+                    <a:extLst>
+                      <a:ext uri="{0D108BD9-81ED-4DB2-BD59-A6C34878D82A}">
+                        <a16:rowId xmlns:a16="http://schemas.microsoft.com/office/drawing/2014/main" val="524805492"/>
+                      </a:ext>
+                    </a:extLst>
+                  </a:tr>
+                  <a:tr h="370840">
+                    <a:tc>
+                      <a:txBody>
+                        <a:bodyPr/>
+                        <a:lstStyle/>
+                        <a:p>
+                          <a:r>
+                            <a:rPr lang="en-US" sz="1400" dirty="0"/>
+                            <a:t>…</a:t>
+                          </a:r>
+                        </a:p>
+                      </a:txBody>
+                      <a:tcPr/>
+                    </a:tc>
+                    <a:tc>
+                      <a:txBody>
+                        <a:bodyPr/>
+                        <a:lstStyle/>
+                        <a:p>
+                          <a:r>
+                            <a:rPr lang="en-US" sz="1400" dirty="0"/>
+                            <a:t>…</a:t>
+                          </a:r>
+                        </a:p>
+                      </a:txBody>
+                      <a:tcPr/>
+                    </a:tc>
+                    <a:extLst>
+                      <a:ext uri="{0D108BD9-81ED-4DB2-BD59-A6C34878D82A}">
+                        <a16:rowId xmlns:a16="http://schemas.microsoft.com/office/drawing/2014/main" val="3725035416"/>
+                      </a:ext>
+                    </a:extLst>
+                  </a:tr>
+                  <a:tr h="370840">
+                    <a:tc>
+                      <a:txBody>
+                        <a:bodyPr/>
+                        <a:lstStyle/>
+                        <a:p>
+                          <a:r>
+                            <a:rPr lang="en-US" sz="1400" dirty="0"/>
+                            <a:t>…</a:t>
+                          </a:r>
+                        </a:p>
+                      </a:txBody>
+                      <a:tcPr/>
+                    </a:tc>
+                    <a:tc>
+                      <a:txBody>
+                        <a:bodyPr/>
+                        <a:lstStyle/>
+                        <a:p>
+                          <a:r>
+                            <a:rPr lang="en-US" sz="1400" dirty="0"/>
+                            <a:t>…</a:t>
+                          </a:r>
+                        </a:p>
+                      </a:txBody>
+                      <a:tcPr/>
+                    </a:tc>
+                    <a:extLst>
+                      <a:ext uri="{0D108BD9-81ED-4DB2-BD59-A6C34878D82A}">
+                        <a16:rowId xmlns:a16="http://schemas.microsoft.com/office/drawing/2014/main" val="868402448"/>
+                      </a:ext>
+                    </a:extLst>
+                  </a:tr>
+                </a:tbl>
+              </a:graphicData>
+            </a:graphic>
+          </p:graphicFrame>
+        </mc:Fallback>
+      </mc:AlternateContent>
+      <mc:AlternateContent xmlns:mc="http://schemas.openxmlformats.org/markup-compatibility/2006">
+        <mc:Choice xmlns:a14="http://schemas.microsoft.com/office/drawing/2010/main" Requires="a14">
+          <p:sp>
+            <p:nvSpPr>
+              <p:cNvPr id="13" name="TextBox 12">
+                <a:extLst>
+                  <a:ext uri="{FF2B5EF4-FFF2-40B4-BE49-F238E27FC236}">
+                    <a16:creationId xmlns:a16="http://schemas.microsoft.com/office/drawing/2014/main" id="{034F7F5F-C365-FA82-C674-527FD3FEEA3F}"/>
+                  </a:ext>
+                </a:extLst>
+              </p:cNvPr>
+              <p:cNvSpPr txBox="1"/>
+              <p:nvPr/>
+            </p:nvSpPr>
+            <p:spPr>
+              <a:xfrm>
+                <a:off x="8805347" y="3904833"/>
+                <a:ext cx="2602993" cy="954107"/>
+              </a:xfrm>
+              <a:prstGeom prst="rect">
+                <a:avLst/>
+              </a:prstGeom>
+              <a:noFill/>
+            </p:spPr>
+            <p:txBody>
+              <a:bodyPr wrap="square" rtlCol="0">
+                <a:spAutoFit/>
+              </a:bodyPr>
+              <a:lstStyle/>
+              <a:p>
+                <a:pPr algn="ctr"/>
+                <a:r>
+                  <a:rPr lang="en-US" b="1" dirty="0"/>
+                  <a:t>Stochastic Policy </a:t>
+                </a:r>
+                <a:br>
+                  <a:rPr lang="en-US" b="1" dirty="0"/>
+                </a:br>
+                <a:r>
+                  <a:rPr lang="en-US" b="1" dirty="0"/>
+                  <a:t>as a Table: </a:t>
+                </a:r>
+                <a14:m>
+                  <m:oMath xmlns:m="http://schemas.openxmlformats.org/officeDocument/2006/math">
+                    <m:r>
+                      <a:rPr lang="en-US" b="1" i="1">
+                        <a:latin typeface="Cambria Math" panose="02040503050406030204" pitchFamily="18" charset="0"/>
+                      </a:rPr>
+                      <m:t>𝝅</m:t>
+                    </m:r>
+                    <m:r>
+                      <a:rPr lang="en-US" b="1" i="1">
+                        <a:latin typeface="Cambria Math" panose="02040503050406030204" pitchFamily="18" charset="0"/>
+                      </a:rPr>
+                      <m:t>(</m:t>
+                    </m:r>
+                    <m:r>
+                      <a:rPr lang="en-US" b="1" i="1">
+                        <a:latin typeface="Cambria Math" panose="02040503050406030204" pitchFamily="18" charset="0"/>
+                      </a:rPr>
+                      <m:t>𝒂</m:t>
+                    </m:r>
+                    <m:r>
+                      <a:rPr lang="en-US" b="1" i="1">
+                        <a:latin typeface="Cambria Math" panose="02040503050406030204" pitchFamily="18" charset="0"/>
+                      </a:rPr>
+                      <m:t>|</m:t>
+                    </m:r>
+                    <m:r>
+                      <a:rPr lang="en-US" b="1" i="1">
+                        <a:latin typeface="Cambria Math" panose="02040503050406030204" pitchFamily="18" charset="0"/>
+                      </a:rPr>
+                      <m:t>𝒔</m:t>
+                    </m:r>
+                    <m:r>
+                      <a:rPr lang="en-US" b="1" i="1">
+                        <a:latin typeface="Cambria Math" panose="02040503050406030204" pitchFamily="18" charset="0"/>
+                      </a:rPr>
+                      <m:t>)</m:t>
+                    </m:r>
+                  </m:oMath>
+                </a14:m>
+                <a:endParaRPr lang="en-US" b="1" dirty="0"/>
+              </a:p>
+              <a:p>
+                <a:pPr algn="ctr"/>
+                <a:endParaRPr lang="en-US" dirty="0"/>
+              </a:p>
+            </p:txBody>
+          </p:sp>
+        </mc:Choice>
+        <mc:Fallback>
+          <p:sp>
+            <p:nvSpPr>
+              <p:cNvPr id="13" name="TextBox 12">
+                <a:extLst>
+                  <a:ext uri="{FF2B5EF4-FFF2-40B4-BE49-F238E27FC236}">
+                    <a16:creationId xmlns:a16="http://schemas.microsoft.com/office/drawing/2014/main" id="{034F7F5F-C365-FA82-C674-527FD3FEEA3F}"/>
+                  </a:ext>
+                </a:extLst>
+              </p:cNvPr>
+              <p:cNvSpPr txBox="1">
+                <a:spLocks noRot="1" noChangeAspect="1" noMove="1" noResize="1" noEditPoints="1" noAdjustHandles="1" noChangeArrowheads="1" noChangeShapeType="1" noTextEdit="1"/>
+              </p:cNvSpPr>
+              <p:nvPr/>
+            </p:nvSpPr>
+            <p:spPr>
+              <a:xfrm>
+                <a:off x="8805347" y="3904833"/>
+                <a:ext cx="2602993" cy="954107"/>
+              </a:xfrm>
+              <a:prstGeom prst="rect">
+                <a:avLst/>
+              </a:prstGeom>
+              <a:blipFill>
+                <a:blip r:embed="rId4"/>
+                <a:stretch>
+                  <a:fillRect t="-3205"/>
+                </a:stretch>
+              </a:blipFill>
+            </p:spPr>
+            <p:txBody>
+              <a:bodyPr/>
+              <a:lstStyle/>
+              <a:p>
+                <a:r>
+                  <a:rPr lang="en-US">
+                    <a:noFill/>
+                  </a:rPr>
+                  <a:t> </a:t>
+                </a:r>
+              </a:p>
+            </p:txBody>
+          </p:sp>
+        </mc:Fallback>
+      </mc:AlternateContent>
+      <mc:AlternateContent xmlns:mc="http://schemas.openxmlformats.org/markup-compatibility/2006">
+        <mc:Choice xmlns:a14="http://schemas.microsoft.com/office/drawing/2010/main" Requires="a14">
+          <p:graphicFrame>
+            <p:nvGraphicFramePr>
+              <p:cNvPr id="14" name="Table 13">
+                <a:extLst>
+                  <a:ext uri="{FF2B5EF4-FFF2-40B4-BE49-F238E27FC236}">
+                    <a16:creationId xmlns:a16="http://schemas.microsoft.com/office/drawing/2014/main" id="{B0C27E28-F5F2-1228-2C82-4BC1196AD55A}"/>
+                  </a:ext>
+                  <a:ext uri="{C183D7F6-B498-43B3-948B-1728B52AA6E4}">
+                    <adec:decorative xmlns:adec="http://schemas.microsoft.com/office/drawing/2017/decorative" val="0"/>
+                  </a:ext>
+                </a:extLst>
+              </p:cNvPr>
+              <p:cNvGraphicFramePr>
+                <a:graphicFrameLocks noGrp="1"/>
+              </p:cNvGraphicFramePr>
+              <p:nvPr>
+                <p:extLst>
+                  <p:ext uri="{D42A27DB-BD31-4B8C-83A1-F6EECF244321}">
+                    <p14:modId xmlns:p14="http://schemas.microsoft.com/office/powerpoint/2010/main" val="1730763515"/>
+                  </p:ext>
+                </p:extLst>
+              </p:nvPr>
+            </p:nvGraphicFramePr>
+            <p:xfrm>
+              <a:off x="8623306" y="4671118"/>
+              <a:ext cx="2967074" cy="1483360"/>
+            </p:xfrm>
+            <a:graphic>
+              <a:graphicData uri="http://schemas.openxmlformats.org/drawingml/2006/table">
+                <a:tbl>
+                  <a:tblPr firstRow="1" bandRow="1">
+                    <a:tableStyleId>{93296810-A885-4BE3-A3E7-6D5BEEA58F35}</a:tableStyleId>
+                  </a:tblPr>
+                  <a:tblGrid>
+                    <a:gridCol w="547141">
+                      <a:extLst>
+                        <a:ext uri="{9D8B030D-6E8A-4147-A177-3AD203B41FA5}">
+                          <a16:colId xmlns:a16="http://schemas.microsoft.com/office/drawing/2014/main" val="3711460689"/>
+                        </a:ext>
+                      </a:extLst>
+                    </a:gridCol>
+                    <a:gridCol w="505015">
+                      <a:extLst>
+                        <a:ext uri="{9D8B030D-6E8A-4147-A177-3AD203B41FA5}">
+                          <a16:colId xmlns:a16="http://schemas.microsoft.com/office/drawing/2014/main" val="2080107700"/>
+                        </a:ext>
+                      </a:extLst>
+                    </a:gridCol>
+                    <a:gridCol w="637082">
+                      <a:extLst>
+                        <a:ext uri="{9D8B030D-6E8A-4147-A177-3AD203B41FA5}">
+                          <a16:colId xmlns:a16="http://schemas.microsoft.com/office/drawing/2014/main" val="2654648091"/>
+                        </a:ext>
+                      </a:extLst>
+                    </a:gridCol>
+                    <a:gridCol w="697043">
+                      <a:extLst>
+                        <a:ext uri="{9D8B030D-6E8A-4147-A177-3AD203B41FA5}">
+                          <a16:colId xmlns:a16="http://schemas.microsoft.com/office/drawing/2014/main" val="1830746805"/>
+                        </a:ext>
+                      </a:extLst>
+                    </a:gridCol>
+                    <a:gridCol w="580793">
+                      <a:extLst>
+                        <a:ext uri="{9D8B030D-6E8A-4147-A177-3AD203B41FA5}">
+                          <a16:colId xmlns:a16="http://schemas.microsoft.com/office/drawing/2014/main" val="991393940"/>
+                        </a:ext>
+                      </a:extLst>
+                    </a:gridCol>
+                  </a:tblGrid>
+                  <a:tr h="370840">
+                    <a:tc>
+                      <a:txBody>
+                        <a:bodyPr/>
+                        <a:lstStyle/>
+                        <a:p>
+                          <a:pPr/>
+                          <a:endParaRPr lang="en-US" sz="1400" dirty="0"/>
+                        </a:p>
+                      </a:txBody>
+                      <a:tcPr/>
+                    </a:tc>
+                    <a:tc>
+                      <a:txBody>
+                        <a:bodyPr/>
+                        <a:lstStyle/>
+                        <a:p>
+                          <a:r>
+                            <a:rPr lang="en-US" sz="1400" dirty="0"/>
+                            <a:t>up</a:t>
+                          </a:r>
+                        </a:p>
+                      </a:txBody>
+                      <a:tcPr/>
+                    </a:tc>
+                    <a:tc>
+                      <a:txBody>
+                        <a:bodyPr/>
+                        <a:lstStyle/>
+                        <a:p>
+                          <a:r>
+                            <a:rPr lang="en-US" sz="1400" dirty="0"/>
+                            <a:t>right</a:t>
+                          </a:r>
+                        </a:p>
+                      </a:txBody>
+                      <a:tcPr/>
+                    </a:tc>
+                    <a:tc>
+                      <a:txBody>
+                        <a:bodyPr/>
+                        <a:lstStyle/>
+                        <a:p>
+                          <a:r>
+                            <a:rPr lang="en-US" sz="1400" dirty="0"/>
+                            <a:t>down</a:t>
+                          </a:r>
+                        </a:p>
+                      </a:txBody>
+                      <a:tcPr/>
+                    </a:tc>
+                    <a:tc>
+                      <a:txBody>
+                        <a:bodyPr/>
+                        <a:lstStyle/>
+                        <a:p>
+                          <a:r>
+                            <a:rPr lang="en-US" sz="1400" dirty="0"/>
+                            <a:t>left</a:t>
+                          </a:r>
+                        </a:p>
+                      </a:txBody>
+                      <a:tcPr/>
+                    </a:tc>
+                    <a:extLst>
+                      <a:ext uri="{0D108BD9-81ED-4DB2-BD59-A6C34878D82A}">
+                        <a16:rowId xmlns:a16="http://schemas.microsoft.com/office/drawing/2014/main" val="2008869826"/>
+                      </a:ext>
+                    </a:extLst>
+                  </a:tr>
+                  <a:tr h="370840">
+                    <a:tc>
+                      <a:txBody>
+                        <a:bodyPr/>
+                        <a:lstStyle/>
+                        <a:p>
+                          <a:r>
+                            <a:rPr lang="en-US" sz="1400" i="0" dirty="0">
+                              <a:latin typeface="+mj-lt"/>
+                            </a:rPr>
+                            <a:t>(1,1)</a:t>
+                          </a:r>
+                        </a:p>
+                      </a:txBody>
+                      <a:tcPr/>
+                    </a:tc>
+                    <a:tc>
+                      <a:txBody>
+                        <a:bodyPr/>
+                        <a:lstStyle/>
+                        <a:p>
+                          <a:pPr/>
+                          <a14:m>
+                            <m:oMathPara xmlns:m="http://schemas.openxmlformats.org/officeDocument/2006/math">
+                              <m:oMathParaPr>
+                                <m:jc m:val="centerGroup"/>
+                              </m:oMathParaPr>
+                              <m:oMath xmlns:m="http://schemas.openxmlformats.org/officeDocument/2006/math">
+                                <m:r>
+                                  <a:rPr lang="en-US" sz="1400" b="0" i="1" dirty="0" smtClean="0">
+                                    <a:latin typeface="Cambria Math" panose="02040503050406030204" pitchFamily="18" charset="0"/>
+                                  </a:rPr>
+                                  <m:t>1</m:t>
+                                </m:r>
+                              </m:oMath>
+                            </m:oMathPara>
+                          </a14:m>
+                          <a:endParaRPr dirty="0"/>
+                        </a:p>
+                      </a:txBody>
+                      <a:tcPr/>
+                    </a:tc>
+                    <a:tc>
+                      <a:txBody>
+                        <a:bodyPr/>
+                        <a:lstStyle/>
+                        <a:p>
+                          <a:pPr/>
+                          <a14:m>
+                            <m:oMathPara xmlns:m="http://schemas.openxmlformats.org/officeDocument/2006/math">
+                              <m:oMathParaPr>
+                                <m:jc m:val="centerGroup"/>
+                              </m:oMathParaPr>
+                              <m:oMath xmlns:m="http://schemas.openxmlformats.org/officeDocument/2006/math">
+                                <m:r>
+                                  <a:rPr lang="en-US" sz="1400" b="0" i="1" dirty="0" smtClean="0">
+                                    <a:latin typeface="Cambria Math" panose="02040503050406030204" pitchFamily="18" charset="0"/>
+                                  </a:rPr>
+                                  <m:t>0</m:t>
+                                </m:r>
+                              </m:oMath>
+                            </m:oMathPara>
+                          </a14:m>
+                          <a:endParaRPr dirty="0"/>
+                        </a:p>
+                      </a:txBody>
+                      <a:tcPr/>
+                    </a:tc>
+                    <a:tc>
+                      <a:txBody>
+                        <a:bodyPr/>
+                        <a:lstStyle/>
+                        <a:p>
+                          <a:pPr/>
+                          <a14:m>
+                            <m:oMathPara xmlns:m="http://schemas.openxmlformats.org/officeDocument/2006/math">
+                              <m:oMathParaPr>
+                                <m:jc m:val="centerGroup"/>
+                              </m:oMathParaPr>
+                              <m:oMath xmlns:m="http://schemas.openxmlformats.org/officeDocument/2006/math">
+                                <m:r>
+                                  <a:rPr lang="en-US" sz="1400" b="0" i="1" dirty="0" smtClean="0">
+                                    <a:latin typeface="Cambria Math" panose="02040503050406030204" pitchFamily="18" charset="0"/>
+                                  </a:rPr>
+                                  <m:t>0</m:t>
+                                </m:r>
+                              </m:oMath>
+                            </m:oMathPara>
+                          </a14:m>
+                          <a:endParaRPr dirty="0"/>
+                        </a:p>
+                      </a:txBody>
+                      <a:tcPr/>
+                    </a:tc>
+                    <a:tc>
+                      <a:txBody>
+                        <a:bodyPr/>
+                        <a:lstStyle/>
+                        <a:p>
+                          <a:pPr/>
+                          <a14:m>
+                            <m:oMathPara xmlns:m="http://schemas.openxmlformats.org/officeDocument/2006/math">
+                              <m:oMathParaPr>
+                                <m:jc m:val="centerGroup"/>
+                              </m:oMathParaPr>
+                              <m:oMath xmlns:m="http://schemas.openxmlformats.org/officeDocument/2006/math">
+                                <m:r>
+                                  <a:rPr lang="en-US" sz="1400" b="0" i="1" dirty="0" smtClean="0">
+                                    <a:latin typeface="Cambria Math" panose="02040503050406030204" pitchFamily="18" charset="0"/>
+                                  </a:rPr>
+                                  <m:t>0</m:t>
+                                </m:r>
+                              </m:oMath>
+                            </m:oMathPara>
+                          </a14:m>
+                          <a:endParaRPr dirty="0"/>
+                        </a:p>
+                      </a:txBody>
+                      <a:tcPr/>
+                    </a:tc>
+                    <a:extLst>
+                      <a:ext uri="{0D108BD9-81ED-4DB2-BD59-A6C34878D82A}">
+                        <a16:rowId xmlns:a16="http://schemas.microsoft.com/office/drawing/2014/main" val="524805492"/>
+                      </a:ext>
+                    </a:extLst>
+                  </a:tr>
+                  <a:tr h="370840">
+                    <a:tc>
+                      <a:txBody>
+                        <a:bodyPr/>
+                        <a:lstStyle/>
+                        <a:p>
+                          <a:r>
+                            <a:rPr lang="en-US" sz="1400" dirty="0"/>
+                            <a:t>…</a:t>
+                          </a:r>
+                        </a:p>
+                      </a:txBody>
+                      <a:tcPr/>
+                    </a:tc>
+                    <a:tc>
+                      <a:txBody>
+                        <a:bodyPr/>
+                        <a:lstStyle/>
+                        <a:p>
+                          <a:r>
+                            <a:rPr lang="en-US" sz="1400" dirty="0"/>
+                            <a:t>…</a:t>
+                          </a:r>
+                        </a:p>
+                      </a:txBody>
+                      <a:tcPr/>
+                    </a:tc>
+                    <a:tc>
+                      <a:txBody>
+                        <a:bodyPr/>
+                        <a:lstStyle/>
+                        <a:p>
+                          <a:pPr marL="0" marR="0" lvl="0" indent="0" algn="l" defTabSz="914400" rtl="0" eaLnBrk="1" fontAlgn="auto" latinLnBrk="0" hangingPunct="1">
+                            <a:lnSpc>
+                              <a:spcPct val="100000"/>
+                            </a:lnSpc>
+                            <a:spcBef>
+                              <a:spcPts val="0"/>
+                            </a:spcBef>
+                            <a:spcAft>
+                              <a:spcPts val="0"/>
+                            </a:spcAft>
+                            <a:buClrTx/>
+                            <a:buSzTx/>
+                            <a:buFontTx/>
+                            <a:buNone/>
+                            <a:tabLst/>
+                            <a:defRPr/>
+                          </a:pPr>
+                          <a:r>
+                            <a:rPr lang="en-US" sz="1400" dirty="0"/>
+                            <a:t>…</a:t>
+                          </a:r>
+                        </a:p>
+                      </a:txBody>
+                      <a:tcPr/>
+                    </a:tc>
+                    <a:tc>
+                      <a:txBody>
+                        <a:bodyPr/>
+                        <a:lstStyle/>
+                        <a:p>
+                          <a:pPr marL="0" marR="0" lvl="0" indent="0" algn="l" defTabSz="914400" rtl="0" eaLnBrk="1" fontAlgn="auto" latinLnBrk="0" hangingPunct="1">
+                            <a:lnSpc>
+                              <a:spcPct val="100000"/>
+                            </a:lnSpc>
+                            <a:spcBef>
+                              <a:spcPts val="0"/>
+                            </a:spcBef>
+                            <a:spcAft>
+                              <a:spcPts val="0"/>
+                            </a:spcAft>
+                            <a:buClrTx/>
+                            <a:buSzTx/>
+                            <a:buFontTx/>
+                            <a:buNone/>
+                            <a:tabLst/>
+                            <a:defRPr/>
+                          </a:pPr>
+                          <a:r>
+                            <a:rPr lang="en-US" sz="1400" dirty="0"/>
+                            <a:t>…</a:t>
+                          </a:r>
+                        </a:p>
+                      </a:txBody>
+                      <a:tcPr/>
+                    </a:tc>
+                    <a:tc>
+                      <a:txBody>
+                        <a:bodyPr/>
+                        <a:lstStyle/>
+                        <a:p>
+                          <a:r>
+                            <a:rPr lang="en-US" sz="1400" dirty="0"/>
+                            <a:t>…</a:t>
+                          </a:r>
+                        </a:p>
+                      </a:txBody>
+                      <a:tcPr/>
+                    </a:tc>
+                    <a:extLst>
+                      <a:ext uri="{0D108BD9-81ED-4DB2-BD59-A6C34878D82A}">
+                        <a16:rowId xmlns:a16="http://schemas.microsoft.com/office/drawing/2014/main" val="3725035416"/>
+                      </a:ext>
+                    </a:extLst>
+                  </a:tr>
+                  <a:tr h="370840">
+                    <a:tc>
+                      <a:txBody>
+                        <a:bodyPr/>
+                        <a:lstStyle/>
+                        <a:p>
+                          <a:r>
+                            <a:rPr lang="en-US" sz="1400" dirty="0"/>
+                            <a:t>…</a:t>
+                          </a:r>
+                        </a:p>
+                      </a:txBody>
+                      <a:tcPr/>
+                    </a:tc>
+                    <a:tc>
+                      <a:txBody>
+                        <a:bodyPr/>
+                        <a:lstStyle/>
+                        <a:p>
+                          <a:r>
+                            <a:rPr lang="en-US" sz="1400" dirty="0"/>
+                            <a:t>…</a:t>
+                          </a:r>
+                        </a:p>
+                      </a:txBody>
+                      <a:tcPr/>
+                    </a:tc>
+                    <a:tc>
+                      <a:txBody>
+                        <a:bodyPr/>
+                        <a:lstStyle/>
+                        <a:p>
+                          <a:pPr marL="0" marR="0" lvl="0" indent="0" algn="l" defTabSz="914400" rtl="0" eaLnBrk="1" fontAlgn="auto" latinLnBrk="0" hangingPunct="1">
+                            <a:lnSpc>
+                              <a:spcPct val="100000"/>
+                            </a:lnSpc>
+                            <a:spcBef>
+                              <a:spcPts val="0"/>
+                            </a:spcBef>
+                            <a:spcAft>
+                              <a:spcPts val="0"/>
+                            </a:spcAft>
+                            <a:buClrTx/>
+                            <a:buSzTx/>
+                            <a:buFontTx/>
+                            <a:buNone/>
+                            <a:tabLst/>
+                            <a:defRPr/>
+                          </a:pPr>
+                          <a:r>
+                            <a:rPr lang="en-US" sz="1400" dirty="0"/>
+                            <a:t>…</a:t>
+                          </a:r>
+                        </a:p>
+                      </a:txBody>
+                      <a:tcPr/>
+                    </a:tc>
+                    <a:tc>
+                      <a:txBody>
+                        <a:bodyPr/>
+                        <a:lstStyle/>
+                        <a:p>
+                          <a:pPr marL="0" marR="0" lvl="0" indent="0" algn="l" defTabSz="914400" rtl="0" eaLnBrk="1" fontAlgn="auto" latinLnBrk="0" hangingPunct="1">
+                            <a:lnSpc>
+                              <a:spcPct val="100000"/>
+                            </a:lnSpc>
+                            <a:spcBef>
+                              <a:spcPts val="0"/>
+                            </a:spcBef>
+                            <a:spcAft>
+                              <a:spcPts val="0"/>
+                            </a:spcAft>
+                            <a:buClrTx/>
+                            <a:buSzTx/>
+                            <a:buFontTx/>
+                            <a:buNone/>
+                            <a:tabLst/>
+                            <a:defRPr/>
+                          </a:pPr>
+                          <a:r>
+                            <a:rPr lang="en-US" sz="1400" dirty="0"/>
+                            <a:t>…</a:t>
+                          </a:r>
+                        </a:p>
+                      </a:txBody>
+                      <a:tcPr/>
+                    </a:tc>
+                    <a:tc>
+                      <a:txBody>
+                        <a:bodyPr/>
+                        <a:lstStyle/>
+                        <a:p>
+                          <a:r>
+                            <a:rPr lang="en-US" sz="1400" dirty="0"/>
+                            <a:t>…</a:t>
+                          </a:r>
+                        </a:p>
+                      </a:txBody>
+                      <a:tcPr/>
+                    </a:tc>
+                    <a:extLst>
+                      <a:ext uri="{0D108BD9-81ED-4DB2-BD59-A6C34878D82A}">
+                        <a16:rowId xmlns:a16="http://schemas.microsoft.com/office/drawing/2014/main" val="868402448"/>
+                      </a:ext>
+                    </a:extLst>
+                  </a:tr>
+                </a:tbl>
+              </a:graphicData>
+            </a:graphic>
+          </p:graphicFrame>
+        </mc:Choice>
+        <mc:Fallback>
+          <p:graphicFrame>
+            <p:nvGraphicFramePr>
+              <p:cNvPr id="14" name="Table 13">
+                <a:extLst>
+                  <a:ext uri="{FF2B5EF4-FFF2-40B4-BE49-F238E27FC236}">
+                    <a16:creationId xmlns:a16="http://schemas.microsoft.com/office/drawing/2014/main" id="{B0C27E28-F5F2-1228-2C82-4BC1196AD55A}"/>
+                  </a:ext>
+                  <a:ext uri="{C183D7F6-B498-43B3-948B-1728B52AA6E4}">
+                    <adec:decorative xmlns:adec="http://schemas.microsoft.com/office/drawing/2017/decorative" val="0"/>
+                  </a:ext>
+                </a:extLst>
+              </p:cNvPr>
+              <p:cNvGraphicFramePr>
+                <a:graphicFrameLocks noGrp="1"/>
+              </p:cNvGraphicFramePr>
+              <p:nvPr>
+                <p:extLst>
+                  <p:ext uri="{D42A27DB-BD31-4B8C-83A1-F6EECF244321}">
+                    <p14:modId xmlns:p14="http://schemas.microsoft.com/office/powerpoint/2010/main" val="1730763515"/>
+                  </p:ext>
+                </p:extLst>
+              </p:nvPr>
+            </p:nvGraphicFramePr>
+            <p:xfrm>
+              <a:off x="8623306" y="4671118"/>
+              <a:ext cx="2967074" cy="1483360"/>
+            </p:xfrm>
+            <a:graphic>
+              <a:graphicData uri="http://schemas.openxmlformats.org/drawingml/2006/table">
+                <a:tbl>
+                  <a:tblPr firstRow="1" bandRow="1">
+                    <a:tableStyleId>{93296810-A885-4BE3-A3E7-6D5BEEA58F35}</a:tableStyleId>
+                  </a:tblPr>
+                  <a:tblGrid>
+                    <a:gridCol w="547141">
+                      <a:extLst>
+                        <a:ext uri="{9D8B030D-6E8A-4147-A177-3AD203B41FA5}">
+                          <a16:colId xmlns:a16="http://schemas.microsoft.com/office/drawing/2014/main" val="3711460689"/>
+                        </a:ext>
+                      </a:extLst>
+                    </a:gridCol>
+                    <a:gridCol w="505015">
+                      <a:extLst>
+                        <a:ext uri="{9D8B030D-6E8A-4147-A177-3AD203B41FA5}">
+                          <a16:colId xmlns:a16="http://schemas.microsoft.com/office/drawing/2014/main" val="2080107700"/>
+                        </a:ext>
+                      </a:extLst>
+                    </a:gridCol>
+                    <a:gridCol w="637082">
+                      <a:extLst>
+                        <a:ext uri="{9D8B030D-6E8A-4147-A177-3AD203B41FA5}">
+                          <a16:colId xmlns:a16="http://schemas.microsoft.com/office/drawing/2014/main" val="2654648091"/>
+                        </a:ext>
+                      </a:extLst>
+                    </a:gridCol>
+                    <a:gridCol w="697043">
+                      <a:extLst>
+                        <a:ext uri="{9D8B030D-6E8A-4147-A177-3AD203B41FA5}">
+                          <a16:colId xmlns:a16="http://schemas.microsoft.com/office/drawing/2014/main" val="1830746805"/>
+                        </a:ext>
+                      </a:extLst>
+                    </a:gridCol>
+                    <a:gridCol w="580793">
+                      <a:extLst>
+                        <a:ext uri="{9D8B030D-6E8A-4147-A177-3AD203B41FA5}">
+                          <a16:colId xmlns:a16="http://schemas.microsoft.com/office/drawing/2014/main" val="991393940"/>
+                        </a:ext>
+                      </a:extLst>
+                    </a:gridCol>
+                  </a:tblGrid>
+                  <a:tr h="370840">
+                    <a:tc>
+                      <a:txBody>
+                        <a:bodyPr/>
+                        <a:lstStyle/>
+                        <a:p>
+                          <a:pPr/>
+                          <a:endParaRPr lang="en-US" sz="1400" dirty="0"/>
+                        </a:p>
+                      </a:txBody>
+                      <a:tcPr/>
+                    </a:tc>
+                    <a:tc>
+                      <a:txBody>
+                        <a:bodyPr/>
+                        <a:lstStyle/>
+                        <a:p>
+                          <a:r>
+                            <a:rPr lang="en-US" sz="1400" dirty="0"/>
+                            <a:t>up</a:t>
+                          </a:r>
+                        </a:p>
+                      </a:txBody>
+                      <a:tcPr/>
+                    </a:tc>
+                    <a:tc>
+                      <a:txBody>
+                        <a:bodyPr/>
+                        <a:lstStyle/>
+                        <a:p>
+                          <a:r>
+                            <a:rPr lang="en-US" sz="1400" dirty="0"/>
+                            <a:t>right</a:t>
+                          </a:r>
+                        </a:p>
+                      </a:txBody>
+                      <a:tcPr/>
+                    </a:tc>
+                    <a:tc>
+                      <a:txBody>
+                        <a:bodyPr/>
+                        <a:lstStyle/>
+                        <a:p>
+                          <a:r>
+                            <a:rPr lang="en-US" sz="1400" dirty="0"/>
+                            <a:t>down</a:t>
+                          </a:r>
+                        </a:p>
+                      </a:txBody>
+                      <a:tcPr/>
+                    </a:tc>
+                    <a:tc>
+                      <a:txBody>
+                        <a:bodyPr/>
+                        <a:lstStyle/>
+                        <a:p>
+                          <a:r>
+                            <a:rPr lang="en-US" sz="1400" dirty="0"/>
+                            <a:t>left</a:t>
+                          </a:r>
+                        </a:p>
+                      </a:txBody>
+                      <a:tcPr/>
+                    </a:tc>
+                    <a:extLst>
+                      <a:ext uri="{0D108BD9-81ED-4DB2-BD59-A6C34878D82A}">
+                        <a16:rowId xmlns:a16="http://schemas.microsoft.com/office/drawing/2014/main" val="2008869826"/>
+                      </a:ext>
+                    </a:extLst>
+                  </a:tr>
+                  <a:tr h="370840">
+                    <a:tc>
+                      <a:txBody>
+                        <a:bodyPr/>
+                        <a:lstStyle/>
+                        <a:p>
+                          <a:r>
+                            <a:rPr lang="en-US" sz="1400" i="0" dirty="0">
+                              <a:latin typeface="+mj-lt"/>
+                            </a:rPr>
+                            <a:t>(1,1)</a:t>
+                          </a:r>
+                        </a:p>
+                      </a:txBody>
+                      <a:tcPr/>
+                    </a:tc>
+                    <a:tc>
+                      <a:txBody>
+                        <a:bodyPr/>
+                        <a:lstStyle/>
+                        <a:p>
+                          <a:endParaRPr lang="en-US"/>
+                        </a:p>
+                      </a:txBody>
+                      <a:tcPr>
+                        <a:blipFill>
+                          <a:blip r:embed="rId5"/>
+                          <a:stretch>
+                            <a:fillRect l="-109639" t="-101639" r="-384337" b="-203279"/>
+                          </a:stretch>
+                        </a:blipFill>
+                      </a:tcPr>
+                    </a:tc>
+                    <a:tc>
+                      <a:txBody>
+                        <a:bodyPr/>
+                        <a:lstStyle/>
+                        <a:p>
+                          <a:endParaRPr lang="en-US"/>
+                        </a:p>
+                      </a:txBody>
+                      <a:tcPr>
+                        <a:blipFill>
+                          <a:blip r:embed="rId5"/>
+                          <a:stretch>
+                            <a:fillRect l="-165714" t="-101639" r="-203810" b="-203279"/>
+                          </a:stretch>
+                        </a:blipFill>
+                      </a:tcPr>
+                    </a:tc>
+                    <a:tc>
+                      <a:txBody>
+                        <a:bodyPr/>
+                        <a:lstStyle/>
+                        <a:p>
+                          <a:endParaRPr lang="en-US"/>
+                        </a:p>
+                      </a:txBody>
+                      <a:tcPr>
+                        <a:blipFill>
+                          <a:blip r:embed="rId5"/>
+                          <a:stretch>
+                            <a:fillRect l="-244737" t="-101639" r="-87719" b="-203279"/>
+                          </a:stretch>
+                        </a:blipFill>
+                      </a:tcPr>
+                    </a:tc>
+                    <a:tc>
+                      <a:txBody>
+                        <a:bodyPr/>
+                        <a:lstStyle/>
+                        <a:p>
+                          <a:endParaRPr lang="en-US"/>
+                        </a:p>
+                      </a:txBody>
+                      <a:tcPr>
+                        <a:blipFill>
+                          <a:blip r:embed="rId5"/>
+                          <a:stretch>
+                            <a:fillRect l="-409375" t="-101639" r="-4167" b="-203279"/>
+                          </a:stretch>
+                        </a:blipFill>
+                      </a:tcPr>
+                    </a:tc>
+                    <a:extLst>
+                      <a:ext uri="{0D108BD9-81ED-4DB2-BD59-A6C34878D82A}">
+                        <a16:rowId xmlns:a16="http://schemas.microsoft.com/office/drawing/2014/main" val="524805492"/>
+                      </a:ext>
+                    </a:extLst>
+                  </a:tr>
+                  <a:tr h="370840">
+                    <a:tc>
+                      <a:txBody>
+                        <a:bodyPr/>
+                        <a:lstStyle/>
+                        <a:p>
+                          <a:r>
+                            <a:rPr lang="en-US" sz="1400" dirty="0"/>
+                            <a:t>…</a:t>
+                          </a:r>
+                        </a:p>
+                      </a:txBody>
+                      <a:tcPr/>
+                    </a:tc>
+                    <a:tc>
+                      <a:txBody>
+                        <a:bodyPr/>
+                        <a:lstStyle/>
+                        <a:p>
+                          <a:r>
+                            <a:rPr lang="en-US" sz="1400" dirty="0"/>
+                            <a:t>…</a:t>
+                          </a:r>
+                        </a:p>
+                      </a:txBody>
+                      <a:tcPr/>
+                    </a:tc>
+                    <a:tc>
+                      <a:txBody>
+                        <a:bodyPr/>
+                        <a:lstStyle/>
+                        <a:p>
+                          <a:pPr marL="0" marR="0" lvl="0" indent="0" algn="l" defTabSz="914400" rtl="0" eaLnBrk="1" fontAlgn="auto" latinLnBrk="0" hangingPunct="1">
+                            <a:lnSpc>
+                              <a:spcPct val="100000"/>
+                            </a:lnSpc>
+                            <a:spcBef>
+                              <a:spcPts val="0"/>
+                            </a:spcBef>
+                            <a:spcAft>
+                              <a:spcPts val="0"/>
+                            </a:spcAft>
+                            <a:buClrTx/>
+                            <a:buSzTx/>
+                            <a:buFontTx/>
+                            <a:buNone/>
+                            <a:tabLst/>
+                            <a:defRPr/>
+                          </a:pPr>
+                          <a:r>
+                            <a:rPr lang="en-US" sz="1400" dirty="0"/>
+                            <a:t>…</a:t>
+                          </a:r>
+                        </a:p>
+                      </a:txBody>
+                      <a:tcPr/>
+                    </a:tc>
+                    <a:tc>
+                      <a:txBody>
+                        <a:bodyPr/>
+                        <a:lstStyle/>
+                        <a:p>
+                          <a:pPr marL="0" marR="0" lvl="0" indent="0" algn="l" defTabSz="914400" rtl="0" eaLnBrk="1" fontAlgn="auto" latinLnBrk="0" hangingPunct="1">
+                            <a:lnSpc>
+                              <a:spcPct val="100000"/>
+                            </a:lnSpc>
+                            <a:spcBef>
+                              <a:spcPts val="0"/>
+                            </a:spcBef>
+                            <a:spcAft>
+                              <a:spcPts val="0"/>
+                            </a:spcAft>
+                            <a:buClrTx/>
+                            <a:buSzTx/>
+                            <a:buFontTx/>
+                            <a:buNone/>
+                            <a:tabLst/>
+                            <a:defRPr/>
+                          </a:pPr>
+                          <a:r>
+                            <a:rPr lang="en-US" sz="1400" dirty="0"/>
+                            <a:t>…</a:t>
+                          </a:r>
+                        </a:p>
+                      </a:txBody>
+                      <a:tcPr/>
+                    </a:tc>
+                    <a:tc>
+                      <a:txBody>
+                        <a:bodyPr/>
+                        <a:lstStyle/>
+                        <a:p>
+                          <a:r>
+                            <a:rPr lang="en-US" sz="1400" dirty="0"/>
+                            <a:t>…</a:t>
+                          </a:r>
+                        </a:p>
+                      </a:txBody>
+                      <a:tcPr/>
+                    </a:tc>
+                    <a:extLst>
+                      <a:ext uri="{0D108BD9-81ED-4DB2-BD59-A6C34878D82A}">
+                        <a16:rowId xmlns:a16="http://schemas.microsoft.com/office/drawing/2014/main" val="3725035416"/>
+                      </a:ext>
+                    </a:extLst>
+                  </a:tr>
+                  <a:tr h="370840">
+                    <a:tc>
+                      <a:txBody>
+                        <a:bodyPr/>
+                        <a:lstStyle/>
+                        <a:p>
+                          <a:r>
+                            <a:rPr lang="en-US" sz="1400" dirty="0"/>
+                            <a:t>…</a:t>
+                          </a:r>
+                        </a:p>
+                      </a:txBody>
+                      <a:tcPr/>
+                    </a:tc>
+                    <a:tc>
+                      <a:txBody>
+                        <a:bodyPr/>
+                        <a:lstStyle/>
+                        <a:p>
+                          <a:r>
+                            <a:rPr lang="en-US" sz="1400" dirty="0"/>
+                            <a:t>…</a:t>
+                          </a:r>
+                        </a:p>
+                      </a:txBody>
+                      <a:tcPr/>
+                    </a:tc>
+                    <a:tc>
+                      <a:txBody>
+                        <a:bodyPr/>
+                        <a:lstStyle/>
+                        <a:p>
+                          <a:pPr marL="0" marR="0" lvl="0" indent="0" algn="l" defTabSz="914400" rtl="0" eaLnBrk="1" fontAlgn="auto" latinLnBrk="0" hangingPunct="1">
+                            <a:lnSpc>
+                              <a:spcPct val="100000"/>
+                            </a:lnSpc>
+                            <a:spcBef>
+                              <a:spcPts val="0"/>
+                            </a:spcBef>
+                            <a:spcAft>
+                              <a:spcPts val="0"/>
+                            </a:spcAft>
+                            <a:buClrTx/>
+                            <a:buSzTx/>
+                            <a:buFontTx/>
+                            <a:buNone/>
+                            <a:tabLst/>
+                            <a:defRPr/>
+                          </a:pPr>
+                          <a:r>
+                            <a:rPr lang="en-US" sz="1400" dirty="0"/>
+                            <a:t>…</a:t>
+                          </a:r>
+                        </a:p>
+                      </a:txBody>
+                      <a:tcPr/>
+                    </a:tc>
+                    <a:tc>
+                      <a:txBody>
+                        <a:bodyPr/>
+                        <a:lstStyle/>
+                        <a:p>
+                          <a:pPr marL="0" marR="0" lvl="0" indent="0" algn="l" defTabSz="914400" rtl="0" eaLnBrk="1" fontAlgn="auto" latinLnBrk="0" hangingPunct="1">
+                            <a:lnSpc>
+                              <a:spcPct val="100000"/>
+                            </a:lnSpc>
+                            <a:spcBef>
+                              <a:spcPts val="0"/>
+                            </a:spcBef>
+                            <a:spcAft>
+                              <a:spcPts val="0"/>
+                            </a:spcAft>
+                            <a:buClrTx/>
+                            <a:buSzTx/>
+                            <a:buFontTx/>
+                            <a:buNone/>
+                            <a:tabLst/>
+                            <a:defRPr/>
+                          </a:pPr>
+                          <a:r>
+                            <a:rPr lang="en-US" sz="1400" dirty="0"/>
+                            <a:t>…</a:t>
+                          </a:r>
+                        </a:p>
+                      </a:txBody>
+                      <a:tcPr/>
+                    </a:tc>
+                    <a:tc>
+                      <a:txBody>
+                        <a:bodyPr/>
+                        <a:lstStyle/>
+                        <a:p>
+                          <a:r>
+                            <a:rPr lang="en-US" sz="1400" dirty="0"/>
+                            <a:t>…</a:t>
+                          </a:r>
+                        </a:p>
+                      </a:txBody>
+                      <a:tcPr/>
+                    </a:tc>
+                    <a:extLst>
+                      <a:ext uri="{0D108BD9-81ED-4DB2-BD59-A6C34878D82A}">
+                        <a16:rowId xmlns:a16="http://schemas.microsoft.com/office/drawing/2014/main" val="868402448"/>
+                      </a:ext>
+                    </a:extLst>
+                  </a:tr>
+                </a:tbl>
+              </a:graphicData>
+            </a:graphic>
+          </p:graphicFrame>
+        </mc:Fallback>
+      </mc:AlternateContent>
+      <p:sp>
+        <p:nvSpPr>
+          <p:cNvPr id="4" name="Arrow: Up-Down 3">
+            <a:extLst>
+              <a:ext uri="{FF2B5EF4-FFF2-40B4-BE49-F238E27FC236}">
+                <a16:creationId xmlns:a16="http://schemas.microsoft.com/office/drawing/2014/main" id="{DAAFA24E-C804-27B5-6665-EAD8417E3B85}"/>
+              </a:ext>
+            </a:extLst>
+          </p:cNvPr>
+          <p:cNvSpPr/>
+          <p:nvPr/>
+        </p:nvSpPr>
+        <p:spPr>
+          <a:xfrm>
+            <a:off x="9802535" y="3073478"/>
+            <a:ext cx="490756" cy="954106"/>
+          </a:xfrm>
+          <a:prstGeom prst="upDownArrow">
+            <a:avLst/>
+          </a:prstGeom>
+        </p:spPr>
+        <p:style>
+          <a:lnRef idx="2">
+            <a:schemeClr val="accent1">
+              <a:shade val="15000"/>
+            </a:schemeClr>
+          </a:lnRef>
+          <a:fillRef idx="1">
+            <a:schemeClr val="accent1"/>
+          </a:fillRef>
+          <a:effectRef idx="0">
+            <a:schemeClr val="accent1"/>
+          </a:effectRef>
+          <a:fontRef idx="minor">
+            <a:schemeClr val="lt1"/>
+          </a:fontRef>
+        </p:style>
+        <p:txBody>
+          <a:bodyPr rtlCol="0" anchor="ctr"/>
+          <a:lstStyle/>
+          <a:p>
+            <a:pPr algn="ctr"/>
+            <a:endParaRPr lang="en-US"/>
+          </a:p>
+        </p:txBody>
+      </p:sp>
+      <p:sp>
+        <p:nvSpPr>
+          <p:cNvPr id="5" name="TextBox 4">
+            <a:extLst>
+              <a:ext uri="{FF2B5EF4-FFF2-40B4-BE49-F238E27FC236}">
+                <a16:creationId xmlns:a16="http://schemas.microsoft.com/office/drawing/2014/main" id="{C9F0702D-C1B2-B068-9694-65EFBDE6626C}"/>
+              </a:ext>
+            </a:extLst>
+          </p:cNvPr>
+          <p:cNvSpPr txBox="1"/>
+          <p:nvPr/>
+        </p:nvSpPr>
+        <p:spPr>
+          <a:xfrm>
+            <a:off x="10319698" y="3396642"/>
+            <a:ext cx="993408" cy="307777"/>
+          </a:xfrm>
+          <a:prstGeom prst="rect">
+            <a:avLst/>
+          </a:prstGeom>
+        </p:spPr>
+        <p:style>
+          <a:lnRef idx="3">
+            <a:schemeClr val="lt1"/>
+          </a:lnRef>
+          <a:fillRef idx="1">
+            <a:schemeClr val="accent1"/>
+          </a:fillRef>
+          <a:effectRef idx="1">
+            <a:schemeClr val="accent1"/>
+          </a:effectRef>
+          <a:fontRef idx="minor">
+            <a:schemeClr val="lt1"/>
+          </a:fontRef>
+        </p:style>
+        <p:txBody>
+          <a:bodyPr wrap="square" rtlCol="0">
+            <a:spAutoFit/>
+          </a:bodyPr>
+          <a:lstStyle/>
+          <a:p>
+            <a:pPr algn="ctr"/>
+            <a:r>
+              <a:rPr lang="en-US" sz="1400" dirty="0"/>
+              <a:t>equivalent</a:t>
+            </a:r>
+          </a:p>
+        </p:txBody>
+      </p:sp>
+    </p:spTree>
+    <p:extLst>
+      <p:ext uri="{BB962C8B-B14F-4D97-AF65-F5344CB8AC3E}">
+        <p14:creationId xmlns:p14="http://schemas.microsoft.com/office/powerpoint/2010/main" val="1371557067"/>
+      </p:ext>
+    </p:extLst>
+  </p:cSld>
+  <p:clrMapOvr>
+    <a:masterClrMapping/>
+  </p:clrMapOvr>
   <p:timing>
     <p:tnLst>
       <p:par>
@@ -8568,7 +9969,7 @@
                                         <p:tgtEl>
                                           <p:spTgt spid="3">
                                             <p:txEl>
-                                              <p:pRg st="7" end="7"/>
+                                              <p:pRg st="0" end="0"/>
                                             </p:txEl>
                                           </p:spTgt>
                                         </p:tgtEl>
@@ -8599,7 +10000,7 @@
                                         <p:tgtEl>
                                           <p:spTgt spid="3">
                                             <p:txEl>
-                                              <p:pRg st="8" end="8"/>
+                                              <p:pRg st="1" end="1"/>
                                             </p:txEl>
                                           </p:spTgt>
                                         </p:tgtEl>
@@ -8630,7 +10031,7 @@
                                         <p:tgtEl>
                                           <p:spTgt spid="3">
                                             <p:txEl>
-                                              <p:pRg st="10" end="10"/>
+                                              <p:pRg st="3" end="3"/>
                                             </p:txEl>
                                           </p:spTgt>
                                         </p:tgtEl>
@@ -8661,7 +10062,7 @@
                                         <p:tgtEl>
                                           <p:spTgt spid="3">
                                             <p:txEl>
-                                              <p:pRg st="11" end="11"/>
+                                              <p:pRg st="5" end="5"/>
                                             </p:txEl>
                                           </p:spTgt>
                                         </p:tgtEl>
@@ -8764,7 +10165,7 @@
 </p:sld>
 </file>
 
-<file path=ppt/slides/slide16.xml><?xml version="1.0" encoding="utf-8"?>
+<file path=ppt/slides/slide17.xml><?xml version="1.0" encoding="utf-8"?>
 <p:sld xmlns:a="http://schemas.openxmlformats.org/drawingml/2006/main" xmlns:r="http://schemas.openxmlformats.org/officeDocument/2006/relationships" xmlns:p="http://schemas.openxmlformats.org/presentationml/2006/main">
   <p:cSld>
     <p:spTree>
@@ -10336,7 +11737,7 @@
 </p:sld>
 </file>
 
-<file path=ppt/slides/slide17.xml><?xml version="1.0" encoding="utf-8"?>
+<file path=ppt/slides/slide18.xml><?xml version="1.0" encoding="utf-8"?>
 <p:sld xmlns:a="http://schemas.openxmlformats.org/drawingml/2006/main" xmlns:r="http://schemas.openxmlformats.org/officeDocument/2006/relationships" xmlns:p="http://schemas.openxmlformats.org/presentationml/2006/main">
   <p:cSld>
     <p:spTree>
@@ -11347,8 +12748,8 @@
           </a:p>
         </p:txBody>
       </p:sp>
-      <mc:AlternateContent xmlns:mc="http://schemas.openxmlformats.org/markup-compatibility/2006">
-        <mc:Choice xmlns:a14="http://schemas.microsoft.com/office/drawing/2010/main" Requires="a14">
+      <mc:AlternateContent xmlns:mc="http://schemas.openxmlformats.org/markup-compatibility/2006" xmlns:a14="http://schemas.microsoft.com/office/drawing/2010/main">
+        <mc:Choice Requires="a14">
           <p:graphicFrame>
             <p:nvGraphicFramePr>
               <p:cNvPr id="4" name="Table 3">
@@ -11752,7 +13153,7 @@
             </a:graphic>
           </p:graphicFrame>
         </mc:Choice>
-        <mc:Fallback>
+        <mc:Fallback xmlns="">
           <p:graphicFrame>
             <p:nvGraphicFramePr>
               <p:cNvPr id="4" name="Table 3">
@@ -12430,7 +13831,7 @@
 </p:sld>
 </file>
 
-<file path=ppt/slides/slide18.xml><?xml version="1.0" encoding="utf-8"?>
+<file path=ppt/slides/slide19.xml><?xml version="1.0" encoding="utf-8"?>
 <p:sld xmlns:a="http://schemas.openxmlformats.org/drawingml/2006/main" xmlns:r="http://schemas.openxmlformats.org/officeDocument/2006/relationships" xmlns:p="http://schemas.openxmlformats.org/presentationml/2006/main">
   <p:cSld>
     <p:spTree>
@@ -13828,7 +15229,937 @@
 </p:sld>
 </file>
 
-<file path=ppt/slides/slide19.xml><?xml version="1.0" encoding="utf-8"?>
+<file path=ppt/slides/slide2.xml><?xml version="1.0" encoding="utf-8"?>
+<p:sld xmlns:a="http://schemas.openxmlformats.org/drawingml/2006/main" xmlns:r="http://schemas.openxmlformats.org/officeDocument/2006/relationships" xmlns:p="http://schemas.openxmlformats.org/presentationml/2006/main">
+  <p:cSld>
+    <p:spTree>
+      <p:nvGrpSpPr>
+        <p:cNvPr id="1" name=""/>
+        <p:cNvGrpSpPr/>
+        <p:nvPr/>
+      </p:nvGrpSpPr>
+      <p:grpSpPr>
+        <a:xfrm>
+          <a:off x="0" y="0"/>
+          <a:ext cx="0" cy="0"/>
+          <a:chOff x="0" y="0"/>
+          <a:chExt cx="0" cy="0"/>
+        </a:xfrm>
+      </p:grpSpPr>
+      <p:sp>
+        <p:nvSpPr>
+          <p:cNvPr id="2" name="Title 1">
+            <a:extLst>
+              <a:ext uri="{FF2B5EF4-FFF2-40B4-BE49-F238E27FC236}">
+                <a16:creationId xmlns:a16="http://schemas.microsoft.com/office/drawing/2014/main" id="{A6ACE117-B0FF-607A-0862-C421EADD0E04}"/>
+              </a:ext>
+            </a:extLst>
+          </p:cNvPr>
+          <p:cNvSpPr>
+            <a:spLocks noGrp="1"/>
+          </p:cNvSpPr>
+          <p:nvPr>
+            <p:ph type="title"/>
+          </p:nvPr>
+        </p:nvSpPr>
+        <p:spPr/>
+        <p:txBody>
+          <a:bodyPr/>
+          <a:lstStyle/>
+          <a:p>
+            <a:r>
+              <a:rPr lang="en-US" dirty="0"/>
+              <a:t>The Agent–Environment Interface</a:t>
+            </a:r>
+          </a:p>
+        </p:txBody>
+      </p:sp>
+      <p:pic>
+        <p:nvPicPr>
+          <p:cNvPr id="5" name="Content Placeholder 4">
+            <a:extLst>
+              <a:ext uri="{FF2B5EF4-FFF2-40B4-BE49-F238E27FC236}">
+                <a16:creationId xmlns:a16="http://schemas.microsoft.com/office/drawing/2014/main" id="{C48F0FB8-B5FA-9473-2D66-BFE57DC88A84}"/>
+              </a:ext>
+            </a:extLst>
+          </p:cNvPr>
+          <p:cNvPicPr>
+            <a:picLocks noGrp="1" noChangeAspect="1"/>
+          </p:cNvPicPr>
+          <p:nvPr>
+            <p:ph idx="1"/>
+          </p:nvPr>
+        </p:nvPicPr>
+        <p:blipFill>
+          <a:blip r:embed="rId2"/>
+          <a:stretch>
+            <a:fillRect/>
+          </a:stretch>
+        </p:blipFill>
+        <p:spPr>
+          <a:xfrm>
+            <a:off x="4962889" y="1082666"/>
+            <a:ext cx="7056983" cy="2346334"/>
+          </a:xfrm>
+          <a:prstGeom prst="rect">
+            <a:avLst/>
+          </a:prstGeom>
+        </p:spPr>
+      </p:pic>
+      <mc:AlternateContent xmlns:mc="http://schemas.openxmlformats.org/markup-compatibility/2006" xmlns:a14="http://schemas.microsoft.com/office/drawing/2010/main">
+        <mc:Choice Requires="a14">
+          <p:sp>
+            <p:nvSpPr>
+              <p:cNvPr id="7" name="TextBox 6">
+                <a:extLst>
+                  <a:ext uri="{FF2B5EF4-FFF2-40B4-BE49-F238E27FC236}">
+                    <a16:creationId xmlns:a16="http://schemas.microsoft.com/office/drawing/2014/main" id="{3101D76A-A954-6D50-D235-D0B41CFF50CB}"/>
+                  </a:ext>
+                </a:extLst>
+              </p:cNvPr>
+              <p:cNvSpPr txBox="1"/>
+              <p:nvPr/>
+            </p:nvSpPr>
+            <p:spPr>
+              <a:xfrm>
+                <a:off x="838200" y="3806015"/>
+                <a:ext cx="10261697" cy="2585323"/>
+              </a:xfrm>
+              <a:prstGeom prst="rect">
+                <a:avLst/>
+              </a:prstGeom>
+              <a:noFill/>
+            </p:spPr>
+            <p:txBody>
+              <a:bodyPr wrap="square">
+                <a:spAutoFit/>
+              </a:bodyPr>
+              <a:lstStyle/>
+              <a:p>
+                <a:pPr algn="l"/>
+                <a:r>
+                  <a:rPr lang="en-US" dirty="0"/>
+                  <a:t>An </a:t>
+                </a:r>
+                <a:r>
+                  <a:rPr lang="en-US" b="1" dirty="0"/>
+                  <a:t>interaction</a:t>
+                </a:r>
+                <a:r>
+                  <a:rPr lang="en-US" dirty="0"/>
+                  <a:t> is a sequence of discrete time steps, </a:t>
+                </a:r>
+                <a14:m>
+                  <m:oMath xmlns:m="http://schemas.openxmlformats.org/officeDocument/2006/math">
+                    <m:r>
+                      <a:rPr lang="en-US" i="1" dirty="0" smtClean="0">
+                        <a:latin typeface="Cambria Math" panose="02040503050406030204" pitchFamily="18" charset="0"/>
+                      </a:rPr>
+                      <m:t>𝑡</m:t>
+                    </m:r>
+                    <m:r>
+                      <a:rPr lang="en-US" i="1" dirty="0" smtClean="0">
+                        <a:latin typeface="Cambria Math" panose="02040503050406030204" pitchFamily="18" charset="0"/>
+                      </a:rPr>
+                      <m:t> = 0, 1, 2, 3, . . .</m:t>
+                    </m:r>
+                  </m:oMath>
+                </a14:m>
+                <a:endParaRPr lang="en-US" dirty="0"/>
+              </a:p>
+              <a:p>
+                <a:pPr marL="171450" indent="-171450" algn="l">
+                  <a:buFont typeface="Arial" panose="020B0604020202020204" pitchFamily="34" charset="0"/>
+                  <a:buChar char="•"/>
+                </a:pPr>
+                <a:r>
+                  <a:rPr lang="en-US" dirty="0"/>
+                  <a:t> At each time step </a:t>
+                </a:r>
+                <a14:m>
+                  <m:oMath xmlns:m="http://schemas.openxmlformats.org/officeDocument/2006/math">
+                    <m:r>
+                      <a:rPr lang="en-US" i="1" dirty="0" smtClean="0">
+                        <a:latin typeface="Cambria Math" panose="02040503050406030204" pitchFamily="18" charset="0"/>
+                      </a:rPr>
+                      <m:t>𝑡</m:t>
+                    </m:r>
+                  </m:oMath>
+                </a14:m>
+                <a:r>
+                  <a:rPr lang="en-US" dirty="0"/>
+                  <a:t>: </a:t>
+                </a:r>
+              </a:p>
+              <a:p>
+                <a:pPr marL="800100" lvl="1" indent="-342900">
+                  <a:buFont typeface="+mj-lt"/>
+                  <a:buAutoNum type="arabicPeriod"/>
+                </a:pPr>
+                <a:r>
+                  <a:rPr lang="en-US" dirty="0"/>
+                  <a:t>Agent receives some representation of the environment’s state </a:t>
+                </a:r>
+                <a14:m>
+                  <m:oMath xmlns:m="http://schemas.openxmlformats.org/officeDocument/2006/math">
+                    <m:sSub>
+                      <m:sSubPr>
+                        <m:ctrlPr>
+                          <a:rPr lang="en-US" b="0" i="1" dirty="0" smtClean="0">
+                            <a:latin typeface="Cambria Math" panose="02040503050406030204" pitchFamily="18" charset="0"/>
+                          </a:rPr>
+                        </m:ctrlPr>
+                      </m:sSubPr>
+                      <m:e>
+                        <m:r>
+                          <a:rPr lang="en-US" b="0" i="1" dirty="0" smtClean="0">
+                            <a:latin typeface="Cambria Math" panose="02040503050406030204" pitchFamily="18" charset="0"/>
+                          </a:rPr>
+                          <m:t>𝑠</m:t>
+                        </m:r>
+                      </m:e>
+                      <m:sub>
+                        <m:r>
+                          <a:rPr lang="en-US" b="0" i="1" dirty="0" smtClean="0">
+                            <a:latin typeface="Cambria Math" panose="02040503050406030204" pitchFamily="18" charset="0"/>
+                          </a:rPr>
+                          <m:t>𝑡</m:t>
+                        </m:r>
+                      </m:sub>
+                    </m:sSub>
+                    <m:r>
+                      <a:rPr lang="en-US" b="0" i="1" dirty="0" smtClean="0">
+                        <a:latin typeface="Cambria Math" panose="02040503050406030204" pitchFamily="18" charset="0"/>
+                      </a:rPr>
+                      <m:t>∈</m:t>
+                    </m:r>
+                    <m:r>
+                      <a:rPr lang="en-US" b="0" i="1" dirty="0" smtClean="0">
+                        <a:latin typeface="Cambria Math" panose="02040503050406030204" pitchFamily="18" charset="0"/>
+                        <a:ea typeface="Cambria Math" panose="02040503050406030204" pitchFamily="18" charset="0"/>
+                      </a:rPr>
+                      <m:t>𝒮</m:t>
+                    </m:r>
+                    <m:r>
+                      <a:rPr lang="en-US" i="1" dirty="0" smtClean="0">
+                        <a:latin typeface="Cambria Math" panose="02040503050406030204" pitchFamily="18" charset="0"/>
+                      </a:rPr>
+                      <m:t> </m:t>
+                    </m:r>
+                  </m:oMath>
+                </a14:m>
+                <a:endParaRPr lang="en-US" dirty="0"/>
+              </a:p>
+              <a:p>
+                <a:pPr marL="800100" lvl="1" indent="-342900">
+                  <a:buFont typeface="+mj-lt"/>
+                  <a:buAutoNum type="arabicPeriod"/>
+                </a:pPr>
+                <a:r>
+                  <a:rPr lang="en-US" dirty="0"/>
+                  <a:t>Agent selects an action, </a:t>
+                </a:r>
+                <a14:m>
+                  <m:oMath xmlns:m="http://schemas.openxmlformats.org/officeDocument/2006/math">
+                    <m:sSub>
+                      <m:sSubPr>
+                        <m:ctrlPr>
+                          <a:rPr lang="en-US" b="0" i="1" dirty="0" smtClean="0">
+                            <a:latin typeface="Cambria Math" panose="02040503050406030204" pitchFamily="18" charset="0"/>
+                          </a:rPr>
+                        </m:ctrlPr>
+                      </m:sSubPr>
+                      <m:e>
+                        <m:r>
+                          <a:rPr lang="en-US" b="0" i="1" dirty="0" smtClean="0">
+                            <a:latin typeface="Cambria Math" panose="02040503050406030204" pitchFamily="18" charset="0"/>
+                          </a:rPr>
+                          <m:t>𝑎</m:t>
+                        </m:r>
+                      </m:e>
+                      <m:sub>
+                        <m:r>
+                          <a:rPr lang="en-US" b="0" i="1" dirty="0" smtClean="0">
+                            <a:latin typeface="Cambria Math" panose="02040503050406030204" pitchFamily="18" charset="0"/>
+                          </a:rPr>
+                          <m:t>𝑡</m:t>
+                        </m:r>
+                      </m:sub>
+                    </m:sSub>
+                    <m:r>
+                      <a:rPr lang="en-US" b="0" i="1" dirty="0" smtClean="0">
+                        <a:latin typeface="Cambria Math" panose="02040503050406030204" pitchFamily="18" charset="0"/>
+                      </a:rPr>
+                      <m:t>∈</m:t>
+                    </m:r>
+                    <m:r>
+                      <a:rPr lang="en-US" b="0" i="1" dirty="0" smtClean="0">
+                        <a:latin typeface="Cambria Math" panose="02040503050406030204" pitchFamily="18" charset="0"/>
+                        <a:ea typeface="Cambria Math" panose="02040503050406030204" pitchFamily="18" charset="0"/>
+                      </a:rPr>
+                      <m:t>𝒜</m:t>
+                    </m:r>
+                    <m:r>
+                      <a:rPr lang="en-US" b="0" i="1" dirty="0" smtClean="0">
+                        <a:latin typeface="Cambria Math" panose="02040503050406030204" pitchFamily="18" charset="0"/>
+                        <a:ea typeface="Cambria Math" panose="02040503050406030204" pitchFamily="18" charset="0"/>
+                      </a:rPr>
+                      <m:t>(</m:t>
+                    </m:r>
+                    <m:sSub>
+                      <m:sSubPr>
+                        <m:ctrlPr>
+                          <a:rPr lang="en-US" b="0" i="1" dirty="0" smtClean="0">
+                            <a:latin typeface="Cambria Math" panose="02040503050406030204" pitchFamily="18" charset="0"/>
+                            <a:ea typeface="Cambria Math" panose="02040503050406030204" pitchFamily="18" charset="0"/>
+                          </a:rPr>
+                        </m:ctrlPr>
+                      </m:sSubPr>
+                      <m:e>
+                        <m:r>
+                          <a:rPr lang="en-US" b="0" i="1" dirty="0" smtClean="0">
+                            <a:latin typeface="Cambria Math" panose="02040503050406030204" pitchFamily="18" charset="0"/>
+                            <a:ea typeface="Cambria Math" panose="02040503050406030204" pitchFamily="18" charset="0"/>
+                          </a:rPr>
+                          <m:t>𝑠</m:t>
+                        </m:r>
+                      </m:e>
+                      <m:sub>
+                        <m:r>
+                          <a:rPr lang="en-US" b="0" i="1" dirty="0" smtClean="0">
+                            <a:latin typeface="Cambria Math" panose="02040503050406030204" pitchFamily="18" charset="0"/>
+                            <a:ea typeface="Cambria Math" panose="02040503050406030204" pitchFamily="18" charset="0"/>
+                          </a:rPr>
+                          <m:t>𝑡</m:t>
+                        </m:r>
+                      </m:sub>
+                    </m:sSub>
+                    <m:r>
+                      <a:rPr lang="en-US" b="0" i="1" dirty="0" smtClean="0">
+                        <a:latin typeface="Cambria Math" panose="02040503050406030204" pitchFamily="18" charset="0"/>
+                        <a:ea typeface="Cambria Math" panose="02040503050406030204" pitchFamily="18" charset="0"/>
+                      </a:rPr>
+                      <m:t>)</m:t>
+                    </m:r>
+                  </m:oMath>
+                </a14:m>
+                <a:endParaRPr lang="en-US" dirty="0"/>
+              </a:p>
+              <a:p>
+                <a:pPr marL="800100" lvl="1" indent="-342900">
+                  <a:buFont typeface="+mj-lt"/>
+                  <a:buAutoNum type="arabicPeriod"/>
+                </a:pPr>
+                <a:r>
+                  <a:rPr lang="en-US" dirty="0"/>
+                  <a:t>One time step later (as a consequence of its action) the agent receives a numerical reward, </a:t>
+                </a:r>
+                <a14:m>
+                  <m:oMath xmlns:m="http://schemas.openxmlformats.org/officeDocument/2006/math">
+                    <m:sSub>
+                      <m:sSubPr>
+                        <m:ctrlPr>
+                          <a:rPr lang="en-US" b="0" i="1" dirty="0" smtClean="0">
+                            <a:latin typeface="Cambria Math" panose="02040503050406030204" pitchFamily="18" charset="0"/>
+                          </a:rPr>
+                        </m:ctrlPr>
+                      </m:sSubPr>
+                      <m:e>
+                        <m:r>
+                          <a:rPr lang="en-US" b="0" i="1" dirty="0" smtClean="0">
+                            <a:latin typeface="Cambria Math" panose="02040503050406030204" pitchFamily="18" charset="0"/>
+                          </a:rPr>
+                          <m:t>𝑟</m:t>
+                        </m:r>
+                      </m:e>
+                      <m:sub>
+                        <m:r>
+                          <a:rPr lang="en-US" b="0" i="1" dirty="0" smtClean="0">
+                            <a:latin typeface="Cambria Math" panose="02040503050406030204" pitchFamily="18" charset="0"/>
+                          </a:rPr>
+                          <m:t>𝑡</m:t>
+                        </m:r>
+                        <m:r>
+                          <a:rPr lang="en-US" b="0" i="1" dirty="0" smtClean="0">
+                            <a:latin typeface="Cambria Math" panose="02040503050406030204" pitchFamily="18" charset="0"/>
+                          </a:rPr>
+                          <m:t>+1</m:t>
+                        </m:r>
+                      </m:sub>
+                    </m:sSub>
+                    <m:r>
+                      <a:rPr lang="en-US" b="0" i="1" dirty="0" smtClean="0">
+                        <a:latin typeface="Cambria Math" panose="02040503050406030204" pitchFamily="18" charset="0"/>
+                      </a:rPr>
+                      <m:t>∈</m:t>
+                    </m:r>
+                    <m:r>
+                      <a:rPr lang="en-US" b="0" i="1" dirty="0" smtClean="0">
+                        <a:latin typeface="Cambria Math" panose="02040503050406030204" pitchFamily="18" charset="0"/>
+                        <a:ea typeface="Cambria Math" panose="02040503050406030204" pitchFamily="18" charset="0"/>
+                      </a:rPr>
+                      <m:t>ℛ</m:t>
+                    </m:r>
+                    <m:r>
+                      <a:rPr lang="en-US" b="0" i="1" dirty="0" smtClean="0">
+                        <a:latin typeface="Cambria Math" panose="02040503050406030204" pitchFamily="18" charset="0"/>
+                      </a:rPr>
+                      <m:t> </m:t>
+                    </m:r>
+                  </m:oMath>
+                </a14:m>
+                <a:r>
+                  <a:rPr lang="en-US" dirty="0"/>
+                  <a:t>and finds itself in a new state </a:t>
+                </a:r>
+                <a14:m>
+                  <m:oMath xmlns:m="http://schemas.openxmlformats.org/officeDocument/2006/math">
+                    <m:sSub>
+                      <m:sSubPr>
+                        <m:ctrlPr>
+                          <a:rPr lang="en-US" b="0" i="1" dirty="0" smtClean="0">
+                            <a:latin typeface="Cambria Math" panose="02040503050406030204" pitchFamily="18" charset="0"/>
+                          </a:rPr>
+                        </m:ctrlPr>
+                      </m:sSubPr>
+                      <m:e>
+                        <m:r>
+                          <a:rPr lang="en-US" b="0" i="1" dirty="0" smtClean="0">
+                            <a:latin typeface="Cambria Math" panose="02040503050406030204" pitchFamily="18" charset="0"/>
+                          </a:rPr>
+                          <m:t>𝑠</m:t>
+                        </m:r>
+                      </m:e>
+                      <m:sub>
+                        <m:r>
+                          <a:rPr lang="en-US" b="0" i="1" dirty="0" smtClean="0">
+                            <a:latin typeface="Cambria Math" panose="02040503050406030204" pitchFamily="18" charset="0"/>
+                          </a:rPr>
+                          <m:t>𝑡</m:t>
+                        </m:r>
+                        <m:r>
+                          <a:rPr lang="en-US" b="0" i="1" dirty="0" smtClean="0">
+                            <a:latin typeface="Cambria Math" panose="02040503050406030204" pitchFamily="18" charset="0"/>
+                          </a:rPr>
+                          <m:t>+1</m:t>
+                        </m:r>
+                      </m:sub>
+                    </m:sSub>
+                  </m:oMath>
+                </a14:m>
+                <a:endParaRPr lang="en-US" dirty="0"/>
+              </a:p>
+              <a:p>
+                <a:endParaRPr lang="en-US" dirty="0"/>
+              </a:p>
+              <a:p>
+                <a:r>
+                  <a:rPr lang="en-US" dirty="0"/>
+                  <a:t>Leads to sequence or trajectory that begins like this:</a:t>
+                </a:r>
+              </a:p>
+              <a:p>
+                <a:pPr/>
+                <a14:m>
+                  <m:oMathPara xmlns:m="http://schemas.openxmlformats.org/officeDocument/2006/math">
+                    <m:oMathParaPr>
+                      <m:jc m:val="centerGroup"/>
+                    </m:oMathParaPr>
+                    <m:oMath xmlns:m="http://schemas.openxmlformats.org/officeDocument/2006/math">
+                      <m:sSub>
+                        <m:sSubPr>
+                          <m:ctrlPr>
+                            <a:rPr lang="en-US" b="0" i="1" dirty="0" smtClean="0">
+                              <a:latin typeface="Cambria Math" panose="02040503050406030204" pitchFamily="18" charset="0"/>
+                            </a:rPr>
+                          </m:ctrlPr>
+                        </m:sSubPr>
+                        <m:e>
+                          <m:r>
+                            <a:rPr lang="en-US" i="1" dirty="0" smtClean="0">
+                              <a:latin typeface="Cambria Math" panose="02040503050406030204" pitchFamily="18" charset="0"/>
+                            </a:rPr>
+                            <m:t>𝑆</m:t>
+                          </m:r>
+                        </m:e>
+                        <m:sub>
+                          <m:r>
+                            <a:rPr lang="en-US" b="0" i="1" dirty="0" smtClean="0">
+                              <a:latin typeface="Cambria Math" panose="02040503050406030204" pitchFamily="18" charset="0"/>
+                            </a:rPr>
+                            <m:t>0</m:t>
+                          </m:r>
+                        </m:sub>
+                      </m:sSub>
+                      <m:r>
+                        <a:rPr lang="en-US" i="1" dirty="0" smtClean="0">
+                          <a:latin typeface="Cambria Math" panose="02040503050406030204" pitchFamily="18" charset="0"/>
+                        </a:rPr>
+                        <m:t>,</m:t>
+                      </m:r>
+                      <m:sSub>
+                        <m:sSubPr>
+                          <m:ctrlPr>
+                            <a:rPr lang="en-US" b="0" i="1" dirty="0" smtClean="0">
+                              <a:latin typeface="Cambria Math" panose="02040503050406030204" pitchFamily="18" charset="0"/>
+                            </a:rPr>
+                          </m:ctrlPr>
+                        </m:sSubPr>
+                        <m:e>
+                          <m:r>
+                            <a:rPr lang="en-US" i="1" dirty="0" smtClean="0">
+                              <a:latin typeface="Cambria Math" panose="02040503050406030204" pitchFamily="18" charset="0"/>
+                            </a:rPr>
+                            <m:t>𝐴</m:t>
+                          </m:r>
+                        </m:e>
+                        <m:sub>
+                          <m:r>
+                            <a:rPr lang="en-US" b="0" i="1" dirty="0" smtClean="0">
+                              <a:latin typeface="Cambria Math" panose="02040503050406030204" pitchFamily="18" charset="0"/>
+                            </a:rPr>
+                            <m:t>0</m:t>
+                          </m:r>
+                        </m:sub>
+                      </m:sSub>
+                      <m:r>
+                        <a:rPr lang="en-US" i="1" dirty="0" smtClean="0">
+                          <a:latin typeface="Cambria Math" panose="02040503050406030204" pitchFamily="18" charset="0"/>
+                        </a:rPr>
+                        <m:t>,</m:t>
+                      </m:r>
+                      <m:sSub>
+                        <m:sSubPr>
+                          <m:ctrlPr>
+                            <a:rPr lang="en-US" b="0" i="1" dirty="0" smtClean="0">
+                              <a:latin typeface="Cambria Math" panose="02040503050406030204" pitchFamily="18" charset="0"/>
+                            </a:rPr>
+                          </m:ctrlPr>
+                        </m:sSubPr>
+                        <m:e>
+                          <m:r>
+                            <a:rPr lang="en-US" i="1" dirty="0" smtClean="0">
+                              <a:latin typeface="Cambria Math" panose="02040503050406030204" pitchFamily="18" charset="0"/>
+                            </a:rPr>
+                            <m:t>𝑅</m:t>
+                          </m:r>
+                        </m:e>
+                        <m:sub>
+                          <m:r>
+                            <a:rPr lang="en-US" b="0" i="1" dirty="0" smtClean="0">
+                              <a:latin typeface="Cambria Math" panose="02040503050406030204" pitchFamily="18" charset="0"/>
+                            </a:rPr>
+                            <m:t>1</m:t>
+                          </m:r>
+                        </m:sub>
+                      </m:sSub>
+                      <m:r>
+                        <a:rPr lang="en-US" i="1" dirty="0" smtClean="0">
+                          <a:latin typeface="Cambria Math" panose="02040503050406030204" pitchFamily="18" charset="0"/>
+                        </a:rPr>
+                        <m:t>, </m:t>
+                      </m:r>
+                      <m:sSub>
+                        <m:sSubPr>
+                          <m:ctrlPr>
+                            <a:rPr lang="en-US" b="0" i="1" dirty="0" smtClean="0">
+                              <a:latin typeface="Cambria Math" panose="02040503050406030204" pitchFamily="18" charset="0"/>
+                            </a:rPr>
+                          </m:ctrlPr>
+                        </m:sSubPr>
+                        <m:e>
+                          <m:r>
+                            <a:rPr lang="en-US" i="1" dirty="0" smtClean="0">
+                              <a:latin typeface="Cambria Math" panose="02040503050406030204" pitchFamily="18" charset="0"/>
+                            </a:rPr>
+                            <m:t>𝑆</m:t>
+                          </m:r>
+                        </m:e>
+                        <m:sub>
+                          <m:r>
+                            <a:rPr lang="en-US" b="0" i="1" dirty="0" smtClean="0">
+                              <a:latin typeface="Cambria Math" panose="02040503050406030204" pitchFamily="18" charset="0"/>
+                            </a:rPr>
+                            <m:t>1</m:t>
+                          </m:r>
+                        </m:sub>
+                      </m:sSub>
+                      <m:r>
+                        <a:rPr lang="en-US" i="1" dirty="0" smtClean="0">
+                          <a:latin typeface="Cambria Math" panose="02040503050406030204" pitchFamily="18" charset="0"/>
+                        </a:rPr>
+                        <m:t>,</m:t>
+                      </m:r>
+                      <m:sSub>
+                        <m:sSubPr>
+                          <m:ctrlPr>
+                            <a:rPr lang="en-US" b="0" i="1" dirty="0" smtClean="0">
+                              <a:latin typeface="Cambria Math" panose="02040503050406030204" pitchFamily="18" charset="0"/>
+                            </a:rPr>
+                          </m:ctrlPr>
+                        </m:sSubPr>
+                        <m:e>
+                          <m:r>
+                            <a:rPr lang="en-US" i="1" dirty="0" smtClean="0">
+                              <a:latin typeface="Cambria Math" panose="02040503050406030204" pitchFamily="18" charset="0"/>
+                            </a:rPr>
+                            <m:t>𝐴</m:t>
+                          </m:r>
+                        </m:e>
+                        <m:sub>
+                          <m:r>
+                            <a:rPr lang="en-US" b="0" i="1" dirty="0" smtClean="0">
+                              <a:latin typeface="Cambria Math" panose="02040503050406030204" pitchFamily="18" charset="0"/>
+                            </a:rPr>
+                            <m:t>1</m:t>
+                          </m:r>
+                        </m:sub>
+                      </m:sSub>
+                      <m:r>
+                        <a:rPr lang="en-US" i="1" dirty="0" smtClean="0">
+                          <a:latin typeface="Cambria Math" panose="02040503050406030204" pitchFamily="18" charset="0"/>
+                        </a:rPr>
+                        <m:t>,</m:t>
+                      </m:r>
+                      <m:sSub>
+                        <m:sSubPr>
+                          <m:ctrlPr>
+                            <a:rPr lang="en-US" b="0" i="1" dirty="0" smtClean="0">
+                              <a:latin typeface="Cambria Math" panose="02040503050406030204" pitchFamily="18" charset="0"/>
+                            </a:rPr>
+                          </m:ctrlPr>
+                        </m:sSubPr>
+                        <m:e>
+                          <m:r>
+                            <a:rPr lang="en-US" i="1" dirty="0" smtClean="0">
+                              <a:latin typeface="Cambria Math" panose="02040503050406030204" pitchFamily="18" charset="0"/>
+                            </a:rPr>
+                            <m:t>𝑅</m:t>
+                          </m:r>
+                        </m:e>
+                        <m:sub>
+                          <m:r>
+                            <a:rPr lang="en-US" b="0" i="1" dirty="0" smtClean="0">
+                              <a:latin typeface="Cambria Math" panose="02040503050406030204" pitchFamily="18" charset="0"/>
+                            </a:rPr>
+                            <m:t>2</m:t>
+                          </m:r>
+                        </m:sub>
+                      </m:sSub>
+                      <m:r>
+                        <a:rPr lang="en-US" i="1" dirty="0" smtClean="0">
+                          <a:latin typeface="Cambria Math" panose="02040503050406030204" pitchFamily="18" charset="0"/>
+                        </a:rPr>
+                        <m:t>, </m:t>
+                      </m:r>
+                      <m:sSub>
+                        <m:sSubPr>
+                          <m:ctrlPr>
+                            <a:rPr lang="en-US" b="0" i="1" dirty="0" smtClean="0">
+                              <a:latin typeface="Cambria Math" panose="02040503050406030204" pitchFamily="18" charset="0"/>
+                            </a:rPr>
+                          </m:ctrlPr>
+                        </m:sSubPr>
+                        <m:e>
+                          <m:r>
+                            <a:rPr lang="en-US" i="1" dirty="0" smtClean="0">
+                              <a:latin typeface="Cambria Math" panose="02040503050406030204" pitchFamily="18" charset="0"/>
+                            </a:rPr>
+                            <m:t>𝑆</m:t>
+                          </m:r>
+                        </m:e>
+                        <m:sub>
+                          <m:r>
+                            <a:rPr lang="en-US" b="0" i="1" dirty="0" smtClean="0">
+                              <a:latin typeface="Cambria Math" panose="02040503050406030204" pitchFamily="18" charset="0"/>
+                            </a:rPr>
+                            <m:t>2</m:t>
+                          </m:r>
+                        </m:sub>
+                      </m:sSub>
+                      <m:r>
+                        <a:rPr lang="en-US" i="1" dirty="0" smtClean="0">
+                          <a:latin typeface="Cambria Math" panose="02040503050406030204" pitchFamily="18" charset="0"/>
+                        </a:rPr>
+                        <m:t>,</m:t>
+                      </m:r>
+                      <m:sSub>
+                        <m:sSubPr>
+                          <m:ctrlPr>
+                            <a:rPr lang="en-US" b="0" i="1" dirty="0" smtClean="0">
+                              <a:latin typeface="Cambria Math" panose="02040503050406030204" pitchFamily="18" charset="0"/>
+                            </a:rPr>
+                          </m:ctrlPr>
+                        </m:sSubPr>
+                        <m:e>
+                          <m:r>
+                            <a:rPr lang="en-US" i="1" dirty="0" smtClean="0">
+                              <a:latin typeface="Cambria Math" panose="02040503050406030204" pitchFamily="18" charset="0"/>
+                            </a:rPr>
+                            <m:t>𝐴</m:t>
+                          </m:r>
+                        </m:e>
+                        <m:sub>
+                          <m:r>
+                            <a:rPr lang="en-US" b="0" i="1" dirty="0" smtClean="0">
+                              <a:latin typeface="Cambria Math" panose="02040503050406030204" pitchFamily="18" charset="0"/>
+                            </a:rPr>
+                            <m:t>2</m:t>
+                          </m:r>
+                        </m:sub>
+                      </m:sSub>
+                      <m:r>
+                        <a:rPr lang="en-US" i="1" dirty="0" smtClean="0">
+                          <a:latin typeface="Cambria Math" panose="02040503050406030204" pitchFamily="18" charset="0"/>
+                        </a:rPr>
+                        <m:t>,</m:t>
+                      </m:r>
+                      <m:sSub>
+                        <m:sSubPr>
+                          <m:ctrlPr>
+                            <a:rPr lang="en-US" b="0" i="1" dirty="0" smtClean="0">
+                              <a:latin typeface="Cambria Math" panose="02040503050406030204" pitchFamily="18" charset="0"/>
+                            </a:rPr>
+                          </m:ctrlPr>
+                        </m:sSubPr>
+                        <m:e>
+                          <m:r>
+                            <a:rPr lang="en-US" i="1" dirty="0" smtClean="0">
+                              <a:latin typeface="Cambria Math" panose="02040503050406030204" pitchFamily="18" charset="0"/>
+                            </a:rPr>
+                            <m:t>𝑅</m:t>
+                          </m:r>
+                        </m:e>
+                        <m:sub>
+                          <m:r>
+                            <a:rPr lang="en-US" b="0" i="1" dirty="0" smtClean="0">
+                              <a:latin typeface="Cambria Math" panose="02040503050406030204" pitchFamily="18" charset="0"/>
+                            </a:rPr>
+                            <m:t>3</m:t>
+                          </m:r>
+                        </m:sub>
+                      </m:sSub>
+                      <m:r>
+                        <a:rPr lang="en-US" i="1" dirty="0" smtClean="0">
+                          <a:latin typeface="Cambria Math" panose="02040503050406030204" pitchFamily="18" charset="0"/>
+                        </a:rPr>
+                        <m:t>, . . . </m:t>
+                      </m:r>
+                    </m:oMath>
+                  </m:oMathPara>
+                </a14:m>
+                <a:endParaRPr lang="en-US" i="1" dirty="0"/>
+              </a:p>
+            </p:txBody>
+          </p:sp>
+        </mc:Choice>
+        <mc:Fallback xmlns="">
+          <p:sp>
+            <p:nvSpPr>
+              <p:cNvPr id="7" name="TextBox 6">
+                <a:extLst>
+                  <a:ext uri="{FF2B5EF4-FFF2-40B4-BE49-F238E27FC236}">
+                    <a16:creationId xmlns:a16="http://schemas.microsoft.com/office/drawing/2014/main" id="{3101D76A-A954-6D50-D235-D0B41CFF50CB}"/>
+                  </a:ext>
+                </a:extLst>
+              </p:cNvPr>
+              <p:cNvSpPr txBox="1">
+                <a:spLocks noRot="1" noChangeAspect="1" noMove="1" noResize="1" noEditPoints="1" noAdjustHandles="1" noChangeArrowheads="1" noChangeShapeType="1" noTextEdit="1"/>
+              </p:cNvSpPr>
+              <p:nvPr/>
+            </p:nvSpPr>
+            <p:spPr>
+              <a:xfrm>
+                <a:off x="838200" y="3806015"/>
+                <a:ext cx="10261697" cy="2585323"/>
+              </a:xfrm>
+              <a:prstGeom prst="rect">
+                <a:avLst/>
+              </a:prstGeom>
+              <a:blipFill>
+                <a:blip r:embed="rId3"/>
+                <a:stretch>
+                  <a:fillRect l="-535" t="-943"/>
+                </a:stretch>
+              </a:blipFill>
+            </p:spPr>
+            <p:txBody>
+              <a:bodyPr/>
+              <a:lstStyle/>
+              <a:p>
+                <a:r>
+                  <a:rPr lang="en-US">
+                    <a:noFill/>
+                  </a:rPr>
+                  <a:t> </a:t>
+                </a:r>
+              </a:p>
+            </p:txBody>
+          </p:sp>
+        </mc:Fallback>
+      </mc:AlternateContent>
+      <p:sp>
+        <p:nvSpPr>
+          <p:cNvPr id="9" name="TextBox 8">
+            <a:extLst>
+              <a:ext uri="{FF2B5EF4-FFF2-40B4-BE49-F238E27FC236}">
+                <a16:creationId xmlns:a16="http://schemas.microsoft.com/office/drawing/2014/main" id="{D35FA07E-AB2F-CDB5-6011-310964B51CC6}"/>
+              </a:ext>
+            </a:extLst>
+          </p:cNvPr>
+          <p:cNvSpPr txBox="1"/>
+          <p:nvPr/>
+        </p:nvSpPr>
+        <p:spPr>
+          <a:xfrm>
+            <a:off x="940576" y="1124198"/>
+            <a:ext cx="4343400" cy="2585323"/>
+          </a:xfrm>
+          <a:prstGeom prst="rect">
+            <a:avLst/>
+          </a:prstGeom>
+          <a:noFill/>
+        </p:spPr>
+        <p:txBody>
+          <a:bodyPr wrap="square">
+            <a:spAutoFit/>
+          </a:bodyPr>
+          <a:lstStyle/>
+          <a:p>
+            <a:pPr marL="285750" indent="-285750" algn="l">
+              <a:buFont typeface="Arial" panose="020B0604020202020204" pitchFamily="34" charset="0"/>
+              <a:buChar char="•"/>
+            </a:pPr>
+            <a:r>
+              <a:rPr lang="en-US" b="0" i="0" u="none" strike="noStrike" baseline="0" dirty="0">
+                <a:latin typeface="CMR10"/>
+              </a:rPr>
+              <a:t>Markov decision process (MDP) is a mathematical model </a:t>
+            </a:r>
+            <a:r>
+              <a:rPr lang="en-US" b="1" i="0" u="none" strike="noStrike" baseline="0" dirty="0">
+                <a:latin typeface="CMR10"/>
+              </a:rPr>
+              <a:t>for sequential decision making </a:t>
+            </a:r>
+            <a:r>
+              <a:rPr lang="en-US" b="0" i="0" u="none" strike="noStrike" baseline="0" dirty="0">
+                <a:latin typeface="CMR10"/>
+              </a:rPr>
+              <a:t>when outcomes are uncertain.</a:t>
+            </a:r>
+          </a:p>
+          <a:p>
+            <a:pPr marL="285750" indent="-285750">
+              <a:buFont typeface="Arial" panose="020B0604020202020204" pitchFamily="34" charset="0"/>
+              <a:buChar char="•"/>
+            </a:pPr>
+            <a:r>
+              <a:rPr lang="en-US" dirty="0">
+                <a:latin typeface="CMR10"/>
+              </a:rPr>
+              <a:t>The MDP represents a </a:t>
+            </a:r>
+            <a:r>
+              <a:rPr lang="en-US" b="1" dirty="0"/>
+              <a:t>fully observable, stochastic, and known environment.</a:t>
+            </a:r>
+            <a:endParaRPr lang="en-US" b="0" i="0" u="none" strike="noStrike" baseline="0" dirty="0">
+              <a:latin typeface="CMR10"/>
+            </a:endParaRPr>
+          </a:p>
+          <a:p>
+            <a:pPr marL="285750" indent="-285750">
+              <a:buFont typeface="Arial" panose="020B0604020202020204" pitchFamily="34" charset="0"/>
+              <a:buChar char="•"/>
+            </a:pPr>
+            <a:r>
+              <a:rPr lang="en-US" dirty="0">
+                <a:latin typeface="CMR10"/>
+              </a:rPr>
+              <a:t>The goal is specified via rewards.</a:t>
+            </a:r>
+            <a:endParaRPr lang="en-US" b="0" i="0" u="none" strike="noStrike" baseline="0" dirty="0">
+              <a:latin typeface="CMR10"/>
+            </a:endParaRPr>
+          </a:p>
+          <a:p>
+            <a:pPr marL="285750" indent="-285750">
+              <a:buFont typeface="Arial" panose="020B0604020202020204" pitchFamily="34" charset="0"/>
+              <a:buChar char="•"/>
+            </a:pPr>
+            <a:r>
+              <a:rPr lang="en-US" dirty="0">
+                <a:latin typeface="CMR10"/>
+              </a:rPr>
+              <a:t>Actions influence the future rewards by leading to different states.</a:t>
+            </a:r>
+            <a:endParaRPr lang="en-US" dirty="0"/>
+          </a:p>
+        </p:txBody>
+      </p:sp>
+      <p:sp>
+        <p:nvSpPr>
+          <p:cNvPr id="3" name="TextBox 2">
+            <a:extLst>
+              <a:ext uri="{FF2B5EF4-FFF2-40B4-BE49-F238E27FC236}">
+                <a16:creationId xmlns:a16="http://schemas.microsoft.com/office/drawing/2014/main" id="{F413D19A-9F8A-6171-80BA-6F52FEB9E691}"/>
+              </a:ext>
+            </a:extLst>
+          </p:cNvPr>
+          <p:cNvSpPr txBox="1"/>
+          <p:nvPr/>
+        </p:nvSpPr>
+        <p:spPr>
+          <a:xfrm>
+            <a:off x="8967751" y="2232193"/>
+            <a:ext cx="677075" cy="369332"/>
+          </a:xfrm>
+          <a:prstGeom prst="rect">
+            <a:avLst/>
+          </a:prstGeom>
+        </p:spPr>
+        <p:style>
+          <a:lnRef idx="3">
+            <a:schemeClr val="lt1"/>
+          </a:lnRef>
+          <a:fillRef idx="1">
+            <a:schemeClr val="accent2"/>
+          </a:fillRef>
+          <a:effectRef idx="1">
+            <a:schemeClr val="accent2"/>
+          </a:effectRef>
+          <a:fontRef idx="minor">
+            <a:schemeClr val="lt1"/>
+          </a:fontRef>
+        </p:style>
+        <p:txBody>
+          <a:bodyPr wrap="square" rtlCol="0">
+            <a:spAutoFit/>
+          </a:bodyPr>
+          <a:lstStyle/>
+          <a:p>
+            <a:r>
+              <a:rPr lang="en-US" dirty="0"/>
+              <a:t>MDP</a:t>
+            </a:r>
+          </a:p>
+        </p:txBody>
+      </p:sp>
+    </p:spTree>
+    <p:extLst>
+      <p:ext uri="{BB962C8B-B14F-4D97-AF65-F5344CB8AC3E}">
+        <p14:creationId xmlns:p14="http://schemas.microsoft.com/office/powerpoint/2010/main" val="177114255"/>
+      </p:ext>
+    </p:extLst>
+  </p:cSld>
+  <p:clrMapOvr>
+    <a:masterClrMapping/>
+  </p:clrMapOvr>
+</p:sld>
+</file>
+
+<file path=ppt/slides/slide20.xml><?xml version="1.0" encoding="utf-8"?>
 <p:sld xmlns:a="http://schemas.openxmlformats.org/drawingml/2006/main" xmlns:r="http://schemas.openxmlformats.org/officeDocument/2006/relationships" xmlns:p="http://schemas.openxmlformats.org/presentationml/2006/main">
   <p:cSld>
     <p:spTree>
@@ -14971,937 +17302,7 @@
 </p:sld>
 </file>
 
-<file path=ppt/slides/slide2.xml><?xml version="1.0" encoding="utf-8"?>
-<p:sld xmlns:a="http://schemas.openxmlformats.org/drawingml/2006/main" xmlns:r="http://schemas.openxmlformats.org/officeDocument/2006/relationships" xmlns:p="http://schemas.openxmlformats.org/presentationml/2006/main">
-  <p:cSld>
-    <p:spTree>
-      <p:nvGrpSpPr>
-        <p:cNvPr id="1" name=""/>
-        <p:cNvGrpSpPr/>
-        <p:nvPr/>
-      </p:nvGrpSpPr>
-      <p:grpSpPr>
-        <a:xfrm>
-          <a:off x="0" y="0"/>
-          <a:ext cx="0" cy="0"/>
-          <a:chOff x="0" y="0"/>
-          <a:chExt cx="0" cy="0"/>
-        </a:xfrm>
-      </p:grpSpPr>
-      <p:sp>
-        <p:nvSpPr>
-          <p:cNvPr id="2" name="Title 1">
-            <a:extLst>
-              <a:ext uri="{FF2B5EF4-FFF2-40B4-BE49-F238E27FC236}">
-                <a16:creationId xmlns:a16="http://schemas.microsoft.com/office/drawing/2014/main" id="{A6ACE117-B0FF-607A-0862-C421EADD0E04}"/>
-              </a:ext>
-            </a:extLst>
-          </p:cNvPr>
-          <p:cNvSpPr>
-            <a:spLocks noGrp="1"/>
-          </p:cNvSpPr>
-          <p:nvPr>
-            <p:ph type="title"/>
-          </p:nvPr>
-        </p:nvSpPr>
-        <p:spPr/>
-        <p:txBody>
-          <a:bodyPr/>
-          <a:lstStyle/>
-          <a:p>
-            <a:r>
-              <a:rPr lang="en-US" dirty="0"/>
-              <a:t>The Agent–Environment Interface</a:t>
-            </a:r>
-          </a:p>
-        </p:txBody>
-      </p:sp>
-      <p:pic>
-        <p:nvPicPr>
-          <p:cNvPr id="5" name="Content Placeholder 4">
-            <a:extLst>
-              <a:ext uri="{FF2B5EF4-FFF2-40B4-BE49-F238E27FC236}">
-                <a16:creationId xmlns:a16="http://schemas.microsoft.com/office/drawing/2014/main" id="{C48F0FB8-B5FA-9473-2D66-BFE57DC88A84}"/>
-              </a:ext>
-            </a:extLst>
-          </p:cNvPr>
-          <p:cNvPicPr>
-            <a:picLocks noGrp="1" noChangeAspect="1"/>
-          </p:cNvPicPr>
-          <p:nvPr>
-            <p:ph idx="1"/>
-          </p:nvPr>
-        </p:nvPicPr>
-        <p:blipFill>
-          <a:blip r:embed="rId2"/>
-          <a:stretch>
-            <a:fillRect/>
-          </a:stretch>
-        </p:blipFill>
-        <p:spPr>
-          <a:xfrm>
-            <a:off x="4962889" y="1082666"/>
-            <a:ext cx="7056983" cy="2346334"/>
-          </a:xfrm>
-          <a:prstGeom prst="rect">
-            <a:avLst/>
-          </a:prstGeom>
-        </p:spPr>
-      </p:pic>
-      <mc:AlternateContent xmlns:mc="http://schemas.openxmlformats.org/markup-compatibility/2006">
-        <mc:Choice xmlns:a14="http://schemas.microsoft.com/office/drawing/2010/main" Requires="a14">
-          <p:sp>
-            <p:nvSpPr>
-              <p:cNvPr id="7" name="TextBox 6">
-                <a:extLst>
-                  <a:ext uri="{FF2B5EF4-FFF2-40B4-BE49-F238E27FC236}">
-                    <a16:creationId xmlns:a16="http://schemas.microsoft.com/office/drawing/2014/main" id="{3101D76A-A954-6D50-D235-D0B41CFF50CB}"/>
-                  </a:ext>
-                </a:extLst>
-              </p:cNvPr>
-              <p:cNvSpPr txBox="1"/>
-              <p:nvPr/>
-            </p:nvSpPr>
-            <p:spPr>
-              <a:xfrm>
-                <a:off x="838200" y="3806015"/>
-                <a:ext cx="10261697" cy="2585323"/>
-              </a:xfrm>
-              <a:prstGeom prst="rect">
-                <a:avLst/>
-              </a:prstGeom>
-              <a:noFill/>
-            </p:spPr>
-            <p:txBody>
-              <a:bodyPr wrap="square">
-                <a:spAutoFit/>
-              </a:bodyPr>
-              <a:lstStyle/>
-              <a:p>
-                <a:pPr algn="l"/>
-                <a:r>
-                  <a:rPr lang="en-US" dirty="0"/>
-                  <a:t>An </a:t>
-                </a:r>
-                <a:r>
-                  <a:rPr lang="en-US" b="1" dirty="0"/>
-                  <a:t>interaction</a:t>
-                </a:r>
-                <a:r>
-                  <a:rPr lang="en-US" dirty="0"/>
-                  <a:t> is a sequence of discrete time steps, </a:t>
-                </a:r>
-                <a14:m>
-                  <m:oMath xmlns:m="http://schemas.openxmlformats.org/officeDocument/2006/math">
-                    <m:r>
-                      <a:rPr lang="en-US" i="1" dirty="0" smtClean="0">
-                        <a:latin typeface="Cambria Math" panose="02040503050406030204" pitchFamily="18" charset="0"/>
-                      </a:rPr>
-                      <m:t>𝑡</m:t>
-                    </m:r>
-                    <m:r>
-                      <a:rPr lang="en-US" i="1" dirty="0" smtClean="0">
-                        <a:latin typeface="Cambria Math" panose="02040503050406030204" pitchFamily="18" charset="0"/>
-                      </a:rPr>
-                      <m:t> = 0, 1, 2, 3, . . .</m:t>
-                    </m:r>
-                  </m:oMath>
-                </a14:m>
-                <a:endParaRPr lang="en-US" dirty="0"/>
-              </a:p>
-              <a:p>
-                <a:pPr marL="171450" indent="-171450" algn="l">
-                  <a:buFont typeface="Arial" panose="020B0604020202020204" pitchFamily="34" charset="0"/>
-                  <a:buChar char="•"/>
-                </a:pPr>
-                <a:r>
-                  <a:rPr lang="en-US" dirty="0"/>
-                  <a:t> At each time step </a:t>
-                </a:r>
-                <a14:m>
-                  <m:oMath xmlns:m="http://schemas.openxmlformats.org/officeDocument/2006/math">
-                    <m:r>
-                      <a:rPr lang="en-US" i="1" dirty="0" smtClean="0">
-                        <a:latin typeface="Cambria Math" panose="02040503050406030204" pitchFamily="18" charset="0"/>
-                      </a:rPr>
-                      <m:t>𝑡</m:t>
-                    </m:r>
-                  </m:oMath>
-                </a14:m>
-                <a:r>
-                  <a:rPr lang="en-US" dirty="0"/>
-                  <a:t>: </a:t>
-                </a:r>
-              </a:p>
-              <a:p>
-                <a:pPr marL="800100" lvl="1" indent="-342900">
-                  <a:buFont typeface="+mj-lt"/>
-                  <a:buAutoNum type="arabicPeriod"/>
-                </a:pPr>
-                <a:r>
-                  <a:rPr lang="en-US" dirty="0"/>
-                  <a:t>Agent receives some representation of the environment’s state </a:t>
-                </a:r>
-                <a14:m>
-                  <m:oMath xmlns:m="http://schemas.openxmlformats.org/officeDocument/2006/math">
-                    <m:sSub>
-                      <m:sSubPr>
-                        <m:ctrlPr>
-                          <a:rPr lang="en-US" b="0" i="1" dirty="0" smtClean="0">
-                            <a:latin typeface="Cambria Math" panose="02040503050406030204" pitchFamily="18" charset="0"/>
-                          </a:rPr>
-                        </m:ctrlPr>
-                      </m:sSubPr>
-                      <m:e>
-                        <m:r>
-                          <a:rPr lang="en-US" b="0" i="1" dirty="0" smtClean="0">
-                            <a:latin typeface="Cambria Math" panose="02040503050406030204" pitchFamily="18" charset="0"/>
-                          </a:rPr>
-                          <m:t>𝑠</m:t>
-                        </m:r>
-                      </m:e>
-                      <m:sub>
-                        <m:r>
-                          <a:rPr lang="en-US" b="0" i="1" dirty="0" smtClean="0">
-                            <a:latin typeface="Cambria Math" panose="02040503050406030204" pitchFamily="18" charset="0"/>
-                          </a:rPr>
-                          <m:t>𝑡</m:t>
-                        </m:r>
-                      </m:sub>
-                    </m:sSub>
-                    <m:r>
-                      <a:rPr lang="en-US" b="0" i="1" dirty="0" smtClean="0">
-                        <a:latin typeface="Cambria Math" panose="02040503050406030204" pitchFamily="18" charset="0"/>
-                      </a:rPr>
-                      <m:t>∈</m:t>
-                    </m:r>
-                    <m:r>
-                      <a:rPr lang="en-US" b="0" i="1" dirty="0" smtClean="0">
-                        <a:latin typeface="Cambria Math" panose="02040503050406030204" pitchFamily="18" charset="0"/>
-                        <a:ea typeface="Cambria Math" panose="02040503050406030204" pitchFamily="18" charset="0"/>
-                      </a:rPr>
-                      <m:t>𝒮</m:t>
-                    </m:r>
-                    <m:r>
-                      <a:rPr lang="en-US" i="1" dirty="0" smtClean="0">
-                        <a:latin typeface="Cambria Math" panose="02040503050406030204" pitchFamily="18" charset="0"/>
-                      </a:rPr>
-                      <m:t> </m:t>
-                    </m:r>
-                  </m:oMath>
-                </a14:m>
-                <a:endParaRPr lang="en-US" dirty="0"/>
-              </a:p>
-              <a:p>
-                <a:pPr marL="800100" lvl="1" indent="-342900">
-                  <a:buFont typeface="+mj-lt"/>
-                  <a:buAutoNum type="arabicPeriod"/>
-                </a:pPr>
-                <a:r>
-                  <a:rPr lang="en-US" dirty="0"/>
-                  <a:t>Agent selects an action, </a:t>
-                </a:r>
-                <a14:m>
-                  <m:oMath xmlns:m="http://schemas.openxmlformats.org/officeDocument/2006/math">
-                    <m:sSub>
-                      <m:sSubPr>
-                        <m:ctrlPr>
-                          <a:rPr lang="en-US" b="0" i="1" dirty="0" smtClean="0">
-                            <a:latin typeface="Cambria Math" panose="02040503050406030204" pitchFamily="18" charset="0"/>
-                          </a:rPr>
-                        </m:ctrlPr>
-                      </m:sSubPr>
-                      <m:e>
-                        <m:r>
-                          <a:rPr lang="en-US" b="0" i="1" dirty="0" smtClean="0">
-                            <a:latin typeface="Cambria Math" panose="02040503050406030204" pitchFamily="18" charset="0"/>
-                          </a:rPr>
-                          <m:t>𝑎</m:t>
-                        </m:r>
-                      </m:e>
-                      <m:sub>
-                        <m:r>
-                          <a:rPr lang="en-US" b="0" i="1" dirty="0" smtClean="0">
-                            <a:latin typeface="Cambria Math" panose="02040503050406030204" pitchFamily="18" charset="0"/>
-                          </a:rPr>
-                          <m:t>𝑡</m:t>
-                        </m:r>
-                      </m:sub>
-                    </m:sSub>
-                    <m:r>
-                      <a:rPr lang="en-US" b="0" i="1" dirty="0" smtClean="0">
-                        <a:latin typeface="Cambria Math" panose="02040503050406030204" pitchFamily="18" charset="0"/>
-                      </a:rPr>
-                      <m:t>∈</m:t>
-                    </m:r>
-                    <m:r>
-                      <a:rPr lang="en-US" b="0" i="1" dirty="0" smtClean="0">
-                        <a:latin typeface="Cambria Math" panose="02040503050406030204" pitchFamily="18" charset="0"/>
-                        <a:ea typeface="Cambria Math" panose="02040503050406030204" pitchFamily="18" charset="0"/>
-                      </a:rPr>
-                      <m:t>𝒜</m:t>
-                    </m:r>
-                    <m:r>
-                      <a:rPr lang="en-US" b="0" i="1" dirty="0" smtClean="0">
-                        <a:latin typeface="Cambria Math" panose="02040503050406030204" pitchFamily="18" charset="0"/>
-                        <a:ea typeface="Cambria Math" panose="02040503050406030204" pitchFamily="18" charset="0"/>
-                      </a:rPr>
-                      <m:t>(</m:t>
-                    </m:r>
-                    <m:sSub>
-                      <m:sSubPr>
-                        <m:ctrlPr>
-                          <a:rPr lang="en-US" b="0" i="1" dirty="0" smtClean="0">
-                            <a:latin typeface="Cambria Math" panose="02040503050406030204" pitchFamily="18" charset="0"/>
-                            <a:ea typeface="Cambria Math" panose="02040503050406030204" pitchFamily="18" charset="0"/>
-                          </a:rPr>
-                        </m:ctrlPr>
-                      </m:sSubPr>
-                      <m:e>
-                        <m:r>
-                          <a:rPr lang="en-US" b="0" i="1" dirty="0" smtClean="0">
-                            <a:latin typeface="Cambria Math" panose="02040503050406030204" pitchFamily="18" charset="0"/>
-                            <a:ea typeface="Cambria Math" panose="02040503050406030204" pitchFamily="18" charset="0"/>
-                          </a:rPr>
-                          <m:t>𝑠</m:t>
-                        </m:r>
-                      </m:e>
-                      <m:sub>
-                        <m:r>
-                          <a:rPr lang="en-US" b="0" i="1" dirty="0" smtClean="0">
-                            <a:latin typeface="Cambria Math" panose="02040503050406030204" pitchFamily="18" charset="0"/>
-                            <a:ea typeface="Cambria Math" panose="02040503050406030204" pitchFamily="18" charset="0"/>
-                          </a:rPr>
-                          <m:t>𝑡</m:t>
-                        </m:r>
-                      </m:sub>
-                    </m:sSub>
-                    <m:r>
-                      <a:rPr lang="en-US" b="0" i="1" dirty="0" smtClean="0">
-                        <a:latin typeface="Cambria Math" panose="02040503050406030204" pitchFamily="18" charset="0"/>
-                        <a:ea typeface="Cambria Math" panose="02040503050406030204" pitchFamily="18" charset="0"/>
-                      </a:rPr>
-                      <m:t>)</m:t>
-                    </m:r>
-                  </m:oMath>
-                </a14:m>
-                <a:endParaRPr lang="en-US" dirty="0"/>
-              </a:p>
-              <a:p>
-                <a:pPr marL="800100" lvl="1" indent="-342900">
-                  <a:buFont typeface="+mj-lt"/>
-                  <a:buAutoNum type="arabicPeriod"/>
-                </a:pPr>
-                <a:r>
-                  <a:rPr lang="en-US" dirty="0"/>
-                  <a:t>One time step later (as a consequence of its action) the agent receives a numerical reward, </a:t>
-                </a:r>
-                <a14:m>
-                  <m:oMath xmlns:m="http://schemas.openxmlformats.org/officeDocument/2006/math">
-                    <m:sSub>
-                      <m:sSubPr>
-                        <m:ctrlPr>
-                          <a:rPr lang="en-US" b="0" i="1" dirty="0" smtClean="0">
-                            <a:latin typeface="Cambria Math" panose="02040503050406030204" pitchFamily="18" charset="0"/>
-                          </a:rPr>
-                        </m:ctrlPr>
-                      </m:sSubPr>
-                      <m:e>
-                        <m:r>
-                          <a:rPr lang="en-US" b="0" i="1" dirty="0" smtClean="0">
-                            <a:latin typeface="Cambria Math" panose="02040503050406030204" pitchFamily="18" charset="0"/>
-                          </a:rPr>
-                          <m:t>𝑟</m:t>
-                        </m:r>
-                      </m:e>
-                      <m:sub>
-                        <m:r>
-                          <a:rPr lang="en-US" b="0" i="1" dirty="0" smtClean="0">
-                            <a:latin typeface="Cambria Math" panose="02040503050406030204" pitchFamily="18" charset="0"/>
-                          </a:rPr>
-                          <m:t>𝑡</m:t>
-                        </m:r>
-                        <m:r>
-                          <a:rPr lang="en-US" b="0" i="1" dirty="0" smtClean="0">
-                            <a:latin typeface="Cambria Math" panose="02040503050406030204" pitchFamily="18" charset="0"/>
-                          </a:rPr>
-                          <m:t>+1</m:t>
-                        </m:r>
-                      </m:sub>
-                    </m:sSub>
-                    <m:r>
-                      <a:rPr lang="en-US" b="0" i="1" dirty="0" smtClean="0">
-                        <a:latin typeface="Cambria Math" panose="02040503050406030204" pitchFamily="18" charset="0"/>
-                      </a:rPr>
-                      <m:t>∈</m:t>
-                    </m:r>
-                    <m:r>
-                      <a:rPr lang="en-US" b="0" i="1" dirty="0" smtClean="0">
-                        <a:latin typeface="Cambria Math" panose="02040503050406030204" pitchFamily="18" charset="0"/>
-                        <a:ea typeface="Cambria Math" panose="02040503050406030204" pitchFamily="18" charset="0"/>
-                      </a:rPr>
-                      <m:t>ℛ</m:t>
-                    </m:r>
-                    <m:r>
-                      <a:rPr lang="en-US" b="0" i="1" dirty="0" smtClean="0">
-                        <a:latin typeface="Cambria Math" panose="02040503050406030204" pitchFamily="18" charset="0"/>
-                      </a:rPr>
-                      <m:t> </m:t>
-                    </m:r>
-                  </m:oMath>
-                </a14:m>
-                <a:r>
-                  <a:rPr lang="en-US" dirty="0"/>
-                  <a:t>and finds itself in a new state </a:t>
-                </a:r>
-                <a14:m>
-                  <m:oMath xmlns:m="http://schemas.openxmlformats.org/officeDocument/2006/math">
-                    <m:sSub>
-                      <m:sSubPr>
-                        <m:ctrlPr>
-                          <a:rPr lang="en-US" b="0" i="1" dirty="0" smtClean="0">
-                            <a:latin typeface="Cambria Math" panose="02040503050406030204" pitchFamily="18" charset="0"/>
-                          </a:rPr>
-                        </m:ctrlPr>
-                      </m:sSubPr>
-                      <m:e>
-                        <m:r>
-                          <a:rPr lang="en-US" b="0" i="1" dirty="0" smtClean="0">
-                            <a:latin typeface="Cambria Math" panose="02040503050406030204" pitchFamily="18" charset="0"/>
-                          </a:rPr>
-                          <m:t>𝑠</m:t>
-                        </m:r>
-                      </m:e>
-                      <m:sub>
-                        <m:r>
-                          <a:rPr lang="en-US" b="0" i="1" dirty="0" smtClean="0">
-                            <a:latin typeface="Cambria Math" panose="02040503050406030204" pitchFamily="18" charset="0"/>
-                          </a:rPr>
-                          <m:t>𝑡</m:t>
-                        </m:r>
-                        <m:r>
-                          <a:rPr lang="en-US" b="0" i="1" dirty="0" smtClean="0">
-                            <a:latin typeface="Cambria Math" panose="02040503050406030204" pitchFamily="18" charset="0"/>
-                          </a:rPr>
-                          <m:t>+1</m:t>
-                        </m:r>
-                      </m:sub>
-                    </m:sSub>
-                  </m:oMath>
-                </a14:m>
-                <a:endParaRPr lang="en-US" dirty="0"/>
-              </a:p>
-              <a:p>
-                <a:endParaRPr lang="en-US" dirty="0"/>
-              </a:p>
-              <a:p>
-                <a:r>
-                  <a:rPr lang="en-US" dirty="0"/>
-                  <a:t>Leads to sequence or trajectory that begins like this:</a:t>
-                </a:r>
-              </a:p>
-              <a:p>
-                <a:pPr/>
-                <a14:m>
-                  <m:oMathPara xmlns:m="http://schemas.openxmlformats.org/officeDocument/2006/math">
-                    <m:oMathParaPr>
-                      <m:jc m:val="centerGroup"/>
-                    </m:oMathParaPr>
-                    <m:oMath xmlns:m="http://schemas.openxmlformats.org/officeDocument/2006/math">
-                      <m:sSub>
-                        <m:sSubPr>
-                          <m:ctrlPr>
-                            <a:rPr lang="en-US" b="0" i="1" dirty="0" smtClean="0">
-                              <a:latin typeface="Cambria Math" panose="02040503050406030204" pitchFamily="18" charset="0"/>
-                            </a:rPr>
-                          </m:ctrlPr>
-                        </m:sSubPr>
-                        <m:e>
-                          <m:r>
-                            <a:rPr lang="en-US" i="1" dirty="0" smtClean="0">
-                              <a:latin typeface="Cambria Math" panose="02040503050406030204" pitchFamily="18" charset="0"/>
-                            </a:rPr>
-                            <m:t>𝑆</m:t>
-                          </m:r>
-                        </m:e>
-                        <m:sub>
-                          <m:r>
-                            <a:rPr lang="en-US" b="0" i="1" dirty="0" smtClean="0">
-                              <a:latin typeface="Cambria Math" panose="02040503050406030204" pitchFamily="18" charset="0"/>
-                            </a:rPr>
-                            <m:t>0</m:t>
-                          </m:r>
-                        </m:sub>
-                      </m:sSub>
-                      <m:r>
-                        <a:rPr lang="en-US" i="1" dirty="0" smtClean="0">
-                          <a:latin typeface="Cambria Math" panose="02040503050406030204" pitchFamily="18" charset="0"/>
-                        </a:rPr>
-                        <m:t>,</m:t>
-                      </m:r>
-                      <m:sSub>
-                        <m:sSubPr>
-                          <m:ctrlPr>
-                            <a:rPr lang="en-US" b="0" i="1" dirty="0" smtClean="0">
-                              <a:latin typeface="Cambria Math" panose="02040503050406030204" pitchFamily="18" charset="0"/>
-                            </a:rPr>
-                          </m:ctrlPr>
-                        </m:sSubPr>
-                        <m:e>
-                          <m:r>
-                            <a:rPr lang="en-US" i="1" dirty="0" smtClean="0">
-                              <a:latin typeface="Cambria Math" panose="02040503050406030204" pitchFamily="18" charset="0"/>
-                            </a:rPr>
-                            <m:t>𝐴</m:t>
-                          </m:r>
-                        </m:e>
-                        <m:sub>
-                          <m:r>
-                            <a:rPr lang="en-US" b="0" i="1" dirty="0" smtClean="0">
-                              <a:latin typeface="Cambria Math" panose="02040503050406030204" pitchFamily="18" charset="0"/>
-                            </a:rPr>
-                            <m:t>0</m:t>
-                          </m:r>
-                        </m:sub>
-                      </m:sSub>
-                      <m:r>
-                        <a:rPr lang="en-US" i="1" dirty="0" smtClean="0">
-                          <a:latin typeface="Cambria Math" panose="02040503050406030204" pitchFamily="18" charset="0"/>
-                        </a:rPr>
-                        <m:t>,</m:t>
-                      </m:r>
-                      <m:sSub>
-                        <m:sSubPr>
-                          <m:ctrlPr>
-                            <a:rPr lang="en-US" b="0" i="1" dirty="0" smtClean="0">
-                              <a:latin typeface="Cambria Math" panose="02040503050406030204" pitchFamily="18" charset="0"/>
-                            </a:rPr>
-                          </m:ctrlPr>
-                        </m:sSubPr>
-                        <m:e>
-                          <m:r>
-                            <a:rPr lang="en-US" i="1" dirty="0" smtClean="0">
-                              <a:latin typeface="Cambria Math" panose="02040503050406030204" pitchFamily="18" charset="0"/>
-                            </a:rPr>
-                            <m:t>𝑅</m:t>
-                          </m:r>
-                        </m:e>
-                        <m:sub>
-                          <m:r>
-                            <a:rPr lang="en-US" b="0" i="1" dirty="0" smtClean="0">
-                              <a:latin typeface="Cambria Math" panose="02040503050406030204" pitchFamily="18" charset="0"/>
-                            </a:rPr>
-                            <m:t>1</m:t>
-                          </m:r>
-                        </m:sub>
-                      </m:sSub>
-                      <m:r>
-                        <a:rPr lang="en-US" i="1" dirty="0" smtClean="0">
-                          <a:latin typeface="Cambria Math" panose="02040503050406030204" pitchFamily="18" charset="0"/>
-                        </a:rPr>
-                        <m:t>, </m:t>
-                      </m:r>
-                      <m:sSub>
-                        <m:sSubPr>
-                          <m:ctrlPr>
-                            <a:rPr lang="en-US" b="0" i="1" dirty="0" smtClean="0">
-                              <a:latin typeface="Cambria Math" panose="02040503050406030204" pitchFamily="18" charset="0"/>
-                            </a:rPr>
-                          </m:ctrlPr>
-                        </m:sSubPr>
-                        <m:e>
-                          <m:r>
-                            <a:rPr lang="en-US" i="1" dirty="0" smtClean="0">
-                              <a:latin typeface="Cambria Math" panose="02040503050406030204" pitchFamily="18" charset="0"/>
-                            </a:rPr>
-                            <m:t>𝑆</m:t>
-                          </m:r>
-                        </m:e>
-                        <m:sub>
-                          <m:r>
-                            <a:rPr lang="en-US" b="0" i="1" dirty="0" smtClean="0">
-                              <a:latin typeface="Cambria Math" panose="02040503050406030204" pitchFamily="18" charset="0"/>
-                            </a:rPr>
-                            <m:t>1</m:t>
-                          </m:r>
-                        </m:sub>
-                      </m:sSub>
-                      <m:r>
-                        <a:rPr lang="en-US" i="1" dirty="0" smtClean="0">
-                          <a:latin typeface="Cambria Math" panose="02040503050406030204" pitchFamily="18" charset="0"/>
-                        </a:rPr>
-                        <m:t>,</m:t>
-                      </m:r>
-                      <m:sSub>
-                        <m:sSubPr>
-                          <m:ctrlPr>
-                            <a:rPr lang="en-US" b="0" i="1" dirty="0" smtClean="0">
-                              <a:latin typeface="Cambria Math" panose="02040503050406030204" pitchFamily="18" charset="0"/>
-                            </a:rPr>
-                          </m:ctrlPr>
-                        </m:sSubPr>
-                        <m:e>
-                          <m:r>
-                            <a:rPr lang="en-US" i="1" dirty="0" smtClean="0">
-                              <a:latin typeface="Cambria Math" panose="02040503050406030204" pitchFamily="18" charset="0"/>
-                            </a:rPr>
-                            <m:t>𝐴</m:t>
-                          </m:r>
-                        </m:e>
-                        <m:sub>
-                          <m:r>
-                            <a:rPr lang="en-US" b="0" i="1" dirty="0" smtClean="0">
-                              <a:latin typeface="Cambria Math" panose="02040503050406030204" pitchFamily="18" charset="0"/>
-                            </a:rPr>
-                            <m:t>1</m:t>
-                          </m:r>
-                        </m:sub>
-                      </m:sSub>
-                      <m:r>
-                        <a:rPr lang="en-US" i="1" dirty="0" smtClean="0">
-                          <a:latin typeface="Cambria Math" panose="02040503050406030204" pitchFamily="18" charset="0"/>
-                        </a:rPr>
-                        <m:t>,</m:t>
-                      </m:r>
-                      <m:sSub>
-                        <m:sSubPr>
-                          <m:ctrlPr>
-                            <a:rPr lang="en-US" b="0" i="1" dirty="0" smtClean="0">
-                              <a:latin typeface="Cambria Math" panose="02040503050406030204" pitchFamily="18" charset="0"/>
-                            </a:rPr>
-                          </m:ctrlPr>
-                        </m:sSubPr>
-                        <m:e>
-                          <m:r>
-                            <a:rPr lang="en-US" i="1" dirty="0" smtClean="0">
-                              <a:latin typeface="Cambria Math" panose="02040503050406030204" pitchFamily="18" charset="0"/>
-                            </a:rPr>
-                            <m:t>𝑅</m:t>
-                          </m:r>
-                        </m:e>
-                        <m:sub>
-                          <m:r>
-                            <a:rPr lang="en-US" b="0" i="1" dirty="0" smtClean="0">
-                              <a:latin typeface="Cambria Math" panose="02040503050406030204" pitchFamily="18" charset="0"/>
-                            </a:rPr>
-                            <m:t>2</m:t>
-                          </m:r>
-                        </m:sub>
-                      </m:sSub>
-                      <m:r>
-                        <a:rPr lang="en-US" i="1" dirty="0" smtClean="0">
-                          <a:latin typeface="Cambria Math" panose="02040503050406030204" pitchFamily="18" charset="0"/>
-                        </a:rPr>
-                        <m:t>, </m:t>
-                      </m:r>
-                      <m:sSub>
-                        <m:sSubPr>
-                          <m:ctrlPr>
-                            <a:rPr lang="en-US" b="0" i="1" dirty="0" smtClean="0">
-                              <a:latin typeface="Cambria Math" panose="02040503050406030204" pitchFamily="18" charset="0"/>
-                            </a:rPr>
-                          </m:ctrlPr>
-                        </m:sSubPr>
-                        <m:e>
-                          <m:r>
-                            <a:rPr lang="en-US" i="1" dirty="0" smtClean="0">
-                              <a:latin typeface="Cambria Math" panose="02040503050406030204" pitchFamily="18" charset="0"/>
-                            </a:rPr>
-                            <m:t>𝑆</m:t>
-                          </m:r>
-                        </m:e>
-                        <m:sub>
-                          <m:r>
-                            <a:rPr lang="en-US" b="0" i="1" dirty="0" smtClean="0">
-                              <a:latin typeface="Cambria Math" panose="02040503050406030204" pitchFamily="18" charset="0"/>
-                            </a:rPr>
-                            <m:t>2</m:t>
-                          </m:r>
-                        </m:sub>
-                      </m:sSub>
-                      <m:r>
-                        <a:rPr lang="en-US" i="1" dirty="0" smtClean="0">
-                          <a:latin typeface="Cambria Math" panose="02040503050406030204" pitchFamily="18" charset="0"/>
-                        </a:rPr>
-                        <m:t>,</m:t>
-                      </m:r>
-                      <m:sSub>
-                        <m:sSubPr>
-                          <m:ctrlPr>
-                            <a:rPr lang="en-US" b="0" i="1" dirty="0" smtClean="0">
-                              <a:latin typeface="Cambria Math" panose="02040503050406030204" pitchFamily="18" charset="0"/>
-                            </a:rPr>
-                          </m:ctrlPr>
-                        </m:sSubPr>
-                        <m:e>
-                          <m:r>
-                            <a:rPr lang="en-US" i="1" dirty="0" smtClean="0">
-                              <a:latin typeface="Cambria Math" panose="02040503050406030204" pitchFamily="18" charset="0"/>
-                            </a:rPr>
-                            <m:t>𝐴</m:t>
-                          </m:r>
-                        </m:e>
-                        <m:sub>
-                          <m:r>
-                            <a:rPr lang="en-US" b="0" i="1" dirty="0" smtClean="0">
-                              <a:latin typeface="Cambria Math" panose="02040503050406030204" pitchFamily="18" charset="0"/>
-                            </a:rPr>
-                            <m:t>2</m:t>
-                          </m:r>
-                        </m:sub>
-                      </m:sSub>
-                      <m:r>
-                        <a:rPr lang="en-US" i="1" dirty="0" smtClean="0">
-                          <a:latin typeface="Cambria Math" panose="02040503050406030204" pitchFamily="18" charset="0"/>
-                        </a:rPr>
-                        <m:t>,</m:t>
-                      </m:r>
-                      <m:sSub>
-                        <m:sSubPr>
-                          <m:ctrlPr>
-                            <a:rPr lang="en-US" b="0" i="1" dirty="0" smtClean="0">
-                              <a:latin typeface="Cambria Math" panose="02040503050406030204" pitchFamily="18" charset="0"/>
-                            </a:rPr>
-                          </m:ctrlPr>
-                        </m:sSubPr>
-                        <m:e>
-                          <m:r>
-                            <a:rPr lang="en-US" i="1" dirty="0" smtClean="0">
-                              <a:latin typeface="Cambria Math" panose="02040503050406030204" pitchFamily="18" charset="0"/>
-                            </a:rPr>
-                            <m:t>𝑅</m:t>
-                          </m:r>
-                        </m:e>
-                        <m:sub>
-                          <m:r>
-                            <a:rPr lang="en-US" b="0" i="1" dirty="0" smtClean="0">
-                              <a:latin typeface="Cambria Math" panose="02040503050406030204" pitchFamily="18" charset="0"/>
-                            </a:rPr>
-                            <m:t>3</m:t>
-                          </m:r>
-                        </m:sub>
-                      </m:sSub>
-                      <m:r>
-                        <a:rPr lang="en-US" i="1" dirty="0" smtClean="0">
-                          <a:latin typeface="Cambria Math" panose="02040503050406030204" pitchFamily="18" charset="0"/>
-                        </a:rPr>
-                        <m:t>, . . . </m:t>
-                      </m:r>
-                    </m:oMath>
-                  </m:oMathPara>
-                </a14:m>
-                <a:endParaRPr lang="en-US" i="1" dirty="0"/>
-              </a:p>
-            </p:txBody>
-          </p:sp>
-        </mc:Choice>
-        <mc:Fallback>
-          <p:sp>
-            <p:nvSpPr>
-              <p:cNvPr id="7" name="TextBox 6">
-                <a:extLst>
-                  <a:ext uri="{FF2B5EF4-FFF2-40B4-BE49-F238E27FC236}">
-                    <a16:creationId xmlns:a16="http://schemas.microsoft.com/office/drawing/2014/main" id="{3101D76A-A954-6D50-D235-D0B41CFF50CB}"/>
-                  </a:ext>
-                </a:extLst>
-              </p:cNvPr>
-              <p:cNvSpPr txBox="1">
-                <a:spLocks noRot="1" noChangeAspect="1" noMove="1" noResize="1" noEditPoints="1" noAdjustHandles="1" noChangeArrowheads="1" noChangeShapeType="1" noTextEdit="1"/>
-              </p:cNvSpPr>
-              <p:nvPr/>
-            </p:nvSpPr>
-            <p:spPr>
-              <a:xfrm>
-                <a:off x="838200" y="3806015"/>
-                <a:ext cx="10261697" cy="2585323"/>
-              </a:xfrm>
-              <a:prstGeom prst="rect">
-                <a:avLst/>
-              </a:prstGeom>
-              <a:blipFill>
-                <a:blip r:embed="rId3"/>
-                <a:stretch>
-                  <a:fillRect l="-535" t="-943"/>
-                </a:stretch>
-              </a:blipFill>
-            </p:spPr>
-            <p:txBody>
-              <a:bodyPr/>
-              <a:lstStyle/>
-              <a:p>
-                <a:r>
-                  <a:rPr lang="en-US">
-                    <a:noFill/>
-                  </a:rPr>
-                  <a:t> </a:t>
-                </a:r>
-              </a:p>
-            </p:txBody>
-          </p:sp>
-        </mc:Fallback>
-      </mc:AlternateContent>
-      <p:sp>
-        <p:nvSpPr>
-          <p:cNvPr id="9" name="TextBox 8">
-            <a:extLst>
-              <a:ext uri="{FF2B5EF4-FFF2-40B4-BE49-F238E27FC236}">
-                <a16:creationId xmlns:a16="http://schemas.microsoft.com/office/drawing/2014/main" id="{D35FA07E-AB2F-CDB5-6011-310964B51CC6}"/>
-              </a:ext>
-            </a:extLst>
-          </p:cNvPr>
-          <p:cNvSpPr txBox="1"/>
-          <p:nvPr/>
-        </p:nvSpPr>
-        <p:spPr>
-          <a:xfrm>
-            <a:off x="940576" y="1124198"/>
-            <a:ext cx="4343400" cy="2585323"/>
-          </a:xfrm>
-          <a:prstGeom prst="rect">
-            <a:avLst/>
-          </a:prstGeom>
-          <a:noFill/>
-        </p:spPr>
-        <p:txBody>
-          <a:bodyPr wrap="square">
-            <a:spAutoFit/>
-          </a:bodyPr>
-          <a:lstStyle/>
-          <a:p>
-            <a:pPr marL="285750" indent="-285750" algn="l">
-              <a:buFont typeface="Arial" panose="020B0604020202020204" pitchFamily="34" charset="0"/>
-              <a:buChar char="•"/>
-            </a:pPr>
-            <a:r>
-              <a:rPr lang="en-US" b="0" i="0" u="none" strike="noStrike" baseline="0" dirty="0">
-                <a:latin typeface="CMR10"/>
-              </a:rPr>
-              <a:t>Markov decision process (MDP) is a mathematical model </a:t>
-            </a:r>
-            <a:r>
-              <a:rPr lang="en-US" b="1" i="0" u="none" strike="noStrike" baseline="0" dirty="0">
-                <a:latin typeface="CMR10"/>
-              </a:rPr>
-              <a:t>for sequential decision making </a:t>
-            </a:r>
-            <a:r>
-              <a:rPr lang="en-US" b="0" i="0" u="none" strike="noStrike" baseline="0" dirty="0">
-                <a:latin typeface="CMR10"/>
-              </a:rPr>
-              <a:t>when outcomes are uncertain.</a:t>
-            </a:r>
-          </a:p>
-          <a:p>
-            <a:pPr marL="285750" indent="-285750">
-              <a:buFont typeface="Arial" panose="020B0604020202020204" pitchFamily="34" charset="0"/>
-              <a:buChar char="•"/>
-            </a:pPr>
-            <a:r>
-              <a:rPr lang="en-US" dirty="0">
-                <a:latin typeface="CMR10"/>
-              </a:rPr>
-              <a:t>The MDP represents a </a:t>
-            </a:r>
-            <a:r>
-              <a:rPr lang="en-US" b="1" dirty="0"/>
-              <a:t>fully observable, stochastic, and known environment.</a:t>
-            </a:r>
-            <a:endParaRPr lang="en-US" b="0" i="0" u="none" strike="noStrike" baseline="0" dirty="0">
-              <a:latin typeface="CMR10"/>
-            </a:endParaRPr>
-          </a:p>
-          <a:p>
-            <a:pPr marL="285750" indent="-285750">
-              <a:buFont typeface="Arial" panose="020B0604020202020204" pitchFamily="34" charset="0"/>
-              <a:buChar char="•"/>
-            </a:pPr>
-            <a:r>
-              <a:rPr lang="en-US" dirty="0">
-                <a:latin typeface="CMR10"/>
-              </a:rPr>
-              <a:t>The goal is specified via rewards.</a:t>
-            </a:r>
-            <a:endParaRPr lang="en-US" b="0" i="0" u="none" strike="noStrike" baseline="0" dirty="0">
-              <a:latin typeface="CMR10"/>
-            </a:endParaRPr>
-          </a:p>
-          <a:p>
-            <a:pPr marL="285750" indent="-285750">
-              <a:buFont typeface="Arial" panose="020B0604020202020204" pitchFamily="34" charset="0"/>
-              <a:buChar char="•"/>
-            </a:pPr>
-            <a:r>
-              <a:rPr lang="en-US" dirty="0">
-                <a:latin typeface="CMR10"/>
-              </a:rPr>
-              <a:t>Actions influence the future rewards by leading to different states.</a:t>
-            </a:r>
-            <a:endParaRPr lang="en-US" dirty="0"/>
-          </a:p>
-        </p:txBody>
-      </p:sp>
-      <p:sp>
-        <p:nvSpPr>
-          <p:cNvPr id="3" name="TextBox 2">
-            <a:extLst>
-              <a:ext uri="{FF2B5EF4-FFF2-40B4-BE49-F238E27FC236}">
-                <a16:creationId xmlns:a16="http://schemas.microsoft.com/office/drawing/2014/main" id="{F413D19A-9F8A-6171-80BA-6F52FEB9E691}"/>
-              </a:ext>
-            </a:extLst>
-          </p:cNvPr>
-          <p:cNvSpPr txBox="1"/>
-          <p:nvPr/>
-        </p:nvSpPr>
-        <p:spPr>
-          <a:xfrm>
-            <a:off x="8967751" y="2232193"/>
-            <a:ext cx="677075" cy="369332"/>
-          </a:xfrm>
-          <a:prstGeom prst="rect">
-            <a:avLst/>
-          </a:prstGeom>
-        </p:spPr>
-        <p:style>
-          <a:lnRef idx="3">
-            <a:schemeClr val="lt1"/>
-          </a:lnRef>
-          <a:fillRef idx="1">
-            <a:schemeClr val="accent2"/>
-          </a:fillRef>
-          <a:effectRef idx="1">
-            <a:schemeClr val="accent2"/>
-          </a:effectRef>
-          <a:fontRef idx="minor">
-            <a:schemeClr val="lt1"/>
-          </a:fontRef>
-        </p:style>
-        <p:txBody>
-          <a:bodyPr wrap="square" rtlCol="0">
-            <a:spAutoFit/>
-          </a:bodyPr>
-          <a:lstStyle/>
-          <a:p>
-            <a:r>
-              <a:rPr lang="en-US" dirty="0"/>
-              <a:t>MDP</a:t>
-            </a:r>
-          </a:p>
-        </p:txBody>
-      </p:sp>
-    </p:spTree>
-    <p:extLst>
-      <p:ext uri="{BB962C8B-B14F-4D97-AF65-F5344CB8AC3E}">
-        <p14:creationId xmlns:p14="http://schemas.microsoft.com/office/powerpoint/2010/main" val="177114255"/>
-      </p:ext>
-    </p:extLst>
-  </p:cSld>
-  <p:clrMapOvr>
-    <a:masterClrMapping/>
-  </p:clrMapOvr>
-</p:sld>
-</file>
-
-<file path=ppt/slides/slide20.xml><?xml version="1.0" encoding="utf-8"?>
+<file path=ppt/slides/slide21.xml><?xml version="1.0" encoding="utf-8"?>
 <p:sld xmlns:a="http://schemas.openxmlformats.org/drawingml/2006/main" xmlns:r="http://schemas.openxmlformats.org/officeDocument/2006/relationships" xmlns:p="http://schemas.openxmlformats.org/presentationml/2006/main">
   <p:cSld>
     <p:spTree>
@@ -17599,7 +19000,7 @@
 </p:sld>
 </file>
 
-<file path=ppt/slides/slide21.xml><?xml version="1.0" encoding="utf-8"?>
+<file path=ppt/slides/slide22.xml><?xml version="1.0" encoding="utf-8"?>
 <p:sld xmlns:a="http://schemas.openxmlformats.org/drawingml/2006/main" xmlns:r="http://schemas.openxmlformats.org/officeDocument/2006/relationships" xmlns:p="http://schemas.openxmlformats.org/presentationml/2006/main">
   <p:cSld>
     <p:spTree>
@@ -18179,7 +19580,7 @@
 </p:sld>
 </file>
 
-<file path=ppt/slides/slide22.xml><?xml version="1.0" encoding="utf-8"?>
+<file path=ppt/slides/slide23.xml><?xml version="1.0" encoding="utf-8"?>
 <p:sld xmlns:a="http://schemas.openxmlformats.org/drawingml/2006/main" xmlns:r="http://schemas.openxmlformats.org/officeDocument/2006/relationships" xmlns:p="http://schemas.openxmlformats.org/presentationml/2006/main">
   <p:cSld>
     <p:spTree>
@@ -18269,7 +19670,7 @@
 </p:sld>
 </file>
 
-<file path=ppt/slides/slide23.xml><?xml version="1.0" encoding="utf-8"?>
+<file path=ppt/slides/slide24.xml><?xml version="1.0" encoding="utf-8"?>
 <p:sld xmlns:a="http://schemas.openxmlformats.org/drawingml/2006/main" xmlns:r="http://schemas.openxmlformats.org/officeDocument/2006/relationships" xmlns:p="http://schemas.openxmlformats.org/presentationml/2006/main">
   <p:cSld>
     <p:spTree>
@@ -18314,8 +19715,8 @@
           </a:p>
         </p:txBody>
       </p:sp>
-      <mc:AlternateContent xmlns:mc="http://schemas.openxmlformats.org/markup-compatibility/2006" xmlns:a14="http://schemas.microsoft.com/office/drawing/2010/main">
-        <mc:Choice Requires="a14">
+      <mc:AlternateContent xmlns:mc="http://schemas.openxmlformats.org/markup-compatibility/2006">
+        <mc:Choice xmlns:a14="http://schemas.microsoft.com/office/drawing/2010/main" Requires="a14">
           <p:sp>
             <p:nvSpPr>
               <p:cNvPr id="3" name="Content Placeholder 2">
@@ -18335,7 +19736,7 @@
             <p:spPr/>
             <p:txBody>
               <a:bodyPr>
-                <a:normAutofit fontScale="77500" lnSpcReduction="20000"/>
+                <a:normAutofit fontScale="62500" lnSpcReduction="20000"/>
               </a:bodyPr>
               <a:lstStyle/>
               <a:p>
@@ -18590,7 +19991,7 @@
               <a:p>
                 <a:r>
                   <a:rPr lang="en-US" dirty="0"/>
-                  <a:t>There is always an </a:t>
+                  <a:t>There always exists an </a:t>
                 </a:r>
                 <a:r>
                   <a:rPr lang="en-US" b="1" dirty="0"/>
@@ -19144,7 +20545,7 @@
               <a:p>
                 <a:r>
                   <a:rPr lang="en-US" dirty="0"/>
-                  <a:t>Since</a:t>
+                  <a:t>Since it directly depends on the optimal value function</a:t>
                 </a:r>
               </a:p>
               <a:p>
@@ -19486,10 +20887,25 @@
                 </a14:m>
                 <a:endParaRPr lang="en-US" dirty="0"/>
               </a:p>
+              <a:p>
+                <a:pPr/>
+                <a:endParaRPr lang="en-US" dirty="0"/>
+              </a:p>
+              <a:p>
+                <a:pPr/>
+                <a:r>
+                  <a:rPr lang="en-US" dirty="0"/>
+                  <a:t>If we know for each state what the best action is (has the highest Q-value), then we will always choose that action. </a:t>
+                </a:r>
+                <a:r>
+                  <a:rPr lang="en-US" b="1" dirty="0"/>
+                  <a:t>MDPs always have an optimal deterministic policy!</a:t>
+                </a:r>
+              </a:p>
             </p:txBody>
           </p:sp>
         </mc:Choice>
-        <mc:Fallback xmlns="">
+        <mc:Fallback>
           <p:sp>
             <p:nvSpPr>
               <p:cNvPr id="3" name="Content Placeholder 2">
@@ -19510,7 +20926,7 @@
               <a:blipFill>
                 <a:blip r:embed="rId2"/>
                 <a:stretch>
-                  <a:fillRect l="-696" t="-2551" r="-1043"/>
+                  <a:fillRect l="-406" t="-1913"/>
                 </a:stretch>
               </a:blipFill>
             </p:spPr>
@@ -19543,7 +20959,7 @@
         </p:nvSpPr>
         <p:spPr>
           <a:xfrm>
-            <a:off x="6027488" y="5557708"/>
+            <a:off x="5858155" y="4766337"/>
             <a:ext cx="998290" cy="436227"/>
           </a:xfrm>
           <a:prstGeom prst="rect">
@@ -19596,7 +21012,7 @@
 </p:sld>
 </file>
 
-<file path=ppt/slides/slide24.xml><?xml version="1.0" encoding="utf-8"?>
+<file path=ppt/slides/slide25.xml><?xml version="1.0" encoding="utf-8"?>
 <p:sld xmlns:a="http://schemas.openxmlformats.org/drawingml/2006/main" xmlns:r="http://schemas.openxmlformats.org/officeDocument/2006/relationships" xmlns:p="http://schemas.openxmlformats.org/presentationml/2006/main">
   <p:cSld>
     <p:spTree>
@@ -21869,7 +23285,7 @@
 </p:sld>
 </file>
 
-<file path=ppt/slides/slide25.xml><?xml version="1.0" encoding="utf-8"?>
+<file path=ppt/slides/slide26.xml><?xml version="1.0" encoding="utf-8"?>
 <p:sld xmlns:a="http://schemas.openxmlformats.org/drawingml/2006/main" xmlns:r="http://schemas.openxmlformats.org/officeDocument/2006/relationships" xmlns:p="http://schemas.openxmlformats.org/presentationml/2006/main">
   <p:cSld>
     <p:spTree>
@@ -22416,7 +23832,7 @@
 </p:sld>
 </file>
 
-<file path=ppt/slides/slide26.xml><?xml version="1.0" encoding="utf-8"?>
+<file path=ppt/slides/slide27.xml><?xml version="1.0" encoding="utf-8"?>
 <p:sld xmlns:a="http://schemas.openxmlformats.org/drawingml/2006/main" xmlns:r="http://schemas.openxmlformats.org/officeDocument/2006/relationships" xmlns:p="http://schemas.openxmlformats.org/presentationml/2006/main">
   <p:cSld>
     <p:bg>
@@ -22593,8 +24009,8 @@
           </a:extLst>
         </p:spPr>
       </p:pic>
-      <mc:AlternateContent xmlns:mc="http://schemas.openxmlformats.org/markup-compatibility/2006" xmlns:a14="http://schemas.microsoft.com/office/drawing/2010/main">
-        <mc:Choice Requires="a14">
+      <mc:AlternateContent xmlns:mc="http://schemas.openxmlformats.org/markup-compatibility/2006">
+        <mc:Choice xmlns:a14="http://schemas.microsoft.com/office/drawing/2010/main" Requires="a14">
           <p:sp>
             <p:nvSpPr>
               <p:cNvPr id="3" name="Content Placeholder 2">
@@ -22619,7 +24035,7 @@
             </p:spPr>
             <p:txBody>
               <a:bodyPr anchor="ctr">
-                <a:normAutofit/>
+                <a:normAutofit lnSpcReduction="10000"/>
               </a:bodyPr>
               <a:lstStyle/>
               <a:p>
@@ -22733,9 +24149,23 @@
                 <a:pPr lvl="1"/>
                 <a:r>
                   <a:rPr lang="en-US" sz="1600" dirty="0"/>
-                  <a:t>Recursive relationship between state values</a:t>
+                  <a:t>Recursive relationship between state values.</a:t>
                 </a:r>
-                <a:endParaRPr lang="en-US" sz="1600" b="1" dirty="0"/>
+              </a:p>
+              <a:p>
+                <a:pPr lvl="1"/>
+                <a:r>
+                  <a:rPr lang="en-US" sz="1600" dirty="0"/>
+                  <a:t>MDPs always have an </a:t>
+                </a:r>
+                <a:r>
+                  <a:rPr lang="en-US" sz="1600" b="1" dirty="0"/>
+                  <a:t>optimal deterministic policy</a:t>
+                </a:r>
+                <a:r>
+                  <a:rPr lang="en-US" sz="1600" dirty="0"/>
+                  <a:t>.</a:t>
+                </a:r>
               </a:p>
               <a:p>
                 <a:pPr marL="0" indent="0">
@@ -22890,7 +24320,7 @@
             </p:txBody>
           </p:sp>
         </mc:Choice>
-        <mc:Fallback xmlns="">
+        <mc:Fallback>
           <p:sp>
             <p:nvSpPr>
               <p:cNvPr id="3" name="Content Placeholder 2">
@@ -22915,7 +24345,7 @@
               <a:blipFill>
                 <a:blip r:embed="rId3"/>
                 <a:stretch>
-                  <a:fillRect l="-665" t="-780" b="-1449"/>
+                  <a:fillRect l="-665" t="-1115" b="-1338"/>
                 </a:stretch>
               </a:blipFill>
             </p:spPr>
@@ -25801,8 +27231,8 @@
           </a:p>
         </p:txBody>
       </p:sp>
-      <mc:AlternateContent xmlns:mc="http://schemas.openxmlformats.org/markup-compatibility/2006">
-        <mc:Choice xmlns:a14="http://schemas.microsoft.com/office/drawing/2010/main" Requires="a14">
+      <mc:AlternateContent xmlns:mc="http://schemas.openxmlformats.org/markup-compatibility/2006" xmlns:a14="http://schemas.microsoft.com/office/drawing/2010/main">
+        <mc:Choice Requires="a14">
           <p:sp>
             <p:nvSpPr>
               <p:cNvPr id="3" name="Content Placeholder 2">
@@ -26530,7 +27960,7 @@
             </p:txBody>
           </p:sp>
         </mc:Choice>
-        <mc:Fallback>
+        <mc:Fallback xmlns="">
           <p:sp>
             <p:nvSpPr>
               <p:cNvPr id="3" name="Content Placeholder 2">
@@ -26711,8 +28141,8 @@
           </a:p>
         </p:txBody>
       </p:sp>
-      <mc:AlternateContent xmlns:mc="http://schemas.openxmlformats.org/markup-compatibility/2006">
-        <mc:Choice xmlns:a14="http://schemas.microsoft.com/office/drawing/2010/main" Requires="a14">
+      <mc:AlternateContent xmlns:mc="http://schemas.openxmlformats.org/markup-compatibility/2006" xmlns:a14="http://schemas.microsoft.com/office/drawing/2010/main">
+        <mc:Choice Requires="a14">
           <p:sp>
             <p:nvSpPr>
               <p:cNvPr id="3" name="Content Placeholder 2">
@@ -28156,7 +29586,7 @@
             </p:txBody>
           </p:sp>
         </mc:Choice>
-        <mc:Fallback>
+        <mc:Fallback xmlns="">
           <p:sp>
             <p:nvSpPr>
               <p:cNvPr id="3" name="Content Placeholder 2">
@@ -28260,8 +29690,8 @@
           </a:p>
         </p:txBody>
       </p:sp>
-      <mc:AlternateContent xmlns:mc="http://schemas.openxmlformats.org/markup-compatibility/2006">
-        <mc:Choice xmlns:a14="http://schemas.microsoft.com/office/drawing/2010/main" Requires="a14">
+      <mc:AlternateContent xmlns:mc="http://schemas.openxmlformats.org/markup-compatibility/2006" xmlns:a14="http://schemas.microsoft.com/office/drawing/2010/main">
+        <mc:Choice Requires="a14">
           <p:sp>
             <p:nvSpPr>
               <p:cNvPr id="3" name="Content Placeholder 2">
@@ -28748,7 +30178,7 @@
             </p:txBody>
           </p:sp>
         </mc:Choice>
-        <mc:Fallback>
+        <mc:Fallback xmlns="">
           <p:sp>
             <p:nvSpPr>
               <p:cNvPr id="3" name="Content Placeholder 2">
@@ -32938,8 +34368,8 @@
           </mc:Fallback>
         </mc:AlternateContent>
       </p:grpSp>
-      <mc:AlternateContent xmlns:mc="http://schemas.openxmlformats.org/markup-compatibility/2006">
-        <mc:Choice xmlns:a14="http://schemas.microsoft.com/office/drawing/2010/main" Requires="a14">
+      <mc:AlternateContent xmlns:mc="http://schemas.openxmlformats.org/markup-compatibility/2006" xmlns:a14="http://schemas.microsoft.com/office/drawing/2010/main">
+        <mc:Choice Requires="a14">
           <p:graphicFrame>
             <p:nvGraphicFramePr>
               <p:cNvPr id="7" name="Table 6">
@@ -34437,7 +35867,7 @@
             </a:graphic>
           </p:graphicFrame>
         </mc:Choice>
-        <mc:Fallback>
+        <mc:Fallback xmlns="">
           <p:graphicFrame>
             <p:nvGraphicFramePr>
               <p:cNvPr id="7" name="Table 6">
@@ -35155,8 +36585,8 @@
           </p:graphicFrame>
         </mc:Fallback>
       </mc:AlternateContent>
-      <mc:AlternateContent xmlns:mc="http://schemas.openxmlformats.org/markup-compatibility/2006">
-        <mc:Choice xmlns:a14="http://schemas.microsoft.com/office/drawing/2010/main" Requires="a14">
+      <mc:AlternateContent xmlns:mc="http://schemas.openxmlformats.org/markup-compatibility/2006" xmlns:a14="http://schemas.microsoft.com/office/drawing/2010/main">
+        <mc:Choice Requires="a14">
           <p:graphicFrame>
             <p:nvGraphicFramePr>
               <p:cNvPr id="11" name="Table 10">
@@ -35764,7 +37194,7 @@
             </a:graphic>
           </p:graphicFrame>
         </mc:Choice>
-        <mc:Fallback>
+        <mc:Fallback xmlns="">
           <p:graphicFrame>
             <p:nvGraphicFramePr>
               <p:cNvPr id="11" name="Table 10">
@@ -39889,8 +41319,8 @@
           </a:p>
         </p:txBody>
       </p:sp>
-      <mc:AlternateContent xmlns:mc="http://schemas.openxmlformats.org/markup-compatibility/2006">
-        <mc:Choice xmlns:a14="http://schemas.microsoft.com/office/drawing/2010/main" Requires="a14">
+      <mc:AlternateContent xmlns:mc="http://schemas.openxmlformats.org/markup-compatibility/2006" xmlns:a14="http://schemas.microsoft.com/office/drawing/2010/main">
+        <mc:Choice Requires="a14">
           <p:sp>
             <p:nvSpPr>
               <p:cNvPr id="26" name="TextBox 25">
@@ -39941,7 +41371,7 @@
             </p:txBody>
           </p:sp>
         </mc:Choice>
-        <mc:Fallback>
+        <mc:Fallback xmlns="">
           <p:sp>
             <p:nvSpPr>
               <p:cNvPr id="26" name="TextBox 25">
@@ -40021,8 +41451,8 @@
           </a:p>
         </p:txBody>
       </p:sp>
-      <mc:AlternateContent xmlns:mc="http://schemas.openxmlformats.org/markup-compatibility/2006">
-        <mc:Choice xmlns:a14="http://schemas.microsoft.com/office/drawing/2010/main" Requires="a14">
+      <mc:AlternateContent xmlns:mc="http://schemas.openxmlformats.org/markup-compatibility/2006" xmlns:a14="http://schemas.microsoft.com/office/drawing/2010/main">
+        <mc:Choice Requires="a14">
           <p:sp>
             <p:nvSpPr>
               <p:cNvPr id="31" name="TextBox 30">
@@ -40069,7 +41499,7 @@
             </p:txBody>
           </p:sp>
         </mc:Choice>
-        <mc:Fallback>
+        <mc:Fallback xmlns="">
           <p:sp>
             <p:nvSpPr>
               <p:cNvPr id="31" name="TextBox 30">
@@ -40425,8 +41855,8 @@
           </a:prstGeom>
         </p:spPr>
       </p:pic>
-      <mc:AlternateContent xmlns:mc="http://schemas.openxmlformats.org/markup-compatibility/2006">
-        <mc:Choice xmlns:a14="http://schemas.microsoft.com/office/drawing/2010/main" Requires="a14">
+      <mc:AlternateContent xmlns:mc="http://schemas.openxmlformats.org/markup-compatibility/2006" xmlns:a14="http://schemas.microsoft.com/office/drawing/2010/main">
+        <mc:Choice Requires="a14">
           <p:sp>
             <p:nvSpPr>
               <p:cNvPr id="4" name="TextBox 3">
@@ -40638,7 +42068,7 @@
             </p:txBody>
           </p:sp>
         </mc:Choice>
-        <mc:Fallback>
+        <mc:Fallback xmlns="">
           <p:sp>
             <p:nvSpPr>
               <p:cNvPr id="4" name="TextBox 3">
@@ -41211,8 +42641,8 @@
           </a:p>
         </p:txBody>
       </p:sp>
-      <mc:AlternateContent xmlns:mc="http://schemas.openxmlformats.org/markup-compatibility/2006">
-        <mc:Choice xmlns:a14="http://schemas.microsoft.com/office/drawing/2010/main" Requires="a14">
+      <mc:AlternateContent xmlns:mc="http://schemas.openxmlformats.org/markup-compatibility/2006" xmlns:a14="http://schemas.microsoft.com/office/drawing/2010/main">
+        <mc:Choice Requires="a14">
           <p:graphicFrame>
             <p:nvGraphicFramePr>
               <p:cNvPr id="6" name="Table 5">
@@ -42077,7 +43507,7 @@
             </a:graphic>
           </p:graphicFrame>
         </mc:Choice>
-        <mc:Fallback>
+        <mc:Fallback xmlns="">
           <p:graphicFrame>
             <p:nvGraphicFramePr>
               <p:cNvPr id="6" name="Table 5">
